--- a/docs/presentations/AX_Operations_Manual_v2.pptx
+++ b/docs/presentations/AX_Operations_Manual_v2.pptx
@@ -16971,7 +16971,7 @@
                 <a:ea typeface="Malgun Gothic" pitchFamily="34" charset="-122"/>
                 <a:cs typeface="Malgun Gothic" pitchFamily="34" charset="-120"/>
               </a:rPr>
-              <a:t>초기 비밀번호는 반드시 변경 — 상단 경고 배너가 사라질 때까지. 비밀번호 분실 시 관리자에게 재발급 요청</a:t>
+              <a:t>초기 비밀번호 상태에서는 변경 화면 외에 아무 화면도 열리지 않습니다(강제 변경). 분실 시 관리자 재발급 — 재발급 즉시 이전 로그인은 전부 끊깁니다</a:t>
             </a:r>
             <a:endParaRPr lang="en-US" sz="1200" dirty="0"/>
           </a:p>
@@ -17037,7 +17037,7 @@
                 <a:ea typeface="Malgun Gothic" pitchFamily="34" charset="-122"/>
                 <a:cs typeface="Malgun Gothic" pitchFamily="34" charset="-120"/>
               </a:rPr>
-              <a:t>잠금 정책
+              <a:t>잠금·세션 정책
 </a:t>
             </a:r>
             <a:pPr indent="0" marL="0">
@@ -17052,7 +17052,7 @@
                 <a:ea typeface="Malgun Gothic" pitchFamily="34" charset="-122"/>
                 <a:cs typeface="Malgun Gothic" pitchFamily="34" charset="-120"/>
               </a:rPr>
-              <a:t>비밀번호 5회 연속 오류 → 15분 잠금(관리자가 계정 관리에서 즉시 해제 가능). 잠금 발생은 경보로 기록</a:t>
+              <a:t>5회 연속 오류 → 15분 잠금(관리자 즉시 해제 가능) · 로그인 유지 12시간 후 자동 재로그인 · 비밀번호 변경 시 모든 기기에서 재로그인 필요</a:t>
             </a:r>
             <a:endParaRPr lang="en-US" sz="1200" dirty="0"/>
           </a:p>

--- a/docs/presentations/AX_Operations_Manual_v2.pptx
+++ b/docs/presentations/AX_Operations_Manual_v2.pptx
@@ -29,9 +29,12 @@
     <p:sldId id="277" r:id="rId23"/>
     <p:sldId id="278" r:id="rId24"/>
     <p:sldId id="279" r:id="rId25"/>
+    <p:sldId id="280" r:id="rId26"/>
+    <p:sldId id="281" r:id="rId27"/>
+    <p:sldId id="282" r:id="rId28"/>
   </p:sldIdLst>
   <p:notesMasterIdLst>
-    <p:notesMasterId r:id="rId26"/>
+    <p:notesMasterId r:id="rId29"/>
   </p:notesMasterIdLst>
   <p:sldSz cx="12188952" cy="6858000"/>
   <p:notesSz cx="6858000" cy="12188952"/>
@@ -1957,6 +1960,270 @@
             <a:fld id="{F7021451-1387-4CA6-816F-3879F97B5CBC}" type="slidenum">
               <a:rPr lang="en-US"/>
               <a:t>24</a:t>
+            </a:fld>
+            <a:endParaRPr lang="en-US"/>
+          </a:p>
+        </p:txBody>
+      </p:sp>
+    </p:spTree>
+    <p:extLst>
+      <p:ext uri="{BB962C8B-B14F-4D97-AF65-F5344CB8AC3E}">
+        <p14:creationId xmlns:p14="http://schemas.microsoft.com/office/powerpoint/2010/main" val="1024086991"/>
+      </p:ext>
+    </p:extLst>
+  </p:cSld>
+  <p:clrMapOvr>
+    <a:masterClrMapping/>
+  </p:clrMapOvr>
+</p:notes>
+</file>
+
+<file path=ppt/notesSlides/notesSlide25.xml><?xml version="1.0" encoding="utf-8"?>
+<p:notes xmlns:a="http://schemas.openxmlformats.org/drawingml/2006/main" xmlns:r="http://schemas.openxmlformats.org/officeDocument/2006/relationships" xmlns:p="http://schemas.openxmlformats.org/presentationml/2006/main">
+  <p:cSld>
+    <p:spTree>
+      <p:nvGrpSpPr>
+        <p:cNvPr id="1" name=""/>
+        <p:cNvGrpSpPr/>
+        <p:nvPr/>
+      </p:nvGrpSpPr>
+      <p:grpSpPr>
+        <a:xfrm>
+          <a:off x="0" y="0"/>
+          <a:ext cx="0" cy="0"/>
+          <a:chOff x="0" y="0"/>
+          <a:chExt cx="0" cy="0"/>
+        </a:xfrm>
+      </p:grpSpPr>
+      <p:sp>
+        <p:nvSpPr>
+          <p:cNvPr id="2" name="Slide Image Placeholder 1"/>
+          <p:cNvSpPr>
+            <a:spLocks noGrp="1" noRot="1" noChangeAspect="1"/>
+          </p:cNvSpPr>
+          <p:nvPr>
+            <p:ph type="sldImg"/>
+          </p:nvPr>
+        </p:nvSpPr>
+        <p:spPr/>
+      </p:sp>
+      <p:sp>
+        <p:nvSpPr>
+          <p:cNvPr id="3" name="Notes Placeholder 2"/>
+          <p:cNvSpPr>
+            <a:spLocks noGrp="1"/>
+          </p:cNvSpPr>
+          <p:nvPr>
+            <p:ph type="body" idx="1"/>
+          </p:nvPr>
+        </p:nvSpPr>
+        <p:spPr/>
+        <p:txBody>
+          <a:bodyPr/>
+          <a:lstStyle/>
+          <a:p>
+            <a:r>
+              <a:rPr lang="en-US" dirty="0"/>
+              <a:t/>
+            </a:r>
+            <a:endParaRPr lang="en-US" dirty="0"/>
+          </a:p>
+        </p:txBody>
+      </p:sp>
+      <p:sp>
+        <p:nvSpPr>
+          <p:cNvPr id="4" name="Slide Number Placeholder 3"/>
+          <p:cNvSpPr>
+            <a:spLocks noGrp="1"/>
+          </p:cNvSpPr>
+          <p:nvPr>
+            <p:ph type="sldNum" sz="quarter" idx="10"/>
+          </p:nvPr>
+        </p:nvSpPr>
+        <p:spPr/>
+        <p:txBody>
+          <a:bodyPr/>
+          <a:lstStyle/>
+          <a:p>
+            <a:fld id="{F7021451-1387-4CA6-816F-3879F97B5CBC}" type="slidenum">
+              <a:rPr lang="en-US"/>
+              <a:t>25</a:t>
+            </a:fld>
+            <a:endParaRPr lang="en-US"/>
+          </a:p>
+        </p:txBody>
+      </p:sp>
+    </p:spTree>
+    <p:extLst>
+      <p:ext uri="{BB962C8B-B14F-4D97-AF65-F5344CB8AC3E}">
+        <p14:creationId xmlns:p14="http://schemas.microsoft.com/office/powerpoint/2010/main" val="1024086991"/>
+      </p:ext>
+    </p:extLst>
+  </p:cSld>
+  <p:clrMapOvr>
+    <a:masterClrMapping/>
+  </p:clrMapOvr>
+</p:notes>
+</file>
+
+<file path=ppt/notesSlides/notesSlide26.xml><?xml version="1.0" encoding="utf-8"?>
+<p:notes xmlns:a="http://schemas.openxmlformats.org/drawingml/2006/main" xmlns:r="http://schemas.openxmlformats.org/officeDocument/2006/relationships" xmlns:p="http://schemas.openxmlformats.org/presentationml/2006/main">
+  <p:cSld>
+    <p:spTree>
+      <p:nvGrpSpPr>
+        <p:cNvPr id="1" name=""/>
+        <p:cNvGrpSpPr/>
+        <p:nvPr/>
+      </p:nvGrpSpPr>
+      <p:grpSpPr>
+        <a:xfrm>
+          <a:off x="0" y="0"/>
+          <a:ext cx="0" cy="0"/>
+          <a:chOff x="0" y="0"/>
+          <a:chExt cx="0" cy="0"/>
+        </a:xfrm>
+      </p:grpSpPr>
+      <p:sp>
+        <p:nvSpPr>
+          <p:cNvPr id="2" name="Slide Image Placeholder 1"/>
+          <p:cNvSpPr>
+            <a:spLocks noGrp="1" noRot="1" noChangeAspect="1"/>
+          </p:cNvSpPr>
+          <p:nvPr>
+            <p:ph type="sldImg"/>
+          </p:nvPr>
+        </p:nvSpPr>
+        <p:spPr/>
+      </p:sp>
+      <p:sp>
+        <p:nvSpPr>
+          <p:cNvPr id="3" name="Notes Placeholder 2"/>
+          <p:cNvSpPr>
+            <a:spLocks noGrp="1"/>
+          </p:cNvSpPr>
+          <p:nvPr>
+            <p:ph type="body" idx="1"/>
+          </p:nvPr>
+        </p:nvSpPr>
+        <p:spPr/>
+        <p:txBody>
+          <a:bodyPr/>
+          <a:lstStyle/>
+          <a:p>
+            <a:r>
+              <a:rPr lang="en-US" dirty="0"/>
+              <a:t/>
+            </a:r>
+            <a:endParaRPr lang="en-US" dirty="0"/>
+          </a:p>
+        </p:txBody>
+      </p:sp>
+      <p:sp>
+        <p:nvSpPr>
+          <p:cNvPr id="4" name="Slide Number Placeholder 3"/>
+          <p:cNvSpPr>
+            <a:spLocks noGrp="1"/>
+          </p:cNvSpPr>
+          <p:nvPr>
+            <p:ph type="sldNum" sz="quarter" idx="10"/>
+          </p:nvPr>
+        </p:nvSpPr>
+        <p:spPr/>
+        <p:txBody>
+          <a:bodyPr/>
+          <a:lstStyle/>
+          <a:p>
+            <a:fld id="{F7021451-1387-4CA6-816F-3879F97B5CBC}" type="slidenum">
+              <a:rPr lang="en-US"/>
+              <a:t>26</a:t>
+            </a:fld>
+            <a:endParaRPr lang="en-US"/>
+          </a:p>
+        </p:txBody>
+      </p:sp>
+    </p:spTree>
+    <p:extLst>
+      <p:ext uri="{BB962C8B-B14F-4D97-AF65-F5344CB8AC3E}">
+        <p14:creationId xmlns:p14="http://schemas.microsoft.com/office/powerpoint/2010/main" val="1024086991"/>
+      </p:ext>
+    </p:extLst>
+  </p:cSld>
+  <p:clrMapOvr>
+    <a:masterClrMapping/>
+  </p:clrMapOvr>
+</p:notes>
+</file>
+
+<file path=ppt/notesSlides/notesSlide27.xml><?xml version="1.0" encoding="utf-8"?>
+<p:notes xmlns:a="http://schemas.openxmlformats.org/drawingml/2006/main" xmlns:r="http://schemas.openxmlformats.org/officeDocument/2006/relationships" xmlns:p="http://schemas.openxmlformats.org/presentationml/2006/main">
+  <p:cSld>
+    <p:spTree>
+      <p:nvGrpSpPr>
+        <p:cNvPr id="1" name=""/>
+        <p:cNvGrpSpPr/>
+        <p:nvPr/>
+      </p:nvGrpSpPr>
+      <p:grpSpPr>
+        <a:xfrm>
+          <a:off x="0" y="0"/>
+          <a:ext cx="0" cy="0"/>
+          <a:chOff x="0" y="0"/>
+          <a:chExt cx="0" cy="0"/>
+        </a:xfrm>
+      </p:grpSpPr>
+      <p:sp>
+        <p:nvSpPr>
+          <p:cNvPr id="2" name="Slide Image Placeholder 1"/>
+          <p:cNvSpPr>
+            <a:spLocks noGrp="1" noRot="1" noChangeAspect="1"/>
+          </p:cNvSpPr>
+          <p:nvPr>
+            <p:ph type="sldImg"/>
+          </p:nvPr>
+        </p:nvSpPr>
+        <p:spPr/>
+      </p:sp>
+      <p:sp>
+        <p:nvSpPr>
+          <p:cNvPr id="3" name="Notes Placeholder 2"/>
+          <p:cNvSpPr>
+            <a:spLocks noGrp="1"/>
+          </p:cNvSpPr>
+          <p:nvPr>
+            <p:ph type="body" idx="1"/>
+          </p:nvPr>
+        </p:nvSpPr>
+        <p:spPr/>
+        <p:txBody>
+          <a:bodyPr/>
+          <a:lstStyle/>
+          <a:p>
+            <a:r>
+              <a:rPr lang="en-US" dirty="0"/>
+              <a:t/>
+            </a:r>
+            <a:endParaRPr lang="en-US" dirty="0"/>
+          </a:p>
+        </p:txBody>
+      </p:sp>
+      <p:sp>
+        <p:nvSpPr>
+          <p:cNvPr id="4" name="Slide Number Placeholder 3"/>
+          <p:cNvSpPr>
+            <a:spLocks noGrp="1"/>
+          </p:cNvSpPr>
+          <p:nvPr>
+            <p:ph type="sldNum" sz="quarter" idx="10"/>
+          </p:nvPr>
+        </p:nvSpPr>
+        <p:spPr/>
+        <p:txBody>
+          <a:bodyPr/>
+          <a:lstStyle/>
+          <a:p>
+            <a:fld id="{F7021451-1387-4CA6-816F-3879F97B5CBC}" type="slidenum">
+              <a:rPr lang="en-US"/>
+              <a:t>27</a:t>
             </a:fld>
             <a:endParaRPr lang="en-US"/>
           </a:p>
@@ -2994,7 +3261,7 @@
                 <a:ea typeface="Malgun Gothic" pitchFamily="34" charset="-122"/>
                 <a:cs typeface="Malgun Gothic" pitchFamily="34" charset="-120"/>
               </a:rPr>
-              <a:t>표준 운영매뉴얼 v2.0</a:t>
+              <a:t>표준 운영매뉴얼 v2.1</a:t>
             </a:r>
             <a:endParaRPr lang="en-US" sz="4400" dirty="0"/>
           </a:p>
@@ -3092,7 +3359,7 @@
                 <a:ea typeface="Malgun Gothic" pitchFamily="34" charset="-122"/>
                 <a:cs typeface="Malgun Gothic" pitchFamily="34" charset="-120"/>
               </a:rPr>
-              <a:t>v2.0 갱신: </a:t>
+              <a:t>v2.1 갱신: </a:t>
             </a:r>
             <a:pPr indent="0" marL="0">
               <a:buNone/>
@@ -3106,7 +3373,7 @@
                 <a:ea typeface="Malgun Gothic" pitchFamily="34" charset="-122"/>
                 <a:cs typeface="Malgun Gothic" pitchFamily="34" charset="-120"/>
               </a:rPr>
-              <a:t>4단계까지 추가된 6개 화면(자료 반입·온보딩 설정·계정 관리·배치 실행·Odoo 연결·서비스 상태)과 하드웨어/소프트웨어 구성도, 표준 운영 일과를 반영했습니다. 화면은 전부 실제 구동 캡처이며 수치는 합성 샘플입니다.</a:t>
+              <a:t>6단계 상용 화면 3종(과금·체험 신청 관리·체험 신청 폼)을 추가하고 배치 실행(에이전트·재학습 상태)과 서비스 상태(데이터 정합 신호) 화면을 최신 캡처로 갱신했습니다. 화면은 전부 실제 구동 캡처이며 수치는 합성 샘플입니다.</a:t>
             </a:r>
             <a:endParaRPr lang="en-US" sz="1400" dirty="0"/>
           </a:p>
@@ -3145,7 +3412,7 @@
                 <a:ea typeface="Malgun Gothic" pitchFamily="34" charset="-122"/>
                 <a:cs typeface="Malgun Gothic" pitchFamily="34" charset="-120"/>
               </a:rPr>
-              <a:t>에이에스씨(ASC) · 이형근 · v2.0 · 2026. 9. 11</a:t>
+              <a:t>에이에스씨(ASC) · 이형근 · v2.1 · 2026. 9. 12</a:t>
             </a:r>
             <a:endParaRPr lang="en-US" sz="1300" dirty="0"/>
           </a:p>
@@ -7159,7 +7426,7 @@
                 <a:ea typeface="Malgun Gothic" pitchFamily="34" charset="-122"/>
                 <a:cs typeface="Malgun Gothic" pitchFamily="34" charset="-120"/>
               </a:rPr>
-              <a:t>체험 신청 메일 확인 → 여기서 계정 생성 → 임시 비밀번호를 회신 (승인제)</a:t>
+              <a:t>웹 신청은 '체험 신청 관리' 화면에서 발급 — 메일 신청은 여기서 계정 생성 후 회신 (둘 다 승인제)</a:t>
             </a:r>
             <a:endParaRPr lang="en-US" sz="1200" dirty="0"/>
           </a:p>
@@ -7413,11 +7680,11 @@
         <p:spPr>
           <a:xfrm>
             <a:off x="8723376" y="1810512"/>
-            <a:ext cx="3145536" cy="1207008"/>
+            <a:ext cx="3145536" cy="1033272"/>
           </a:xfrm>
           <a:prstGeom prst="roundRect">
             <a:avLst>
-              <a:gd name="adj" fmla="val 4545"/>
+              <a:gd name="adj" fmla="val 5310"/>
             </a:avLst>
           </a:prstGeom>
           <a:solidFill>
@@ -7440,7 +7707,7 @@
         <p:spPr>
           <a:xfrm>
             <a:off x="8814816" y="1856232"/>
-            <a:ext cx="2962656" cy="1115568"/>
+            <a:ext cx="2962656" cy="941832"/>
           </a:xfrm>
           <a:prstGeom prst="rect">
             <a:avLst/>
@@ -7493,12 +7760,12 @@
         </p:nvSpPr>
         <p:spPr>
           <a:xfrm>
-            <a:off x="8723376" y="3136392"/>
-            <a:ext cx="3145536" cy="1207008"/>
+            <a:off x="8723376" y="2962656"/>
+            <a:ext cx="3145536" cy="1033272"/>
           </a:xfrm>
           <a:prstGeom prst="roundRect">
             <a:avLst>
-              <a:gd name="adj" fmla="val 4545"/>
+              <a:gd name="adj" fmla="val 5310"/>
             </a:avLst>
           </a:prstGeom>
           <a:solidFill>
@@ -7520,8 +7787,8 @@
         </p:nvSpPr>
         <p:spPr>
           <a:xfrm>
-            <a:off x="8814816" y="3182112"/>
-            <a:ext cx="2962656" cy="1115568"/>
+            <a:off x="8814816" y="3008376"/>
+            <a:ext cx="2962656" cy="941832"/>
           </a:xfrm>
           <a:prstGeom prst="rect">
             <a:avLst/>
@@ -7574,12 +7841,12 @@
         </p:nvSpPr>
         <p:spPr>
           <a:xfrm>
-            <a:off x="8723376" y="4462272"/>
-            <a:ext cx="3145536" cy="1207008"/>
+            <a:off x="8723376" y="4114800"/>
+            <a:ext cx="3145536" cy="1033272"/>
           </a:xfrm>
           <a:prstGeom prst="roundRect">
             <a:avLst>
-              <a:gd name="adj" fmla="val 4545"/>
+              <a:gd name="adj" fmla="val 5310"/>
             </a:avLst>
           </a:prstGeom>
           <a:solidFill>
@@ -7601,8 +7868,8 @@
         </p:nvSpPr>
         <p:spPr>
           <a:xfrm>
-            <a:off x="8814816" y="4507992"/>
-            <a:ext cx="2962656" cy="1115568"/>
+            <a:off x="8814816" y="4160520"/>
+            <a:ext cx="2962656" cy="941832"/>
           </a:xfrm>
           <a:prstGeom prst="rect">
             <a:avLst/>
@@ -7642,6 +7909,87 @@
                 <a:cs typeface="Malgun Gothic" pitchFamily="34" charset="-120"/>
               </a:rPr>
               <a:t>수 분(데이터량에 따라) — 완료는 이력 새로고침으로 확인</a:t>
+            </a:r>
+            <a:endParaRPr lang="en-US" sz="1200" dirty="0"/>
+          </a:p>
+        </p:txBody>
+      </p:sp>
+      <p:sp>
+        <p:nvSpPr>
+          <p:cNvPr id="14" name="Shape 11"/>
+          <p:cNvSpPr/>
+          <p:nvPr/>
+        </p:nvSpPr>
+        <p:spPr>
+          <a:xfrm>
+            <a:off x="8723376" y="5266944"/>
+            <a:ext cx="3145536" cy="1033272"/>
+          </a:xfrm>
+          <a:prstGeom prst="roundRect">
+            <a:avLst>
+              <a:gd name="adj" fmla="val 5310"/>
+            </a:avLst>
+          </a:prstGeom>
+          <a:solidFill>
+            <a:srgbClr val="FFFFFF"/>
+          </a:solidFill>
+          <a:ln w="12700">
+            <a:solidFill>
+              <a:srgbClr val="DCCDBB"/>
+            </a:solidFill>
+            <a:prstDash val="solid"/>
+          </a:ln>
+        </p:spPr>
+      </p:sp>
+      <p:sp>
+        <p:nvSpPr>
+          <p:cNvPr id="15" name="Text 12"/>
+          <p:cNvSpPr/>
+          <p:nvPr/>
+        </p:nvSpPr>
+        <p:spPr>
+          <a:xfrm>
+            <a:off x="8814816" y="5312664"/>
+            <a:ext cx="2962656" cy="941832"/>
+          </a:xfrm>
+          <a:prstGeom prst="rect">
+            <a:avLst/>
+          </a:prstGeom>
+          <a:noFill/>
+          <a:ln/>
+        </p:spPr>
+        <p:txBody>
+          <a:bodyPr wrap="square" rtlCol="0" anchor="t"/>
+          <a:lstStyle/>
+          <a:p>
+            <a:pPr indent="0" marL="0">
+              <a:buNone/>
+            </a:pPr>
+            <a:r>
+              <a:rPr lang="en-US" sz="1200" b="1" dirty="0">
+                <a:solidFill>
+                  <a:srgbClr val="6E3A1C"/>
+                </a:solidFill>
+                <a:latin typeface="Malgun Gothic" pitchFamily="34" charset="0"/>
+                <a:ea typeface="Malgun Gothic" pitchFamily="34" charset="-122"/>
+                <a:cs typeface="Malgun Gothic" pitchFamily="34" charset="-120"/>
+              </a:rPr>
+              <a:t>상태 카드
+</a:t>
+            </a:r>
+            <a:pPr indent="0" marL="0">
+              <a:buNone/>
+            </a:pPr>
+            <a:r>
+              <a:rPr lang="en-US" sz="1050" dirty="0">
+                <a:solidFill>
+                  <a:srgbClr val="2E241C"/>
+                </a:solidFill>
+                <a:latin typeface="Malgun Gothic" pitchFamily="34" charset="0"/>
+                <a:ea typeface="Malgun Gothic" pitchFamily="34" charset="-122"/>
+                <a:cs typeface="Malgun Gothic" pitchFamily="34" charset="-120"/>
+              </a:rPr>
+              <a:t>아래 '에이전트 최근 상태'와 '재학습 이력'을 함께 봅니다 — '대기(학습 전)'는 정상(데이터 축적 후 시작), '실패'만 조치 대상</a:t>
             </a:r>
             <a:endParaRPr lang="en-US" sz="1200" dirty="0"/>
           </a:p>
@@ -8204,7 +8552,7 @@
                           <a:ea typeface="Malgun Gothic" pitchFamily="34" charset="-122"/>
                           <a:cs typeface="Malgun Gothic" pitchFamily="34" charset="-120"/>
                         </a:rPr>
-                        <a:t>통합 웹앱 16화면 · Odoo 승인함 애드온 · 배치/백업/장애 대응 — 체험판·정식 운영 공통</a:t>
+                        <a:t>통합 웹앱 19화면 · Odoo 승인함 애드온 · 배치/백업/장애 대응 — 체험판·정식 운영 공통</a:t>
                       </a:r>
                       <a:endParaRPr lang="en-US" sz="1250" dirty="0">
                         <a:latin typeface="Malgun Gothic" charset="0"/>
@@ -8342,7 +8690,7 @@
                           <a:ea typeface="Malgun Gothic" pitchFamily="34" charset="-122"/>
                           <a:cs typeface="Malgun Gothic" pitchFamily="34" charset="-120"/>
                         </a:rPr>
-                        <a:t>v1.0 2026-09 최초(11화면) → v2.0 2026-09-11 4단계 반영(화면 16종·구성도·운영 일과·장애 등급)</a:t>
+                        <a:t>v1.0 최초(11화면) → v2.0 2026-09-11 4단계 반영(16화면·구성도·일과·장애 등급) → v2.1 2026-09-12 6단계 반영(과금·체험 신청 3화면 추가)</a:t>
                       </a:r>
                       <a:endParaRPr lang="en-US" sz="1250" dirty="0">
                         <a:latin typeface="Malgun Gothic" charset="0"/>
@@ -9740,7 +10088,7 @@
                 <a:ea typeface="Malgun Gothic" pitchFamily="34" charset="-122"/>
                 <a:cs typeface="Malgun Gothic" pitchFamily="34" charset="-120"/>
               </a:rPr>
-              <a:t>Odoo 연결 마법사 — 붙기 전 검사</a:t>
+              <a:t>과금 — 구독과 청구</a:t>
             </a:r>
             <a:endParaRPr lang="en-US" sz="2700" dirty="0"/>
           </a:p>
@@ -9768,7 +10116,7 @@
       </p:sp>
       <p:pic>
         <p:nvPicPr>
-          <p:cNvPr id="6" name="Image 0" descr="/tmp/claude-0/-home-user-thirdbrain-web/bc639c69-a342-56eb-af6c-6a89fd170e25/scratchpad/shots_v2/connect.png">    </p:cNvPr>
+          <p:cNvPr id="6" name="Image 0" descr="/tmp/claude-0/-home-user-thirdbrain-web/bc639c69-a342-56eb-af6c-6a89fd170e25/scratchpad/shots_v2/billing.png">    </p:cNvPr>
           <p:cNvPicPr>
             <a:picLocks noChangeAspect="1"/>
           </p:cNvPicPr>
@@ -9896,7 +10244,7 @@
                 <a:ea typeface="Malgun Gothic" pitchFamily="34" charset="-122"/>
                 <a:cs typeface="Malgun Gothic" pitchFamily="34" charset="-120"/>
               </a:rPr>
-              <a:t>읽기 전용 검사
+              <a:t>플랜·상태
 </a:t>
             </a:r>
             <a:pPr indent="0" marL="0">
@@ -9911,7 +10259,7 @@
                 <a:ea typeface="Malgun Gothic" pitchFamily="34" charset="-122"/>
                 <a:cs typeface="Malgun Gothic" pitchFamily="34" charset="-120"/>
               </a:rPr>
-              <a:t>Odoo DB 접속 정보로 버전·설치 모듈·wal_level·복제 권한·대상 테이블 13종을 검사 — 원장에 쓰기 없음, 비밀번호 미저장</a:t>
+              <a:t>trial(무료)/standard/pilot 3플랜 — 상태는 정상→납기 경과→미납 잠금 순으로만 움직입니다(총 4주 유예)</a:t>
             </a:r>
             <a:endParaRPr lang="en-US" sz="1200" dirty="0"/>
           </a:p>
@@ -9977,7 +10325,7 @@
                 <a:ea typeface="Malgun Gothic" pitchFamily="34" charset="-122"/>
                 <a:cs typeface="Malgun Gothic" pitchFamily="34" charset="-120"/>
               </a:rPr>
-              <a:t>맞춤 SQL 생성
+              <a:t>월 청구
 </a:t>
             </a:r>
             <a:pPr indent="0" marL="0">
@@ -9992,7 +10340,7 @@
                 <a:ea typeface="Malgun Gothic" pitchFamily="34" charset="-122"/>
                 <a:cs typeface="Malgun Gothic" pitchFamily="34" charset="-120"/>
               </a:rPr>
-              <a:t>그 인스턴스에 존재하는 테이블만으로 발행(publication) SQL을 만들어 줌 — DBA가 복사·실행</a:t>
+              <a:t>매월 초 '발행' 한 번 — 이미 발행된 달은 그대로(멱등). 수납 확인 후 '수납 처리'로 기록</a:t>
             </a:r>
             <a:endParaRPr lang="en-US" sz="1200" dirty="0"/>
           </a:p>
@@ -10058,7 +10406,7 @@
                 <a:ea typeface="Malgun Gothic" pitchFamily="34" charset="-122"/>
                 <a:cs typeface="Malgun Gothic" pitchFamily="34" charset="-120"/>
               </a:rPr>
-              <a:t>다음 단계
+              <a:t>미납 잠금
 </a:t>
             </a:r>
             <a:pPr indent="0" marL="0">
@@ -10073,7 +10421,7 @@
                 <a:ea typeface="Malgun Gothic" pitchFamily="34" charset="-122"/>
                 <a:cs typeface="Malgun Gothic" pitchFamily="34" charset="-120"/>
               </a:rPr>
-              <a:t>구독 생성→매핑 뷰→정합 대조는 현장 체크리스트 C 절차대로 (엔지니어 동행 권장)</a:t>
+              <a:t>데이터를 지우지 않습니다 — 일반 사용자 로그인만 막고, 관리자는 들어와 수납·해제. 수납 즉시 원상복구</a:t>
             </a:r>
             <a:endParaRPr lang="en-US" sz="1200" dirty="0"/>
           </a:p>
@@ -10183,7 +10531,7 @@
                 <a:ea typeface="Malgun Gothic" pitchFamily="34" charset="-122"/>
                 <a:cs typeface="Malgun Gothic" pitchFamily="34" charset="-120"/>
               </a:rPr>
-              <a:t>5. ADMIN · 공개</a:t>
+              <a:t>5. ADMIN · 관리자</a:t>
             </a:r>
             <a:endParaRPr lang="en-US" sz="1200" dirty="0"/>
           </a:p>
@@ -10222,7 +10570,7 @@
                 <a:ea typeface="Malgun Gothic" pitchFamily="34" charset="-122"/>
                 <a:cs typeface="Malgun Gothic" pitchFamily="34" charset="-120"/>
               </a:rPr>
-              <a:t>서비스 상태 — 밖에서 보는 건강</a:t>
+              <a:t>체험 신청 관리 — 승인제 발급</a:t>
             </a:r>
             <a:endParaRPr lang="en-US" sz="2700" dirty="0"/>
           </a:p>
@@ -10250,7 +10598,7 @@
       </p:sp>
       <p:pic>
         <p:nvPicPr>
-          <p:cNvPr id="6" name="Image 0" descr="/tmp/claude-0/-home-user-thirdbrain-web/bc639c69-a342-56eb-af6c-6a89fd170e25/scratchpad/shots_v2/status.png">    </p:cNvPr>
+          <p:cNvPr id="6" name="Image 0" descr="/tmp/claude-0/-home-user-thirdbrain-web/bc639c69-a342-56eb-af6c-6a89fd170e25/scratchpad/shots_v2/signups.png">    </p:cNvPr>
           <p:cNvPicPr>
             <a:picLocks noChangeAspect="1"/>
           </p:cNvPicPr>
@@ -10378,7 +10726,7 @@
                 <a:ea typeface="Malgun Gothic" pitchFamily="34" charset="-122"/>
                 <a:cs typeface="Malgun Gothic" pitchFamily="34" charset="-120"/>
               </a:rPr>
-              <a:t>공개 페이지
+              <a:t>대기 목록
 </a:t>
             </a:r>
             <a:pPr indent="0" marL="0">
@@ -10393,7 +10741,7 @@
                 <a:ea typeface="Malgun Gothic" pitchFamily="34" charset="-122"/>
                 <a:cs typeface="Malgun Gothic" pitchFamily="34" charset="-120"/>
               </a:rPr>
-              <a:t>/status 는 로그인 없이 접근 — 웹앱·DB·야간 파이프라인 신호만 노출(데이터·계정 정보 없음)</a:t>
+              <a:t>웹 신청 폼으로 들어온 신청이 대기로 쌓입니다 — 발급 버튼 한 번에 체험 테넌트 생성 + 초기 계정 파일 경로 표시</a:t>
             </a:r>
             <a:endParaRPr lang="en-US" sz="1200" dirty="0"/>
           </a:p>
@@ -10459,7 +10807,7 @@
                 <a:ea typeface="Malgun Gothic" pitchFamily="34" charset="-122"/>
                 <a:cs typeface="Malgun Gothic" pitchFamily="34" charset="-120"/>
               </a:rPr>
-              <a:t>자동 감시
+              <a:t>승인제 기본
 </a:t>
             </a:r>
             <a:pPr indent="0" marL="0">
@@ -10474,7 +10822,88 @@
                 <a:ea typeface="Malgun Gothic" pitchFamily="34" charset="-122"/>
                 <a:cs typeface="Malgun Gothic" pitchFamily="34" charset="-120"/>
               </a:rPr>
-              <a:t>하트비트가 5분마다 검사 — 연속 2회 실패 시 관리자 휴대폰으로 다운 경보, 복구 시 복구 알림</a:t>
+              <a:t>자동 발급은 AXP_AUTO_ISSUE=1을 명시로 켠 경우에만 — 접수된 결정(초기 승인제)이 기본값입니다</a:t>
+            </a:r>
+            <a:endParaRPr lang="en-US" sz="1200" dirty="0"/>
+          </a:p>
+        </p:txBody>
+      </p:sp>
+      <p:sp>
+        <p:nvSpPr>
+          <p:cNvPr id="12" name="Shape 9"/>
+          <p:cNvSpPr/>
+          <p:nvPr/>
+        </p:nvSpPr>
+        <p:spPr>
+          <a:xfrm>
+            <a:off x="8723376" y="4462272"/>
+            <a:ext cx="3145536" cy="1207008"/>
+          </a:xfrm>
+          <a:prstGeom prst="roundRect">
+            <a:avLst>
+              <a:gd name="adj" fmla="val 4545"/>
+            </a:avLst>
+          </a:prstGeom>
+          <a:solidFill>
+            <a:srgbClr val="FFFFFF"/>
+          </a:solidFill>
+          <a:ln w="12700">
+            <a:solidFill>
+              <a:srgbClr val="DCCDBB"/>
+            </a:solidFill>
+            <a:prstDash val="solid"/>
+          </a:ln>
+        </p:spPr>
+      </p:sp>
+      <p:sp>
+        <p:nvSpPr>
+          <p:cNvPr id="13" name="Text 10"/>
+          <p:cNvSpPr/>
+          <p:nvPr/>
+        </p:nvSpPr>
+        <p:spPr>
+          <a:xfrm>
+            <a:off x="8814816" y="4507992"/>
+            <a:ext cx="2962656" cy="1115568"/>
+          </a:xfrm>
+          <a:prstGeom prst="rect">
+            <a:avLst/>
+          </a:prstGeom>
+          <a:noFill/>
+          <a:ln/>
+        </p:spPr>
+        <p:txBody>
+          <a:bodyPr wrap="square" rtlCol="0" anchor="t"/>
+          <a:lstStyle/>
+          <a:p>
+            <a:pPr indent="0" marL="0">
+              <a:buNone/>
+            </a:pPr>
+            <a:r>
+              <a:rPr lang="en-US" sz="1200" b="1" dirty="0">
+                <a:solidFill>
+                  <a:srgbClr val="6E3A1C"/>
+                </a:solidFill>
+                <a:latin typeface="Malgun Gothic" pitchFamily="34" charset="0"/>
+                <a:ea typeface="Malgun Gothic" pitchFamily="34" charset="-122"/>
+                <a:cs typeface="Malgun Gothic" pitchFamily="34" charset="-120"/>
+              </a:rPr>
+              <a:t>이메일은 수동
+</a:t>
+            </a:r>
+            <a:pPr indent="0" marL="0">
+              <a:buNone/>
+            </a:pPr>
+            <a:r>
+              <a:rPr lang="en-US" sz="1050" dirty="0">
+                <a:solidFill>
+                  <a:srgbClr val="2E241C"/>
+                </a:solidFill>
+                <a:latin typeface="Malgun Gothic" pitchFamily="34" charset="0"/>
+                <a:ea typeface="Malgun Gothic" pitchFamily="34" charset="-122"/>
+                <a:cs typeface="Malgun Gothic" pitchFamily="34" charset="-120"/>
+              </a:rPr>
+              <a:t>초기 계정 안내 메일은 아직 사람이 보냅니다(SMTP 결선 전) — 화면에 명시</a:t>
             </a:r>
             <a:endParaRPr lang="en-US" sz="1200" dirty="0"/>
           </a:p>
@@ -10584,7 +11013,7 @@
                 <a:ea typeface="Malgun Gothic" pitchFamily="34" charset="-122"/>
                 <a:cs typeface="Malgun Gothic" pitchFamily="34" charset="-120"/>
               </a:rPr>
-              <a:t>6. ROUTINE</a:t>
+              <a:t>5. ADMIN · 관리자</a:t>
             </a:r>
             <a:endParaRPr lang="en-US" sz="1200" dirty="0"/>
           </a:p>
@@ -10623,7 +11052,7 @@
                 <a:ea typeface="Malgun Gothic" pitchFamily="34" charset="-122"/>
                 <a:cs typeface="Malgun Gothic" pitchFamily="34" charset="-120"/>
               </a:rPr>
-              <a:t>표준 운영 일과 — 일·주·월</a:t>
+              <a:t>Odoo 연결 마법사 — 붙기 전 검사</a:t>
             </a:r>
             <a:endParaRPr lang="en-US" sz="2700" dirty="0"/>
           </a:p>
@@ -10649,9 +11078,1455 @@
           <a:ln/>
         </p:spPr>
       </p:sp>
+      <p:pic>
+        <p:nvPicPr>
+          <p:cNvPr id="6" name="Image 0" descr="/tmp/claude-0/-home-user-thirdbrain-web/bc639c69-a342-56eb-af6c-6a89fd170e25/scratchpad/shots_v2/connect.png">    </p:cNvPr>
+          <p:cNvPicPr>
+            <a:picLocks noChangeAspect="1"/>
+          </p:cNvPicPr>
+          <p:nvPr/>
+        </p:nvPicPr>
+        <p:blipFill>
+          <a:blip r:embed="rId1"/>
+          <a:stretch>
+            <a:fillRect/>
+          </a:stretch>
+        </p:blipFill>
+        <p:spPr>
+          <a:xfrm>
+            <a:off x="566928" y="1371600"/>
+            <a:ext cx="7955280" cy="4972050"/>
+          </a:xfrm>
+          <a:prstGeom prst="rect">
+            <a:avLst/>
+          </a:prstGeom>
+          <a:effectLst>
+            <a:outerShdw sx="100000" sy="100000" kx="0" ky="0" algn="bl" rotWithShape="0" blurRad="76200" dist="25400" dir="5400000">
+              <a:srgbClr val="3a2a1a">
+                <a:alpha val="35000"/>
+              </a:srgbClr>
+            </a:outerShdw>
+          </a:effectLst>
+        </p:spPr>
+      </p:pic>
+      <p:sp>
+        <p:nvSpPr>
+          <p:cNvPr id="7" name="Text 4"/>
+          <p:cNvSpPr/>
+          <p:nvPr/>
+        </p:nvSpPr>
+        <p:spPr>
+          <a:xfrm>
+            <a:off x="8723376" y="1371600"/>
+            <a:ext cx="3145536" cy="347472"/>
+          </a:xfrm>
+          <a:prstGeom prst="rect">
+            <a:avLst/>
+          </a:prstGeom>
+          <a:noFill/>
+          <a:ln/>
+        </p:spPr>
+        <p:txBody>
+          <a:bodyPr wrap="square" rtlCol="0" anchor="ctr"/>
+          <a:lstStyle/>
+          <a:p>
+            <a:pPr indent="0" marL="0">
+              <a:buNone/>
+            </a:pPr>
+            <a:r>
+              <a:rPr lang="en-US" sz="1400" b="1" dirty="0">
+                <a:solidFill>
+                  <a:srgbClr val="C07F1E"/>
+                </a:solidFill>
+                <a:latin typeface="Malgun Gothic" pitchFamily="34" charset="0"/>
+                <a:ea typeface="Malgun Gothic" pitchFamily="34" charset="-122"/>
+                <a:cs typeface="Malgun Gothic" pitchFamily="34" charset="-120"/>
+              </a:rPr>
+              <a:t>운영 포인트</a:t>
+            </a:r>
+            <a:endParaRPr lang="en-US" sz="1400" dirty="0"/>
+          </a:p>
+        </p:txBody>
+      </p:sp>
+      <p:sp>
+        <p:nvSpPr>
+          <p:cNvPr id="8" name="Shape 5"/>
+          <p:cNvSpPr/>
+          <p:nvPr/>
+        </p:nvSpPr>
+        <p:spPr>
+          <a:xfrm>
+            <a:off x="8723376" y="1810512"/>
+            <a:ext cx="3145536" cy="1207008"/>
+          </a:xfrm>
+          <a:prstGeom prst="roundRect">
+            <a:avLst>
+              <a:gd name="adj" fmla="val 4545"/>
+            </a:avLst>
+          </a:prstGeom>
+          <a:solidFill>
+            <a:srgbClr val="FFFFFF"/>
+          </a:solidFill>
+          <a:ln w="12700">
+            <a:solidFill>
+              <a:srgbClr val="DCCDBB"/>
+            </a:solidFill>
+            <a:prstDash val="solid"/>
+          </a:ln>
+        </p:spPr>
+      </p:sp>
+      <p:sp>
+        <p:nvSpPr>
+          <p:cNvPr id="9" name="Text 6"/>
+          <p:cNvSpPr/>
+          <p:nvPr/>
+        </p:nvSpPr>
+        <p:spPr>
+          <a:xfrm>
+            <a:off x="8814816" y="1856232"/>
+            <a:ext cx="2962656" cy="1115568"/>
+          </a:xfrm>
+          <a:prstGeom prst="rect">
+            <a:avLst/>
+          </a:prstGeom>
+          <a:noFill/>
+          <a:ln/>
+        </p:spPr>
+        <p:txBody>
+          <a:bodyPr wrap="square" rtlCol="0" anchor="t"/>
+          <a:lstStyle/>
+          <a:p>
+            <a:pPr indent="0" marL="0">
+              <a:buNone/>
+            </a:pPr>
+            <a:r>
+              <a:rPr lang="en-US" sz="1200" b="1" dirty="0">
+                <a:solidFill>
+                  <a:srgbClr val="6E3A1C"/>
+                </a:solidFill>
+                <a:latin typeface="Malgun Gothic" pitchFamily="34" charset="0"/>
+                <a:ea typeface="Malgun Gothic" pitchFamily="34" charset="-122"/>
+                <a:cs typeface="Malgun Gothic" pitchFamily="34" charset="-120"/>
+              </a:rPr>
+              <a:t>읽기 전용 검사
+</a:t>
+            </a:r>
+            <a:pPr indent="0" marL="0">
+              <a:buNone/>
+            </a:pPr>
+            <a:r>
+              <a:rPr lang="en-US" sz="1050" dirty="0">
+                <a:solidFill>
+                  <a:srgbClr val="2E241C"/>
+                </a:solidFill>
+                <a:latin typeface="Malgun Gothic" pitchFamily="34" charset="0"/>
+                <a:ea typeface="Malgun Gothic" pitchFamily="34" charset="-122"/>
+                <a:cs typeface="Malgun Gothic" pitchFamily="34" charset="-120"/>
+              </a:rPr>
+              <a:t>Odoo DB 접속 정보로 버전·설치 모듈·wal_level·복제 권한·대상 테이블 13종을 검사 — 원장에 쓰기 없음, 비밀번호 미저장</a:t>
+            </a:r>
+            <a:endParaRPr lang="en-US" sz="1200" dirty="0"/>
+          </a:p>
+        </p:txBody>
+      </p:sp>
+      <p:sp>
+        <p:nvSpPr>
+          <p:cNvPr id="10" name="Shape 7"/>
+          <p:cNvSpPr/>
+          <p:nvPr/>
+        </p:nvSpPr>
+        <p:spPr>
+          <a:xfrm>
+            <a:off x="8723376" y="3136392"/>
+            <a:ext cx="3145536" cy="1207008"/>
+          </a:xfrm>
+          <a:prstGeom prst="roundRect">
+            <a:avLst>
+              <a:gd name="adj" fmla="val 4545"/>
+            </a:avLst>
+          </a:prstGeom>
+          <a:solidFill>
+            <a:srgbClr val="FFFFFF"/>
+          </a:solidFill>
+          <a:ln w="12700">
+            <a:solidFill>
+              <a:srgbClr val="DCCDBB"/>
+            </a:solidFill>
+            <a:prstDash val="solid"/>
+          </a:ln>
+        </p:spPr>
+      </p:sp>
+      <p:sp>
+        <p:nvSpPr>
+          <p:cNvPr id="11" name="Text 8"/>
+          <p:cNvSpPr/>
+          <p:nvPr/>
+        </p:nvSpPr>
+        <p:spPr>
+          <a:xfrm>
+            <a:off x="8814816" y="3182112"/>
+            <a:ext cx="2962656" cy="1115568"/>
+          </a:xfrm>
+          <a:prstGeom prst="rect">
+            <a:avLst/>
+          </a:prstGeom>
+          <a:noFill/>
+          <a:ln/>
+        </p:spPr>
+        <p:txBody>
+          <a:bodyPr wrap="square" rtlCol="0" anchor="t"/>
+          <a:lstStyle/>
+          <a:p>
+            <a:pPr indent="0" marL="0">
+              <a:buNone/>
+            </a:pPr>
+            <a:r>
+              <a:rPr lang="en-US" sz="1200" b="1" dirty="0">
+                <a:solidFill>
+                  <a:srgbClr val="6E3A1C"/>
+                </a:solidFill>
+                <a:latin typeface="Malgun Gothic" pitchFamily="34" charset="0"/>
+                <a:ea typeface="Malgun Gothic" pitchFamily="34" charset="-122"/>
+                <a:cs typeface="Malgun Gothic" pitchFamily="34" charset="-120"/>
+              </a:rPr>
+              <a:t>맞춤 SQL 생성
+</a:t>
+            </a:r>
+            <a:pPr indent="0" marL="0">
+              <a:buNone/>
+            </a:pPr>
+            <a:r>
+              <a:rPr lang="en-US" sz="1050" dirty="0">
+                <a:solidFill>
+                  <a:srgbClr val="2E241C"/>
+                </a:solidFill>
+                <a:latin typeface="Malgun Gothic" pitchFamily="34" charset="0"/>
+                <a:ea typeface="Malgun Gothic" pitchFamily="34" charset="-122"/>
+                <a:cs typeface="Malgun Gothic" pitchFamily="34" charset="-120"/>
+              </a:rPr>
+              <a:t>그 인스턴스에 존재하는 테이블만으로 발행(publication) SQL을 만들어 줌 — DBA가 복사·실행</a:t>
+            </a:r>
+            <a:endParaRPr lang="en-US" sz="1200" dirty="0"/>
+          </a:p>
+        </p:txBody>
+      </p:sp>
+      <p:sp>
+        <p:nvSpPr>
+          <p:cNvPr id="12" name="Shape 9"/>
+          <p:cNvSpPr/>
+          <p:nvPr/>
+        </p:nvSpPr>
+        <p:spPr>
+          <a:xfrm>
+            <a:off x="8723376" y="4462272"/>
+            <a:ext cx="3145536" cy="1207008"/>
+          </a:xfrm>
+          <a:prstGeom prst="roundRect">
+            <a:avLst>
+              <a:gd name="adj" fmla="val 4545"/>
+            </a:avLst>
+          </a:prstGeom>
+          <a:solidFill>
+            <a:srgbClr val="FFFFFF"/>
+          </a:solidFill>
+          <a:ln w="12700">
+            <a:solidFill>
+              <a:srgbClr val="DCCDBB"/>
+            </a:solidFill>
+            <a:prstDash val="solid"/>
+          </a:ln>
+        </p:spPr>
+      </p:sp>
+      <p:sp>
+        <p:nvSpPr>
+          <p:cNvPr id="13" name="Text 10"/>
+          <p:cNvSpPr/>
+          <p:nvPr/>
+        </p:nvSpPr>
+        <p:spPr>
+          <a:xfrm>
+            <a:off x="8814816" y="4507992"/>
+            <a:ext cx="2962656" cy="1115568"/>
+          </a:xfrm>
+          <a:prstGeom prst="rect">
+            <a:avLst/>
+          </a:prstGeom>
+          <a:noFill/>
+          <a:ln/>
+        </p:spPr>
+        <p:txBody>
+          <a:bodyPr wrap="square" rtlCol="0" anchor="t"/>
+          <a:lstStyle/>
+          <a:p>
+            <a:pPr indent="0" marL="0">
+              <a:buNone/>
+            </a:pPr>
+            <a:r>
+              <a:rPr lang="en-US" sz="1200" b="1" dirty="0">
+                <a:solidFill>
+                  <a:srgbClr val="6E3A1C"/>
+                </a:solidFill>
+                <a:latin typeface="Malgun Gothic" pitchFamily="34" charset="0"/>
+                <a:ea typeface="Malgun Gothic" pitchFamily="34" charset="-122"/>
+                <a:cs typeface="Malgun Gothic" pitchFamily="34" charset="-120"/>
+              </a:rPr>
+              <a:t>다음 단계
+</a:t>
+            </a:r>
+            <a:pPr indent="0" marL="0">
+              <a:buNone/>
+            </a:pPr>
+            <a:r>
+              <a:rPr lang="en-US" sz="1050" dirty="0">
+                <a:solidFill>
+                  <a:srgbClr val="2E241C"/>
+                </a:solidFill>
+                <a:latin typeface="Malgun Gothic" pitchFamily="34" charset="0"/>
+                <a:ea typeface="Malgun Gothic" pitchFamily="34" charset="-122"/>
+                <a:cs typeface="Malgun Gothic" pitchFamily="34" charset="-120"/>
+              </a:rPr>
+              <a:t>구독 생성→매핑 뷰→정합 대조는 현장 체크리스트 C 절차대로 (엔지니어 동행 권장)</a:t>
+            </a:r>
+            <a:endParaRPr lang="en-US" sz="1200" dirty="0"/>
+          </a:p>
+        </p:txBody>
+      </p:sp>
+    </p:spTree>
+  </p:cSld>
+  <p:clrMapOvr>
+    <a:masterClrMapping/>
+  </p:clrMapOvr>
+</p:sld>
+</file>
+
+<file path=ppt/slides/slide23.xml><?xml version="1.0" encoding="utf-8"?>
+<p:sld xmlns:a="http://schemas.openxmlformats.org/drawingml/2006/main" xmlns:r="http://schemas.openxmlformats.org/officeDocument/2006/relationships" xmlns:p="http://schemas.openxmlformats.org/presentationml/2006/main">
+  <p:cSld name="Slide 23">
+    <p:bg>
+      <p:bgPr>
+        <a:solidFill>
+          <a:srgbClr val="F8F2EA"/>
+        </a:solidFill>
+      </p:bgPr>
+    </p:bg>
+    <p:spTree>
+      <p:nvGrpSpPr>
+        <p:cNvPr id="1" name=""/>
+        <p:cNvGrpSpPr/>
+        <p:nvPr/>
+      </p:nvGrpSpPr>
+      <p:grpSpPr>
+        <a:xfrm>
+          <a:off x="0" y="0"/>
+          <a:ext cx="0" cy="0"/>
+          <a:chOff x="0" y="0"/>
+          <a:chExt cx="0" cy="0"/>
+        </a:xfrm>
+      </p:grpSpPr>
+      <p:sp>
+        <p:nvSpPr>
+          <p:cNvPr id="2" name="Text 0"/>
+          <p:cNvSpPr/>
+          <p:nvPr/>
+        </p:nvSpPr>
+        <p:spPr>
+          <a:xfrm>
+            <a:off x="11686032" y="6473952"/>
+            <a:ext cx="365760" cy="274320"/>
+          </a:xfrm>
+          <a:prstGeom prst="rect">
+            <a:avLst/>
+          </a:prstGeom>
+          <a:noFill/>
+          <a:ln/>
+        </p:spPr>
+        <p:txBody>
+          <a:bodyPr wrap="square" rtlCol="0" anchor="ctr"/>
+          <a:lstStyle/>
+          <a:p>
+            <a:pPr algn="r" indent="0" marL="0">
+              <a:buNone/>
+            </a:pPr>
+            <a:r>
+              <a:rPr lang="en-US" sz="1000" dirty="0">
+                <a:solidFill>
+                  <a:srgbClr val="76675A"/>
+                </a:solidFill>
+                <a:latin typeface="Malgun Gothic" pitchFamily="34" charset="0"/>
+                <a:ea typeface="Malgun Gothic" pitchFamily="34" charset="-122"/>
+                <a:cs typeface="Malgun Gothic" pitchFamily="34" charset="-120"/>
+              </a:rPr>
+              <a:t>23</a:t>
+            </a:r>
+            <a:endParaRPr lang="en-US" sz="1000" dirty="0"/>
+          </a:p>
+        </p:txBody>
+      </p:sp>
+      <p:sp>
+        <p:nvSpPr>
+          <p:cNvPr id="3" name="Text 1"/>
+          <p:cNvSpPr/>
+          <p:nvPr/>
+        </p:nvSpPr>
+        <p:spPr>
+          <a:xfrm>
+            <a:off x="566928" y="310896"/>
+            <a:ext cx="10515600" cy="292608"/>
+          </a:xfrm>
+          <a:prstGeom prst="rect">
+            <a:avLst/>
+          </a:prstGeom>
+          <a:noFill/>
+          <a:ln/>
+        </p:spPr>
+        <p:txBody>
+          <a:bodyPr wrap="square" rtlCol="0" anchor="ctr"/>
+          <a:lstStyle/>
+          <a:p>
+            <a:pPr indent="0" marL="0">
+              <a:buNone/>
+            </a:pPr>
+            <a:r>
+              <a:rPr lang="en-US" sz="1200" b="1" spc="300" kern="0" dirty="0">
+                <a:solidFill>
+                  <a:srgbClr val="C07F1E"/>
+                </a:solidFill>
+                <a:latin typeface="Malgun Gothic" pitchFamily="34" charset="0"/>
+                <a:ea typeface="Malgun Gothic" pitchFamily="34" charset="-122"/>
+                <a:cs typeface="Malgun Gothic" pitchFamily="34" charset="-120"/>
+              </a:rPr>
+              <a:t>5. ADMIN · 공개</a:t>
+            </a:r>
+            <a:endParaRPr lang="en-US" sz="1200" dirty="0"/>
+          </a:p>
+        </p:txBody>
+      </p:sp>
+      <p:sp>
+        <p:nvSpPr>
+          <p:cNvPr id="4" name="Text 2"/>
+          <p:cNvSpPr/>
+          <p:nvPr/>
+        </p:nvSpPr>
+        <p:spPr>
+          <a:xfrm>
+            <a:off x="566928" y="566928"/>
+            <a:ext cx="11055096" cy="566928"/>
+          </a:xfrm>
+          <a:prstGeom prst="rect">
+            <a:avLst/>
+          </a:prstGeom>
+          <a:noFill/>
+          <a:ln/>
+        </p:spPr>
+        <p:txBody>
+          <a:bodyPr wrap="square" rtlCol="0" anchor="ctr"/>
+          <a:lstStyle/>
+          <a:p>
+            <a:pPr indent="0" marL="0">
+              <a:buNone/>
+            </a:pPr>
+            <a:r>
+              <a:rPr lang="en-US" sz="2700" b="1" dirty="0">
+                <a:solidFill>
+                  <a:srgbClr val="6E3A1C"/>
+                </a:solidFill>
+                <a:latin typeface="Malgun Gothic" pitchFamily="34" charset="0"/>
+                <a:ea typeface="Malgun Gothic" pitchFamily="34" charset="-122"/>
+                <a:cs typeface="Malgun Gothic" pitchFamily="34" charset="-120"/>
+              </a:rPr>
+              <a:t>서비스 상태 — 밖에서 보는 건강</a:t>
+            </a:r>
+            <a:endParaRPr lang="en-US" sz="2700" dirty="0"/>
+          </a:p>
+        </p:txBody>
+      </p:sp>
+      <p:sp>
+        <p:nvSpPr>
+          <p:cNvPr id="5" name="Shape 3"/>
+          <p:cNvSpPr/>
+          <p:nvPr/>
+        </p:nvSpPr>
+        <p:spPr>
+          <a:xfrm>
+            <a:off x="566928" y="1207008"/>
+            <a:ext cx="1051560" cy="41148"/>
+          </a:xfrm>
+          <a:prstGeom prst="rect">
+            <a:avLst/>
+          </a:prstGeom>
+          <a:solidFill>
+            <a:srgbClr val="E8A33D"/>
+          </a:solidFill>
+          <a:ln/>
+        </p:spPr>
+      </p:sp>
+      <p:pic>
+        <p:nvPicPr>
+          <p:cNvPr id="6" name="Image 0" descr="/tmp/claude-0/-home-user-thirdbrain-web/bc639c69-a342-56eb-af6c-6a89fd170e25/scratchpad/shots_v2/status.png">    </p:cNvPr>
+          <p:cNvPicPr>
+            <a:picLocks noChangeAspect="1"/>
+          </p:cNvPicPr>
+          <p:nvPr/>
+        </p:nvPicPr>
+        <p:blipFill>
+          <a:blip r:embed="rId1"/>
+          <a:stretch>
+            <a:fillRect/>
+          </a:stretch>
+        </p:blipFill>
+        <p:spPr>
+          <a:xfrm>
+            <a:off x="566928" y="1371600"/>
+            <a:ext cx="7955280" cy="4972050"/>
+          </a:xfrm>
+          <a:prstGeom prst="rect">
+            <a:avLst/>
+          </a:prstGeom>
+          <a:effectLst>
+            <a:outerShdw sx="100000" sy="100000" kx="0" ky="0" algn="bl" rotWithShape="0" blurRad="76200" dist="25400" dir="5400000">
+              <a:srgbClr val="3a2a1a">
+                <a:alpha val="35000"/>
+              </a:srgbClr>
+            </a:outerShdw>
+          </a:effectLst>
+        </p:spPr>
+      </p:pic>
+      <p:sp>
+        <p:nvSpPr>
+          <p:cNvPr id="7" name="Text 4"/>
+          <p:cNvSpPr/>
+          <p:nvPr/>
+        </p:nvSpPr>
+        <p:spPr>
+          <a:xfrm>
+            <a:off x="8723376" y="1371600"/>
+            <a:ext cx="3145536" cy="347472"/>
+          </a:xfrm>
+          <a:prstGeom prst="rect">
+            <a:avLst/>
+          </a:prstGeom>
+          <a:noFill/>
+          <a:ln/>
+        </p:spPr>
+        <p:txBody>
+          <a:bodyPr wrap="square" rtlCol="0" anchor="ctr"/>
+          <a:lstStyle/>
+          <a:p>
+            <a:pPr indent="0" marL="0">
+              <a:buNone/>
+            </a:pPr>
+            <a:r>
+              <a:rPr lang="en-US" sz="1400" b="1" dirty="0">
+                <a:solidFill>
+                  <a:srgbClr val="C07F1E"/>
+                </a:solidFill>
+                <a:latin typeface="Malgun Gothic" pitchFamily="34" charset="0"/>
+                <a:ea typeface="Malgun Gothic" pitchFamily="34" charset="-122"/>
+                <a:cs typeface="Malgun Gothic" pitchFamily="34" charset="-120"/>
+              </a:rPr>
+              <a:t>운영 포인트</a:t>
+            </a:r>
+            <a:endParaRPr lang="en-US" sz="1400" dirty="0"/>
+          </a:p>
+        </p:txBody>
+      </p:sp>
+      <p:sp>
+        <p:nvSpPr>
+          <p:cNvPr id="8" name="Shape 5"/>
+          <p:cNvSpPr/>
+          <p:nvPr/>
+        </p:nvSpPr>
+        <p:spPr>
+          <a:xfrm>
+            <a:off x="8723376" y="1810512"/>
+            <a:ext cx="3145536" cy="1207008"/>
+          </a:xfrm>
+          <a:prstGeom prst="roundRect">
+            <a:avLst>
+              <a:gd name="adj" fmla="val 4545"/>
+            </a:avLst>
+          </a:prstGeom>
+          <a:solidFill>
+            <a:srgbClr val="FFFFFF"/>
+          </a:solidFill>
+          <a:ln w="12700">
+            <a:solidFill>
+              <a:srgbClr val="DCCDBB"/>
+            </a:solidFill>
+            <a:prstDash val="solid"/>
+          </a:ln>
+        </p:spPr>
+      </p:sp>
+      <p:sp>
+        <p:nvSpPr>
+          <p:cNvPr id="9" name="Text 6"/>
+          <p:cNvSpPr/>
+          <p:nvPr/>
+        </p:nvSpPr>
+        <p:spPr>
+          <a:xfrm>
+            <a:off x="8814816" y="1856232"/>
+            <a:ext cx="2962656" cy="1115568"/>
+          </a:xfrm>
+          <a:prstGeom prst="rect">
+            <a:avLst/>
+          </a:prstGeom>
+          <a:noFill/>
+          <a:ln/>
+        </p:spPr>
+        <p:txBody>
+          <a:bodyPr wrap="square" rtlCol="0" anchor="t"/>
+          <a:lstStyle/>
+          <a:p>
+            <a:pPr indent="0" marL="0">
+              <a:buNone/>
+            </a:pPr>
+            <a:r>
+              <a:rPr lang="en-US" sz="1200" b="1" dirty="0">
+                <a:solidFill>
+                  <a:srgbClr val="6E3A1C"/>
+                </a:solidFill>
+                <a:latin typeface="Malgun Gothic" pitchFamily="34" charset="0"/>
+                <a:ea typeface="Malgun Gothic" pitchFamily="34" charset="-122"/>
+                <a:cs typeface="Malgun Gothic" pitchFamily="34" charset="-120"/>
+              </a:rPr>
+              <a:t>공개 페이지
+</a:t>
+            </a:r>
+            <a:pPr indent="0" marL="0">
+              <a:buNone/>
+            </a:pPr>
+            <a:r>
+              <a:rPr lang="en-US" sz="1050" dirty="0">
+                <a:solidFill>
+                  <a:srgbClr val="2E241C"/>
+                </a:solidFill>
+                <a:latin typeface="Malgun Gothic" pitchFamily="34" charset="0"/>
+                <a:ea typeface="Malgun Gothic" pitchFamily="34" charset="-122"/>
+                <a:cs typeface="Malgun Gothic" pitchFamily="34" charset="-120"/>
+              </a:rPr>
+              <a:t>/status 는 로그인 없이 접근 — 웹앱·DB·야간 파이프라인 신호만 노출(데이터·계정 정보 없음)</a:t>
+            </a:r>
+            <a:endParaRPr lang="en-US" sz="1200" dirty="0"/>
+          </a:p>
+        </p:txBody>
+      </p:sp>
+      <p:sp>
+        <p:nvSpPr>
+          <p:cNvPr id="10" name="Shape 7"/>
+          <p:cNvSpPr/>
+          <p:nvPr/>
+        </p:nvSpPr>
+        <p:spPr>
+          <a:xfrm>
+            <a:off x="8723376" y="3136392"/>
+            <a:ext cx="3145536" cy="1207008"/>
+          </a:xfrm>
+          <a:prstGeom prst="roundRect">
+            <a:avLst>
+              <a:gd name="adj" fmla="val 4545"/>
+            </a:avLst>
+          </a:prstGeom>
+          <a:solidFill>
+            <a:srgbClr val="FFFFFF"/>
+          </a:solidFill>
+          <a:ln w="12700">
+            <a:solidFill>
+              <a:srgbClr val="DCCDBB"/>
+            </a:solidFill>
+            <a:prstDash val="solid"/>
+          </a:ln>
+        </p:spPr>
+      </p:sp>
+      <p:sp>
+        <p:nvSpPr>
+          <p:cNvPr id="11" name="Text 8"/>
+          <p:cNvSpPr/>
+          <p:nvPr/>
+        </p:nvSpPr>
+        <p:spPr>
+          <a:xfrm>
+            <a:off x="8814816" y="3182112"/>
+            <a:ext cx="2962656" cy="1115568"/>
+          </a:xfrm>
+          <a:prstGeom prst="rect">
+            <a:avLst/>
+          </a:prstGeom>
+          <a:noFill/>
+          <a:ln/>
+        </p:spPr>
+        <p:txBody>
+          <a:bodyPr wrap="square" rtlCol="0" anchor="t"/>
+          <a:lstStyle/>
+          <a:p>
+            <a:pPr indent="0" marL="0">
+              <a:buNone/>
+            </a:pPr>
+            <a:r>
+              <a:rPr lang="en-US" sz="1200" b="1" dirty="0">
+                <a:solidFill>
+                  <a:srgbClr val="6E3A1C"/>
+                </a:solidFill>
+                <a:latin typeface="Malgun Gothic" pitchFamily="34" charset="0"/>
+                <a:ea typeface="Malgun Gothic" pitchFamily="34" charset="-122"/>
+                <a:cs typeface="Malgun Gothic" pitchFamily="34" charset="-120"/>
+              </a:rPr>
+              <a:t>자동 감시
+</a:t>
+            </a:r>
+            <a:pPr indent="0" marL="0">
+              <a:buNone/>
+            </a:pPr>
+            <a:r>
+              <a:rPr lang="en-US" sz="1050" dirty="0">
+                <a:solidFill>
+                  <a:srgbClr val="2E241C"/>
+                </a:solidFill>
+                <a:latin typeface="Malgun Gothic" pitchFamily="34" charset="0"/>
+                <a:ea typeface="Malgun Gothic" pitchFamily="34" charset="-122"/>
+                <a:cs typeface="Malgun Gothic" pitchFamily="34" charset="-120"/>
+              </a:rPr>
+              <a:t>하트비트가 5분마다 검사 — 연속 2회 실패 시 다운 경보, 복구 시 복구 알림. 정합 배치 실패도 여기서 이중 감시</a:t>
+            </a:r>
+            <a:endParaRPr lang="en-US" sz="1200" dirty="0"/>
+          </a:p>
+        </p:txBody>
+      </p:sp>
+      <p:sp>
+        <p:nvSpPr>
+          <p:cNvPr id="12" name="Shape 9"/>
+          <p:cNvSpPr/>
+          <p:nvPr/>
+        </p:nvSpPr>
+        <p:spPr>
+          <a:xfrm>
+            <a:off x="8723376" y="4462272"/>
+            <a:ext cx="3145536" cy="1207008"/>
+          </a:xfrm>
+          <a:prstGeom prst="roundRect">
+            <a:avLst>
+              <a:gd name="adj" fmla="val 4545"/>
+            </a:avLst>
+          </a:prstGeom>
+          <a:solidFill>
+            <a:srgbClr val="FFFFFF"/>
+          </a:solidFill>
+          <a:ln w="12700">
+            <a:solidFill>
+              <a:srgbClr val="DCCDBB"/>
+            </a:solidFill>
+            <a:prstDash val="solid"/>
+          </a:ln>
+        </p:spPr>
+      </p:sp>
+      <p:sp>
+        <p:nvSpPr>
+          <p:cNvPr id="13" name="Text 10"/>
+          <p:cNvSpPr/>
+          <p:nvPr/>
+        </p:nvSpPr>
+        <p:spPr>
+          <a:xfrm>
+            <a:off x="8814816" y="4507992"/>
+            <a:ext cx="2962656" cy="1115568"/>
+          </a:xfrm>
+          <a:prstGeom prst="rect">
+            <a:avLst/>
+          </a:prstGeom>
+          <a:noFill/>
+          <a:ln/>
+        </p:spPr>
+        <p:txBody>
+          <a:bodyPr wrap="square" rtlCol="0" anchor="t"/>
+          <a:lstStyle/>
+          <a:p>
+            <a:pPr indent="0" marL="0">
+              <a:buNone/>
+            </a:pPr>
+            <a:r>
+              <a:rPr lang="en-US" sz="1200" b="1" dirty="0">
+                <a:solidFill>
+                  <a:srgbClr val="6E3A1C"/>
+                </a:solidFill>
+                <a:latin typeface="Malgun Gothic" pitchFamily="34" charset="0"/>
+                <a:ea typeface="Malgun Gothic" pitchFamily="34" charset="-122"/>
+                <a:cs typeface="Malgun Gothic" pitchFamily="34" charset="-120"/>
+              </a:rPr>
+              <a:t>데이터 정합 신호
+</a:t>
+            </a:r>
+            <a:pPr indent="0" marL="0">
+              <a:buNone/>
+            </a:pPr>
+            <a:r>
+              <a:rPr lang="en-US" sz="1050" dirty="0">
+                <a:solidFill>
+                  <a:srgbClr val="2E241C"/>
+                </a:solidFill>
+                <a:latin typeface="Malgun Gothic" pitchFamily="34" charset="0"/>
+                <a:ea typeface="Malgun Gothic" pitchFamily="34" charset="-122"/>
+                <a:cs typeface="Malgun Gothic" pitchFamily="34" charset="-120"/>
+              </a:rPr>
+              <a:t>야간 정합 배치의 최근 통과 여부를 신호등으로만 노출 — 수치·데이터는 보이지 않습니다</a:t>
+            </a:r>
+            <a:endParaRPr lang="en-US" sz="1200" dirty="0"/>
+          </a:p>
+        </p:txBody>
+      </p:sp>
+    </p:spTree>
+  </p:cSld>
+  <p:clrMapOvr>
+    <a:masterClrMapping/>
+  </p:clrMapOvr>
+</p:sld>
+</file>
+
+<file path=ppt/slides/slide24.xml><?xml version="1.0" encoding="utf-8"?>
+<p:sld xmlns:a="http://schemas.openxmlformats.org/drawingml/2006/main" xmlns:r="http://schemas.openxmlformats.org/officeDocument/2006/relationships" xmlns:p="http://schemas.openxmlformats.org/presentationml/2006/main">
+  <p:cSld name="Slide 24">
+    <p:bg>
+      <p:bgPr>
+        <a:solidFill>
+          <a:srgbClr val="F8F2EA"/>
+        </a:solidFill>
+      </p:bgPr>
+    </p:bg>
+    <p:spTree>
+      <p:nvGrpSpPr>
+        <p:cNvPr id="1" name=""/>
+        <p:cNvGrpSpPr/>
+        <p:nvPr/>
+      </p:nvGrpSpPr>
+      <p:grpSpPr>
+        <a:xfrm>
+          <a:off x="0" y="0"/>
+          <a:ext cx="0" cy="0"/>
+          <a:chOff x="0" y="0"/>
+          <a:chExt cx="0" cy="0"/>
+        </a:xfrm>
+      </p:grpSpPr>
+      <p:sp>
+        <p:nvSpPr>
+          <p:cNvPr id="2" name="Text 0"/>
+          <p:cNvSpPr/>
+          <p:nvPr/>
+        </p:nvSpPr>
+        <p:spPr>
+          <a:xfrm>
+            <a:off x="11686032" y="6473952"/>
+            <a:ext cx="365760" cy="274320"/>
+          </a:xfrm>
+          <a:prstGeom prst="rect">
+            <a:avLst/>
+          </a:prstGeom>
+          <a:noFill/>
+          <a:ln/>
+        </p:spPr>
+        <p:txBody>
+          <a:bodyPr wrap="square" rtlCol="0" anchor="ctr"/>
+          <a:lstStyle/>
+          <a:p>
+            <a:pPr algn="r" indent="0" marL="0">
+              <a:buNone/>
+            </a:pPr>
+            <a:r>
+              <a:rPr lang="en-US" sz="1000" dirty="0">
+                <a:solidFill>
+                  <a:srgbClr val="76675A"/>
+                </a:solidFill>
+                <a:latin typeface="Malgun Gothic" pitchFamily="34" charset="0"/>
+                <a:ea typeface="Malgun Gothic" pitchFamily="34" charset="-122"/>
+                <a:cs typeface="Malgun Gothic" pitchFamily="34" charset="-120"/>
+              </a:rPr>
+              <a:t>24</a:t>
+            </a:r>
+            <a:endParaRPr lang="en-US" sz="1000" dirty="0"/>
+          </a:p>
+        </p:txBody>
+      </p:sp>
+      <p:sp>
+        <p:nvSpPr>
+          <p:cNvPr id="3" name="Text 1"/>
+          <p:cNvSpPr/>
+          <p:nvPr/>
+        </p:nvSpPr>
+        <p:spPr>
+          <a:xfrm>
+            <a:off x="566928" y="310896"/>
+            <a:ext cx="10515600" cy="292608"/>
+          </a:xfrm>
+          <a:prstGeom prst="rect">
+            <a:avLst/>
+          </a:prstGeom>
+          <a:noFill/>
+          <a:ln/>
+        </p:spPr>
+        <p:txBody>
+          <a:bodyPr wrap="square" rtlCol="0" anchor="ctr"/>
+          <a:lstStyle/>
+          <a:p>
+            <a:pPr indent="0" marL="0">
+              <a:buNone/>
+            </a:pPr>
+            <a:r>
+              <a:rPr lang="en-US" sz="1200" b="1" spc="300" kern="0" dirty="0">
+                <a:solidFill>
+                  <a:srgbClr val="C07F1E"/>
+                </a:solidFill>
+                <a:latin typeface="Malgun Gothic" pitchFamily="34" charset="0"/>
+                <a:ea typeface="Malgun Gothic" pitchFamily="34" charset="-122"/>
+                <a:cs typeface="Malgun Gothic" pitchFamily="34" charset="-120"/>
+              </a:rPr>
+              <a:t>5. ADMIN · 공개</a:t>
+            </a:r>
+            <a:endParaRPr lang="en-US" sz="1200" dirty="0"/>
+          </a:p>
+        </p:txBody>
+      </p:sp>
+      <p:sp>
+        <p:nvSpPr>
+          <p:cNvPr id="4" name="Text 2"/>
+          <p:cNvSpPr/>
+          <p:nvPr/>
+        </p:nvSpPr>
+        <p:spPr>
+          <a:xfrm>
+            <a:off x="566928" y="566928"/>
+            <a:ext cx="11055096" cy="566928"/>
+          </a:xfrm>
+          <a:prstGeom prst="rect">
+            <a:avLst/>
+          </a:prstGeom>
+          <a:noFill/>
+          <a:ln/>
+        </p:spPr>
+        <p:txBody>
+          <a:bodyPr wrap="square" rtlCol="0" anchor="ctr"/>
+          <a:lstStyle/>
+          <a:p>
+            <a:pPr indent="0" marL="0">
+              <a:buNone/>
+            </a:pPr>
+            <a:r>
+              <a:rPr lang="en-US" sz="2700" b="1" dirty="0">
+                <a:solidFill>
+                  <a:srgbClr val="6E3A1C"/>
+                </a:solidFill>
+                <a:latin typeface="Malgun Gothic" pitchFamily="34" charset="0"/>
+                <a:ea typeface="Malgun Gothic" pitchFamily="34" charset="-122"/>
+                <a:cs typeface="Malgun Gothic" pitchFamily="34" charset="-120"/>
+              </a:rPr>
+              <a:t>체험 신청 폼 — 손님이 문을 두드리는 곳</a:t>
+            </a:r>
+            <a:endParaRPr lang="en-US" sz="2700" dirty="0"/>
+          </a:p>
+        </p:txBody>
+      </p:sp>
+      <p:sp>
+        <p:nvSpPr>
+          <p:cNvPr id="5" name="Shape 3"/>
+          <p:cNvSpPr/>
+          <p:nvPr/>
+        </p:nvSpPr>
+        <p:spPr>
+          <a:xfrm>
+            <a:off x="566928" y="1207008"/>
+            <a:ext cx="1051560" cy="41148"/>
+          </a:xfrm>
+          <a:prstGeom prst="rect">
+            <a:avLst/>
+          </a:prstGeom>
+          <a:solidFill>
+            <a:srgbClr val="E8A33D"/>
+          </a:solidFill>
+          <a:ln/>
+        </p:spPr>
+      </p:sp>
+      <p:pic>
+        <p:nvPicPr>
+          <p:cNvPr id="6" name="Image 0" descr="/tmp/claude-0/-home-user-thirdbrain-web/bc639c69-a342-56eb-af6c-6a89fd170e25/scratchpad/shots_v2/signup.png">    </p:cNvPr>
+          <p:cNvPicPr>
+            <a:picLocks noChangeAspect="1"/>
+          </p:cNvPicPr>
+          <p:nvPr/>
+        </p:nvPicPr>
+        <p:blipFill>
+          <a:blip r:embed="rId1"/>
+          <a:stretch>
+            <a:fillRect/>
+          </a:stretch>
+        </p:blipFill>
+        <p:spPr>
+          <a:xfrm>
+            <a:off x="566928" y="1371600"/>
+            <a:ext cx="7955280" cy="4972050"/>
+          </a:xfrm>
+          <a:prstGeom prst="rect">
+            <a:avLst/>
+          </a:prstGeom>
+          <a:effectLst>
+            <a:outerShdw sx="100000" sy="100000" kx="0" ky="0" algn="bl" rotWithShape="0" blurRad="76200" dist="25400" dir="5400000">
+              <a:srgbClr val="3a2a1a">
+                <a:alpha val="35000"/>
+              </a:srgbClr>
+            </a:outerShdw>
+          </a:effectLst>
+        </p:spPr>
+      </p:pic>
+      <p:sp>
+        <p:nvSpPr>
+          <p:cNvPr id="7" name="Text 4"/>
+          <p:cNvSpPr/>
+          <p:nvPr/>
+        </p:nvSpPr>
+        <p:spPr>
+          <a:xfrm>
+            <a:off x="8723376" y="1371600"/>
+            <a:ext cx="3145536" cy="347472"/>
+          </a:xfrm>
+          <a:prstGeom prst="rect">
+            <a:avLst/>
+          </a:prstGeom>
+          <a:noFill/>
+          <a:ln/>
+        </p:spPr>
+        <p:txBody>
+          <a:bodyPr wrap="square" rtlCol="0" anchor="ctr"/>
+          <a:lstStyle/>
+          <a:p>
+            <a:pPr indent="0" marL="0">
+              <a:buNone/>
+            </a:pPr>
+            <a:r>
+              <a:rPr lang="en-US" sz="1400" b="1" dirty="0">
+                <a:solidFill>
+                  <a:srgbClr val="C07F1E"/>
+                </a:solidFill>
+                <a:latin typeface="Malgun Gothic" pitchFamily="34" charset="0"/>
+                <a:ea typeface="Malgun Gothic" pitchFamily="34" charset="-122"/>
+                <a:cs typeface="Malgun Gothic" pitchFamily="34" charset="-120"/>
+              </a:rPr>
+              <a:t>운영 포인트</a:t>
+            </a:r>
+            <a:endParaRPr lang="en-US" sz="1400" dirty="0"/>
+          </a:p>
+        </p:txBody>
+      </p:sp>
+      <p:sp>
+        <p:nvSpPr>
+          <p:cNvPr id="8" name="Shape 5"/>
+          <p:cNvSpPr/>
+          <p:nvPr/>
+        </p:nvSpPr>
+        <p:spPr>
+          <a:xfrm>
+            <a:off x="8723376" y="1810512"/>
+            <a:ext cx="3145536" cy="1207008"/>
+          </a:xfrm>
+          <a:prstGeom prst="roundRect">
+            <a:avLst>
+              <a:gd name="adj" fmla="val 4545"/>
+            </a:avLst>
+          </a:prstGeom>
+          <a:solidFill>
+            <a:srgbClr val="FFFFFF"/>
+          </a:solidFill>
+          <a:ln w="12700">
+            <a:solidFill>
+              <a:srgbClr val="DCCDBB"/>
+            </a:solidFill>
+            <a:prstDash val="solid"/>
+          </a:ln>
+        </p:spPr>
+      </p:sp>
+      <p:sp>
+        <p:nvSpPr>
+          <p:cNvPr id="9" name="Text 6"/>
+          <p:cNvSpPr/>
+          <p:nvPr/>
+        </p:nvSpPr>
+        <p:spPr>
+          <a:xfrm>
+            <a:off x="8814816" y="1856232"/>
+            <a:ext cx="2962656" cy="1115568"/>
+          </a:xfrm>
+          <a:prstGeom prst="rect">
+            <a:avLst/>
+          </a:prstGeom>
+          <a:noFill/>
+          <a:ln/>
+        </p:spPr>
+        <p:txBody>
+          <a:bodyPr wrap="square" rtlCol="0" anchor="t"/>
+          <a:lstStyle/>
+          <a:p>
+            <a:pPr indent="0" marL="0">
+              <a:buNone/>
+            </a:pPr>
+            <a:r>
+              <a:rPr lang="en-US" sz="1200" b="1" dirty="0">
+                <a:solidFill>
+                  <a:srgbClr val="6E3A1C"/>
+                </a:solidFill>
+                <a:latin typeface="Malgun Gothic" pitchFamily="34" charset="0"/>
+                <a:ea typeface="Malgun Gothic" pitchFamily="34" charset="-122"/>
+                <a:cs typeface="Malgun Gothic" pitchFamily="34" charset="-120"/>
+              </a:rPr>
+              <a:t>공개 폼
+</a:t>
+            </a:r>
+            <a:pPr indent="0" marL="0">
+              <a:buNone/>
+            </a:pPr>
+            <a:r>
+              <a:rPr lang="en-US" sz="1050" dirty="0">
+                <a:solidFill>
+                  <a:srgbClr val="2E241C"/>
+                </a:solidFill>
+                <a:latin typeface="Malgun Gothic" pitchFamily="34" charset="0"/>
+                <a:ea typeface="Malgun Gothic" pitchFamily="34" charset="-122"/>
+                <a:cs typeface="Malgun Gothic" pitchFamily="34" charset="-120"/>
+              </a:rPr>
+              <a:t>/signup 은 로그인 없이 접근 — 회사명·이메일만 필수, 체험 데이터는 합성이며 업로드는 24시간 파기임을 안내</a:t>
+            </a:r>
+            <a:endParaRPr lang="en-US" sz="1200" dirty="0"/>
+          </a:p>
+        </p:txBody>
+      </p:sp>
+      <p:sp>
+        <p:nvSpPr>
+          <p:cNvPr id="10" name="Shape 7"/>
+          <p:cNvSpPr/>
+          <p:nvPr/>
+        </p:nvSpPr>
+        <p:spPr>
+          <a:xfrm>
+            <a:off x="8723376" y="3136392"/>
+            <a:ext cx="3145536" cy="1207008"/>
+          </a:xfrm>
+          <a:prstGeom prst="roundRect">
+            <a:avLst>
+              <a:gd name="adj" fmla="val 4545"/>
+            </a:avLst>
+          </a:prstGeom>
+          <a:solidFill>
+            <a:srgbClr val="FFFFFF"/>
+          </a:solidFill>
+          <a:ln w="12700">
+            <a:solidFill>
+              <a:srgbClr val="DCCDBB"/>
+            </a:solidFill>
+            <a:prstDash val="solid"/>
+          </a:ln>
+        </p:spPr>
+      </p:sp>
+      <p:sp>
+        <p:nvSpPr>
+          <p:cNvPr id="11" name="Text 8"/>
+          <p:cNvSpPr/>
+          <p:nvPr/>
+        </p:nvSpPr>
+        <p:spPr>
+          <a:xfrm>
+            <a:off x="8814816" y="3182112"/>
+            <a:ext cx="2962656" cy="1115568"/>
+          </a:xfrm>
+          <a:prstGeom prst="rect">
+            <a:avLst/>
+          </a:prstGeom>
+          <a:noFill/>
+          <a:ln/>
+        </p:spPr>
+        <p:txBody>
+          <a:bodyPr wrap="square" rtlCol="0" anchor="t"/>
+          <a:lstStyle/>
+          <a:p>
+            <a:pPr indent="0" marL="0">
+              <a:buNone/>
+            </a:pPr>
+            <a:r>
+              <a:rPr lang="en-US" sz="1200" b="1" dirty="0">
+                <a:solidFill>
+                  <a:srgbClr val="6E3A1C"/>
+                </a:solidFill>
+                <a:latin typeface="Malgun Gothic" pitchFamily="34" charset="0"/>
+                <a:ea typeface="Malgun Gothic" pitchFamily="34" charset="-122"/>
+                <a:cs typeface="Malgun Gothic" pitchFamily="34" charset="-120"/>
+              </a:rPr>
+              <a:t>봇 방어
+</a:t>
+            </a:r>
+            <a:pPr indent="0" marL="0">
+              <a:buNone/>
+            </a:pPr>
+            <a:r>
+              <a:rPr lang="en-US" sz="1050" dirty="0">
+                <a:solidFill>
+                  <a:srgbClr val="2E241C"/>
+                </a:solidFill>
+                <a:latin typeface="Malgun Gothic" pitchFamily="34" charset="0"/>
+                <a:ea typeface="Malgun Gothic" pitchFamily="34" charset="-122"/>
+                <a:cs typeface="Malgun Gothic" pitchFamily="34" charset="-120"/>
+              </a:rPr>
+              <a:t>숨은 허니팟 필드 + 시간당 접수 완충 — 봇은 조용히 흘려보내고 기록하지 않습니다</a:t>
+            </a:r>
+            <a:endParaRPr lang="en-US" sz="1200" dirty="0"/>
+          </a:p>
+        </p:txBody>
+      </p:sp>
+      <p:sp>
+        <p:nvSpPr>
+          <p:cNvPr id="12" name="Shape 9"/>
+          <p:cNvSpPr/>
+          <p:nvPr/>
+        </p:nvSpPr>
+        <p:spPr>
+          <a:xfrm>
+            <a:off x="8723376" y="4462272"/>
+            <a:ext cx="3145536" cy="1207008"/>
+          </a:xfrm>
+          <a:prstGeom prst="roundRect">
+            <a:avLst>
+              <a:gd name="adj" fmla="val 4545"/>
+            </a:avLst>
+          </a:prstGeom>
+          <a:solidFill>
+            <a:srgbClr val="FFFFFF"/>
+          </a:solidFill>
+          <a:ln w="12700">
+            <a:solidFill>
+              <a:srgbClr val="DCCDBB"/>
+            </a:solidFill>
+            <a:prstDash val="solid"/>
+          </a:ln>
+        </p:spPr>
+      </p:sp>
+      <p:sp>
+        <p:nvSpPr>
+          <p:cNvPr id="13" name="Text 10"/>
+          <p:cNvSpPr/>
+          <p:nvPr/>
+        </p:nvSpPr>
+        <p:spPr>
+          <a:xfrm>
+            <a:off x="8814816" y="4507992"/>
+            <a:ext cx="2962656" cy="1115568"/>
+          </a:xfrm>
+          <a:prstGeom prst="rect">
+            <a:avLst/>
+          </a:prstGeom>
+          <a:noFill/>
+          <a:ln/>
+        </p:spPr>
+        <p:txBody>
+          <a:bodyPr wrap="square" rtlCol="0" anchor="t"/>
+          <a:lstStyle/>
+          <a:p>
+            <a:pPr indent="0" marL="0">
+              <a:buNone/>
+            </a:pPr>
+            <a:r>
+              <a:rPr lang="en-US" sz="1200" b="1" dirty="0">
+                <a:solidFill>
+                  <a:srgbClr val="6E3A1C"/>
+                </a:solidFill>
+                <a:latin typeface="Malgun Gothic" pitchFamily="34" charset="0"/>
+                <a:ea typeface="Malgun Gothic" pitchFamily="34" charset="-122"/>
+                <a:cs typeface="Malgun Gothic" pitchFamily="34" charset="-120"/>
+              </a:rPr>
+              <a:t>다음 단계
+</a:t>
+            </a:r>
+            <a:pPr indent="0" marL="0">
+              <a:buNone/>
+            </a:pPr>
+            <a:r>
+              <a:rPr lang="en-US" sz="1050" dirty="0">
+                <a:solidFill>
+                  <a:srgbClr val="2E241C"/>
+                </a:solidFill>
+                <a:latin typeface="Malgun Gothic" pitchFamily="34" charset="0"/>
+                <a:ea typeface="Malgun Gothic" pitchFamily="34" charset="-122"/>
+                <a:cs typeface="Malgun Gothic" pitchFamily="34" charset="-120"/>
+              </a:rPr>
+              <a:t>접수되면 관리자에게 알림 — '체험 신청 관리'에서 발급/반려</a:t>
+            </a:r>
+            <a:endParaRPr lang="en-US" sz="1200" dirty="0"/>
+          </a:p>
+        </p:txBody>
+      </p:sp>
+    </p:spTree>
+  </p:cSld>
+  <p:clrMapOvr>
+    <a:masterClrMapping/>
+  </p:clrMapOvr>
+</p:sld>
+</file>
+
+<file path=ppt/slides/slide25.xml><?xml version="1.0" encoding="utf-8"?>
+<p:sld xmlns:a="http://schemas.openxmlformats.org/drawingml/2006/main" xmlns:r="http://schemas.openxmlformats.org/officeDocument/2006/relationships" xmlns:p="http://schemas.openxmlformats.org/presentationml/2006/main">
+  <p:cSld name="Slide 25">
+    <p:bg>
+      <p:bgPr>
+        <a:solidFill>
+          <a:srgbClr val="F8F2EA"/>
+        </a:solidFill>
+      </p:bgPr>
+    </p:bg>
+    <p:spTree>
+      <p:nvGrpSpPr>
+        <p:cNvPr id="1" name=""/>
+        <p:cNvGrpSpPr/>
+        <p:nvPr/>
+      </p:nvGrpSpPr>
+      <p:grpSpPr>
+        <a:xfrm>
+          <a:off x="0" y="0"/>
+          <a:ext cx="0" cy="0"/>
+          <a:chOff x="0" y="0"/>
+          <a:chExt cx="0" cy="0"/>
+        </a:xfrm>
+      </p:grpSpPr>
+      <p:sp>
+        <p:nvSpPr>
+          <p:cNvPr id="2" name="Text 0"/>
+          <p:cNvSpPr/>
+          <p:nvPr/>
+        </p:nvSpPr>
+        <p:spPr>
+          <a:xfrm>
+            <a:off x="11686032" y="6473952"/>
+            <a:ext cx="365760" cy="274320"/>
+          </a:xfrm>
+          <a:prstGeom prst="rect">
+            <a:avLst/>
+          </a:prstGeom>
+          <a:noFill/>
+          <a:ln/>
+        </p:spPr>
+        <p:txBody>
+          <a:bodyPr wrap="square" rtlCol="0" anchor="ctr"/>
+          <a:lstStyle/>
+          <a:p>
+            <a:pPr algn="r" indent="0" marL="0">
+              <a:buNone/>
+            </a:pPr>
+            <a:r>
+              <a:rPr lang="en-US" sz="1000" dirty="0">
+                <a:solidFill>
+                  <a:srgbClr val="76675A"/>
+                </a:solidFill>
+                <a:latin typeface="Malgun Gothic" pitchFamily="34" charset="0"/>
+                <a:ea typeface="Malgun Gothic" pitchFamily="34" charset="-122"/>
+                <a:cs typeface="Malgun Gothic" pitchFamily="34" charset="-120"/>
+              </a:rPr>
+              <a:t>25</a:t>
+            </a:r>
+            <a:endParaRPr lang="en-US" sz="1000" dirty="0"/>
+          </a:p>
+        </p:txBody>
+      </p:sp>
+      <p:sp>
+        <p:nvSpPr>
+          <p:cNvPr id="3" name="Text 1"/>
+          <p:cNvSpPr/>
+          <p:nvPr/>
+        </p:nvSpPr>
+        <p:spPr>
+          <a:xfrm>
+            <a:off x="566928" y="310896"/>
+            <a:ext cx="10515600" cy="292608"/>
+          </a:xfrm>
+          <a:prstGeom prst="rect">
+            <a:avLst/>
+          </a:prstGeom>
+          <a:noFill/>
+          <a:ln/>
+        </p:spPr>
+        <p:txBody>
+          <a:bodyPr wrap="square" rtlCol="0" anchor="ctr"/>
+          <a:lstStyle/>
+          <a:p>
+            <a:pPr indent="0" marL="0">
+              <a:buNone/>
+            </a:pPr>
+            <a:r>
+              <a:rPr lang="en-US" sz="1200" b="1" spc="300" kern="0" dirty="0">
+                <a:solidFill>
+                  <a:srgbClr val="C07F1E"/>
+                </a:solidFill>
+                <a:latin typeface="Malgun Gothic" pitchFamily="34" charset="0"/>
+                <a:ea typeface="Malgun Gothic" pitchFamily="34" charset="-122"/>
+                <a:cs typeface="Malgun Gothic" pitchFamily="34" charset="-120"/>
+              </a:rPr>
+              <a:t>6. ROUTINE</a:t>
+            </a:r>
+            <a:endParaRPr lang="en-US" sz="1200" dirty="0"/>
+          </a:p>
+        </p:txBody>
+      </p:sp>
+      <p:sp>
+        <p:nvSpPr>
+          <p:cNvPr id="4" name="Text 2"/>
+          <p:cNvSpPr/>
+          <p:nvPr/>
+        </p:nvSpPr>
+        <p:spPr>
+          <a:xfrm>
+            <a:off x="566928" y="566928"/>
+            <a:ext cx="11055096" cy="566928"/>
+          </a:xfrm>
+          <a:prstGeom prst="rect">
+            <a:avLst/>
+          </a:prstGeom>
+          <a:noFill/>
+          <a:ln/>
+        </p:spPr>
+        <p:txBody>
+          <a:bodyPr wrap="square" rtlCol="0" anchor="ctr"/>
+          <a:lstStyle/>
+          <a:p>
+            <a:pPr indent="0" marL="0">
+              <a:buNone/>
+            </a:pPr>
+            <a:r>
+              <a:rPr lang="en-US" sz="2700" b="1" dirty="0">
+                <a:solidFill>
+                  <a:srgbClr val="6E3A1C"/>
+                </a:solidFill>
+                <a:latin typeface="Malgun Gothic" pitchFamily="34" charset="0"/>
+                <a:ea typeface="Malgun Gothic" pitchFamily="34" charset="-122"/>
+                <a:cs typeface="Malgun Gothic" pitchFamily="34" charset="-120"/>
+              </a:rPr>
+              <a:t>표준 운영 일과 — 일·주·월</a:t>
+            </a:r>
+            <a:endParaRPr lang="en-US" sz="2700" dirty="0"/>
+          </a:p>
+        </p:txBody>
+      </p:sp>
+      <p:sp>
+        <p:nvSpPr>
+          <p:cNvPr id="5" name="Shape 3"/>
+          <p:cNvSpPr/>
+          <p:nvPr/>
+        </p:nvSpPr>
+        <p:spPr>
+          <a:xfrm>
+            <a:off x="566928" y="1207008"/>
+            <a:ext cx="1051560" cy="41148"/>
+          </a:xfrm>
+          <a:prstGeom prst="rect">
+            <a:avLst/>
+          </a:prstGeom>
+          <a:solidFill>
+            <a:srgbClr val="E8A33D"/>
+          </a:solidFill>
+          <a:ln/>
+        </p:spPr>
+      </p:sp>
       <p:graphicFrame>
         <p:nvGraphicFramePr>
-          <p:cNvPr id="23" name="Table 0"/>
+          <p:cNvPr id="26" name="Table 0"/>
           <p:cNvGraphicFramePr>
             <a:graphicFrameLocks noGrp="1"/>
           </p:cNvGraphicFramePr>
@@ -12372,9 +14247,9 @@
 </p:sld>
 </file>
 
-<file path=ppt/slides/slide23.xml><?xml version="1.0" encoding="utf-8"?>
+<file path=ppt/slides/slide26.xml><?xml version="1.0" encoding="utf-8"?>
 <p:sld xmlns:a="http://schemas.openxmlformats.org/drawingml/2006/main" xmlns:r="http://schemas.openxmlformats.org/officeDocument/2006/relationships" xmlns:p="http://schemas.openxmlformats.org/presentationml/2006/main">
-  <p:cSld name="Slide 23">
+  <p:cSld name="Slide 26">
     <p:bg>
       <p:bgPr>
         <a:solidFill>
@@ -12429,7 +14304,7 @@
                 <a:ea typeface="Malgun Gothic" pitchFamily="34" charset="-122"/>
                 <a:cs typeface="Malgun Gothic" pitchFamily="34" charset="-120"/>
               </a:rPr>
-              <a:t>23</a:t>
+              <a:t>26</a:t>
             </a:r>
             <a:endParaRPr lang="en-US" sz="1000" dirty="0"/>
           </a:p>
@@ -12535,7 +14410,7 @@
       </p:sp>
       <p:graphicFrame>
         <p:nvGraphicFramePr>
-          <p:cNvPr id="24" name="Table 0"/>
+          <p:cNvPr id="27" name="Table 0"/>
           <p:cNvGraphicFramePr>
             <a:graphicFrameLocks noGrp="1"/>
           </p:cNvGraphicFramePr>
@@ -13996,9 +15871,9 @@
 </p:sld>
 </file>
 
-<file path=ppt/slides/slide24.xml><?xml version="1.0" encoding="utf-8"?>
+<file path=ppt/slides/slide27.xml><?xml version="1.0" encoding="utf-8"?>
 <p:sld xmlns:a="http://schemas.openxmlformats.org/drawingml/2006/main" xmlns:r="http://schemas.openxmlformats.org/officeDocument/2006/relationships" xmlns:p="http://schemas.openxmlformats.org/presentationml/2006/main">
-  <p:cSld name="Slide 24">
+  <p:cSld name="Slide 27">
     <p:bg>
       <p:bgPr>
         <a:solidFill>
@@ -14053,7 +15928,7 @@
                 <a:ea typeface="Malgun Gothic" pitchFamily="34" charset="-122"/>
                 <a:cs typeface="Malgun Gothic" pitchFamily="34" charset="-120"/>
               </a:rPr>
-              <a:t>24</a:t>
+              <a:t>27</a:t>
             </a:r>
             <a:endParaRPr lang="en-US" sz="1000" dirty="0"/>
           </a:p>
@@ -14159,7 +16034,7 @@
       </p:sp>
       <p:graphicFrame>
         <p:nvGraphicFramePr>
-          <p:cNvPr id="25" name="Table 0"/>
+          <p:cNvPr id="28" name="Table 0"/>
           <p:cNvGraphicFramePr>
             <a:graphicFrameLocks noGrp="1"/>
           </p:cNvGraphicFramePr>
@@ -15904,7 +17779,7 @@
                 <a:ea typeface="Malgun Gothic" pitchFamily="34" charset="-122"/>
                 <a:cs typeface="Malgun Gothic" pitchFamily="34" charset="-120"/>
               </a:rPr>
-              <a:t>온보딩 설정 · 계정 관리 · 배치 실행 · Odoo 연결 · 서비스 상태 (17~21쪽)</a:t>
+              <a:t>온보딩 설정 · 계정 관리 · 배치 실행 · 과금 · 체험 신청 관리 · Odoo 연결 · 서비스 상태 · 체험 신청 폼 (17~24쪽)</a:t>
             </a:r>
             <a:endParaRPr lang="en-US" sz="1600" dirty="0"/>
           </a:p>
@@ -15998,7 +17873,7 @@
                 <a:ea typeface="Malgun Gothic" pitchFamily="34" charset="-122"/>
                 <a:cs typeface="Malgun Gothic" pitchFamily="34" charset="-120"/>
               </a:rPr>
-              <a:t>일·주·월 체크리스트 (22쪽)</a:t>
+              <a:t>일·주·월 체크리스트 (25쪽)</a:t>
             </a:r>
             <a:endParaRPr lang="en-US" sz="1600" dirty="0"/>
           </a:p>
@@ -16092,7 +17967,7 @@
                 <a:ea typeface="Malgun Gothic" pitchFamily="34" charset="-122"/>
                 <a:cs typeface="Malgun Gothic" pitchFamily="34" charset="-120"/>
               </a:rPr>
-              <a:t>등급별 대응 · 백업/복구 · 저장소 상태 (23~24쪽)</a:t>
+              <a:t>등급별 대응 · 백업/복구 · 저장소 상태 (26~27쪽)</a:t>
             </a:r>
             <a:endParaRPr lang="en-US" sz="1600" dirty="0"/>
           </a:p>

--- a/docs/presentations/AX_Operations_Manual_v2.pptx
+++ b/docs/presentations/AX_Operations_Manual_v2.pptx
@@ -32,9 +32,11 @@
     <p:sldId id="280" r:id="rId26"/>
     <p:sldId id="281" r:id="rId27"/>
     <p:sldId id="282" r:id="rId28"/>
+    <p:sldId id="283" r:id="rId29"/>
+    <p:sldId id="284" r:id="rId30"/>
   </p:sldIdLst>
   <p:notesMasterIdLst>
-    <p:notesMasterId r:id="rId29"/>
+    <p:notesMasterId r:id="rId31"/>
   </p:notesMasterIdLst>
   <p:sldSz cx="12188952" cy="6858000"/>
   <p:notesSz cx="6858000" cy="12188952"/>
@@ -2224,6 +2226,182 @@
             <a:fld id="{F7021451-1387-4CA6-816F-3879F97B5CBC}" type="slidenum">
               <a:rPr lang="en-US"/>
               <a:t>27</a:t>
+            </a:fld>
+            <a:endParaRPr lang="en-US"/>
+          </a:p>
+        </p:txBody>
+      </p:sp>
+    </p:spTree>
+    <p:extLst>
+      <p:ext uri="{BB962C8B-B14F-4D97-AF65-F5344CB8AC3E}">
+        <p14:creationId xmlns:p14="http://schemas.microsoft.com/office/powerpoint/2010/main" val="1024086991"/>
+      </p:ext>
+    </p:extLst>
+  </p:cSld>
+  <p:clrMapOvr>
+    <a:masterClrMapping/>
+  </p:clrMapOvr>
+</p:notes>
+</file>
+
+<file path=ppt/notesSlides/notesSlide28.xml><?xml version="1.0" encoding="utf-8"?>
+<p:notes xmlns:a="http://schemas.openxmlformats.org/drawingml/2006/main" xmlns:r="http://schemas.openxmlformats.org/officeDocument/2006/relationships" xmlns:p="http://schemas.openxmlformats.org/presentationml/2006/main">
+  <p:cSld>
+    <p:spTree>
+      <p:nvGrpSpPr>
+        <p:cNvPr id="1" name=""/>
+        <p:cNvGrpSpPr/>
+        <p:nvPr/>
+      </p:nvGrpSpPr>
+      <p:grpSpPr>
+        <a:xfrm>
+          <a:off x="0" y="0"/>
+          <a:ext cx="0" cy="0"/>
+          <a:chOff x="0" y="0"/>
+          <a:chExt cx="0" cy="0"/>
+        </a:xfrm>
+      </p:grpSpPr>
+      <p:sp>
+        <p:nvSpPr>
+          <p:cNvPr id="2" name="Slide Image Placeholder 1"/>
+          <p:cNvSpPr>
+            <a:spLocks noGrp="1" noRot="1" noChangeAspect="1"/>
+          </p:cNvSpPr>
+          <p:nvPr>
+            <p:ph type="sldImg"/>
+          </p:nvPr>
+        </p:nvSpPr>
+        <p:spPr/>
+      </p:sp>
+      <p:sp>
+        <p:nvSpPr>
+          <p:cNvPr id="3" name="Notes Placeholder 2"/>
+          <p:cNvSpPr>
+            <a:spLocks noGrp="1"/>
+          </p:cNvSpPr>
+          <p:nvPr>
+            <p:ph type="body" idx="1"/>
+          </p:nvPr>
+        </p:nvSpPr>
+        <p:spPr/>
+        <p:txBody>
+          <a:bodyPr/>
+          <a:lstStyle/>
+          <a:p>
+            <a:r>
+              <a:rPr lang="en-US" dirty="0"/>
+              <a:t/>
+            </a:r>
+            <a:endParaRPr lang="en-US" dirty="0"/>
+          </a:p>
+        </p:txBody>
+      </p:sp>
+      <p:sp>
+        <p:nvSpPr>
+          <p:cNvPr id="4" name="Slide Number Placeholder 3"/>
+          <p:cNvSpPr>
+            <a:spLocks noGrp="1"/>
+          </p:cNvSpPr>
+          <p:nvPr>
+            <p:ph type="sldNum" sz="quarter" idx="10"/>
+          </p:nvPr>
+        </p:nvSpPr>
+        <p:spPr/>
+        <p:txBody>
+          <a:bodyPr/>
+          <a:lstStyle/>
+          <a:p>
+            <a:fld id="{F7021451-1387-4CA6-816F-3879F97B5CBC}" type="slidenum">
+              <a:rPr lang="en-US"/>
+              <a:t>28</a:t>
+            </a:fld>
+            <a:endParaRPr lang="en-US"/>
+          </a:p>
+        </p:txBody>
+      </p:sp>
+    </p:spTree>
+    <p:extLst>
+      <p:ext uri="{BB962C8B-B14F-4D97-AF65-F5344CB8AC3E}">
+        <p14:creationId xmlns:p14="http://schemas.microsoft.com/office/powerpoint/2010/main" val="1024086991"/>
+      </p:ext>
+    </p:extLst>
+  </p:cSld>
+  <p:clrMapOvr>
+    <a:masterClrMapping/>
+  </p:clrMapOvr>
+</p:notes>
+</file>
+
+<file path=ppt/notesSlides/notesSlide29.xml><?xml version="1.0" encoding="utf-8"?>
+<p:notes xmlns:a="http://schemas.openxmlformats.org/drawingml/2006/main" xmlns:r="http://schemas.openxmlformats.org/officeDocument/2006/relationships" xmlns:p="http://schemas.openxmlformats.org/presentationml/2006/main">
+  <p:cSld>
+    <p:spTree>
+      <p:nvGrpSpPr>
+        <p:cNvPr id="1" name=""/>
+        <p:cNvGrpSpPr/>
+        <p:nvPr/>
+      </p:nvGrpSpPr>
+      <p:grpSpPr>
+        <a:xfrm>
+          <a:off x="0" y="0"/>
+          <a:ext cx="0" cy="0"/>
+          <a:chOff x="0" y="0"/>
+          <a:chExt cx="0" cy="0"/>
+        </a:xfrm>
+      </p:grpSpPr>
+      <p:sp>
+        <p:nvSpPr>
+          <p:cNvPr id="2" name="Slide Image Placeholder 1"/>
+          <p:cNvSpPr>
+            <a:spLocks noGrp="1" noRot="1" noChangeAspect="1"/>
+          </p:cNvSpPr>
+          <p:nvPr>
+            <p:ph type="sldImg"/>
+          </p:nvPr>
+        </p:nvSpPr>
+        <p:spPr/>
+      </p:sp>
+      <p:sp>
+        <p:nvSpPr>
+          <p:cNvPr id="3" name="Notes Placeholder 2"/>
+          <p:cNvSpPr>
+            <a:spLocks noGrp="1"/>
+          </p:cNvSpPr>
+          <p:nvPr>
+            <p:ph type="body" idx="1"/>
+          </p:nvPr>
+        </p:nvSpPr>
+        <p:spPr/>
+        <p:txBody>
+          <a:bodyPr/>
+          <a:lstStyle/>
+          <a:p>
+            <a:r>
+              <a:rPr lang="en-US" dirty="0"/>
+              <a:t/>
+            </a:r>
+            <a:endParaRPr lang="en-US" dirty="0"/>
+          </a:p>
+        </p:txBody>
+      </p:sp>
+      <p:sp>
+        <p:nvSpPr>
+          <p:cNvPr id="4" name="Slide Number Placeholder 3"/>
+          <p:cNvSpPr>
+            <a:spLocks noGrp="1"/>
+          </p:cNvSpPr>
+          <p:nvPr>
+            <p:ph type="sldNum" sz="quarter" idx="10"/>
+          </p:nvPr>
+        </p:nvSpPr>
+        <p:spPr/>
+        <p:txBody>
+          <a:bodyPr/>
+          <a:lstStyle/>
+          <a:p>
+            <a:fld id="{F7021451-1387-4CA6-816F-3879F97B5CBC}" type="slidenum">
+              <a:rPr lang="en-US"/>
+              <a:t>29</a:t>
             </a:fld>
             <a:endParaRPr lang="en-US"/>
           </a:p>
@@ -3261,7 +3439,7 @@
                 <a:ea typeface="Malgun Gothic" pitchFamily="34" charset="-122"/>
                 <a:cs typeface="Malgun Gothic" pitchFamily="34" charset="-120"/>
               </a:rPr>
-              <a:t>표준 운영매뉴얼 v2.1</a:t>
+              <a:t>표준 운영매뉴얼 v2.2</a:t>
             </a:r>
             <a:endParaRPr lang="en-US" sz="4400" dirty="0"/>
           </a:p>
@@ -3359,7 +3537,7 @@
                 <a:ea typeface="Malgun Gothic" pitchFamily="34" charset="-122"/>
                 <a:cs typeface="Malgun Gothic" pitchFamily="34" charset="-120"/>
               </a:rPr>
-              <a:t>v2.1 갱신: </a:t>
+              <a:t>v2.2 갱신: </a:t>
             </a:r>
             <a:pPr indent="0" marL="0">
               <a:buNone/>
@@ -3373,7 +3551,7 @@
                 <a:ea typeface="Malgun Gothic" pitchFamily="34" charset="-122"/>
                 <a:cs typeface="Malgun Gothic" pitchFamily="34" charset="-120"/>
               </a:rPr>
-              <a:t>6단계 상용 화면 3종(과금·체험 신청 관리·체험 신청 폼)을 추가하고 배치 실행(에이전트·재학습 상태)과 서비스 상태(데이터 정합 신호) 화면을 최신 캡처로 갱신했습니다. 화면은 전부 실제 구동 캡처이며 수치는 합성 샘플입니다.</a:t>
+              <a:t>7단계 프로젝트·KPI 센터 2화면(정의 위저드·KPI 대시보드)을 추가했습니다 — 프로젝트 정의→모듈·알고리즘→KPI→성과→피드백의 무한 개선 루프가 화면으로 완성됐습니다. 화면은 전부 실제 구동 캡처이며 수치는 합성 샘플입니다.</a:t>
             </a:r>
             <a:endParaRPr lang="en-US" sz="1400" dirty="0"/>
           </a:p>
@@ -3412,7 +3590,7 @@
                 <a:ea typeface="Malgun Gothic" pitchFamily="34" charset="-122"/>
                 <a:cs typeface="Malgun Gothic" pitchFamily="34" charset="-120"/>
               </a:rPr>
-              <a:t>에이에스씨(ASC) · 이형근 · v2.1 · 2026. 9. 12</a:t>
+              <a:t>에이에스씨(ASC) · 이형근 · v2.2 · 2026. 9. 12</a:t>
             </a:r>
             <a:endParaRPr lang="en-US" sz="1300" dirty="0"/>
           </a:p>
@@ -5369,7 +5547,7 @@
                 <a:ea typeface="Malgun Gothic" pitchFamily="34" charset="-122"/>
                 <a:cs typeface="Malgun Gothic" pitchFamily="34" charset="-120"/>
               </a:rPr>
-              <a:t>4. MONITOR · 관리자/열람</a:t>
+              <a:t>4. MONITOR · 전 역할</a:t>
             </a:r>
             <a:endParaRPr lang="en-US" sz="1200" dirty="0"/>
           </a:p>
@@ -5408,7 +5586,7 @@
                 <a:ea typeface="Malgun Gothic" pitchFamily="34" charset="-122"/>
                 <a:cs typeface="Malgun Gothic" pitchFamily="34" charset="-120"/>
               </a:rPr>
-              <a:t>감사 로그 — 누가 무엇을 언제</a:t>
+              <a:t>프로젝트 — 정의에서 성과까지</a:t>
             </a:r>
             <a:endParaRPr lang="en-US" sz="2700" dirty="0"/>
           </a:p>
@@ -5436,7 +5614,7 @@
       </p:sp>
       <p:pic>
         <p:nvPicPr>
-          <p:cNvPr id="6" name="Image 0" descr="/tmp/claude-0/-home-user-thirdbrain-web/bc639c69-a342-56eb-af6c-6a89fd170e25/scratchpad/shots_v2/audit.png">    </p:cNvPr>
+          <p:cNvPr id="6" name="Image 0" descr="/tmp/claude-0/-home-user-thirdbrain-web/bc639c69-a342-56eb-af6c-6a89fd170e25/scratchpad/shots_v2/projects.png">    </p:cNvPr>
           <p:cNvPicPr>
             <a:picLocks noChangeAspect="1"/>
           </p:cNvPicPr>
@@ -5564,7 +5742,7 @@
                 <a:ea typeface="Malgun Gothic" pitchFamily="34" charset="-122"/>
                 <a:cs typeface="Malgun Gothic" pitchFamily="34" charset="-120"/>
               </a:rPr>
-              <a:t>전 결정 기록
+              <a:t>프로젝트 정의
 </a:t>
             </a:r>
             <a:pPr indent="0" marL="0">
@@ -5579,7 +5757,7 @@
                 <a:ea typeface="Malgun Gothic" pitchFamily="34" charset="-122"/>
                 <a:cs typeface="Malgun Gothic" pitchFamily="34" charset="-120"/>
               </a:rPr>
-              <a:t>승인·반려·확정·설정 변경·계정 발급까지 전부 남습니다 — 지울 수 없는 원장</a:t>
+              <a:t>이름·경영 목표 한 줄 + 5대 지능화 요구사항(수요예측·재고·생산계획·설비/품질/안전·지식센터) 체크 — 고른 영역의 모듈·알고리즘·KPI가 자동 등재</a:t>
             </a:r>
             <a:endParaRPr lang="en-US" sz="1200" dirty="0"/>
           </a:p>
@@ -5645,7 +5823,7 @@
                 <a:ea typeface="Malgun Gothic" pitchFamily="34" charset="-122"/>
                 <a:cs typeface="Malgun Gothic" pitchFamily="34" charset="-120"/>
               </a:rPr>
-              <a:t>분쟁 대비
+              <a:t>회사에 맞게
 </a:t>
             </a:r>
             <a:pPr indent="0" marL="0">
@@ -5660,7 +5838,88 @@
                 <a:ea typeface="Malgun Gothic" pitchFamily="34" charset="-122"/>
                 <a:cs typeface="Malgun Gothic" pitchFamily="34" charset="-120"/>
               </a:rPr>
-              <a:t>'왜 이 발주가 나갔나'는 카드 번호로 검색 — 제안 근거와 승인자·시각이 한 줄로</a:t>
+              <a:t>모든 KPI의 목표치는 사람이 정합니다 — 목표 없는 KPI는 개선 제안도 오지 않습니다(현장 합의 우선)</a:t>
+            </a:r>
+            <a:endParaRPr lang="en-US" sz="1200" dirty="0"/>
+          </a:p>
+        </p:txBody>
+      </p:sp>
+      <p:sp>
+        <p:nvSpPr>
+          <p:cNvPr id="12" name="Shape 9"/>
+          <p:cNvSpPr/>
+          <p:nvPr/>
+        </p:nvSpPr>
+        <p:spPr>
+          <a:xfrm>
+            <a:off x="8723376" y="4462272"/>
+            <a:ext cx="3145536" cy="1207008"/>
+          </a:xfrm>
+          <a:prstGeom prst="roundRect">
+            <a:avLst>
+              <a:gd name="adj" fmla="val 4545"/>
+            </a:avLst>
+          </a:prstGeom>
+          <a:solidFill>
+            <a:srgbClr val="FFFFFF"/>
+          </a:solidFill>
+          <a:ln w="12700">
+            <a:solidFill>
+              <a:srgbClr val="DCCDBB"/>
+            </a:solidFill>
+            <a:prstDash val="solid"/>
+          </a:ln>
+        </p:spPr>
+      </p:sp>
+      <p:sp>
+        <p:nvSpPr>
+          <p:cNvPr id="13" name="Text 10"/>
+          <p:cNvSpPr/>
+          <p:nvPr/>
+        </p:nvSpPr>
+        <p:spPr>
+          <a:xfrm>
+            <a:off x="8814816" y="4507992"/>
+            <a:ext cx="2962656" cy="1115568"/>
+          </a:xfrm>
+          <a:prstGeom prst="rect">
+            <a:avLst/>
+          </a:prstGeom>
+          <a:noFill/>
+          <a:ln/>
+        </p:spPr>
+        <p:txBody>
+          <a:bodyPr wrap="square" rtlCol="0" anchor="t"/>
+          <a:lstStyle/>
+          <a:p>
+            <a:pPr indent="0" marL="0">
+              <a:buNone/>
+            </a:pPr>
+            <a:r>
+              <a:rPr lang="en-US" sz="1200" b="1" dirty="0">
+                <a:solidFill>
+                  <a:srgbClr val="6E3A1C"/>
+                </a:solidFill>
+                <a:latin typeface="Malgun Gothic" pitchFamily="34" charset="0"/>
+                <a:ea typeface="Malgun Gothic" pitchFamily="34" charset="-122"/>
+                <a:cs typeface="Malgun Gothic" pitchFamily="34" charset="-120"/>
+              </a:rPr>
+              <a:t>누가 보나
+</a:t>
+            </a:r>
+            <a:pPr indent="0" marL="0">
+              <a:buNone/>
+            </a:pPr>
+            <a:r>
+              <a:rPr lang="en-US" sz="1050" dirty="0">
+                <a:solidFill>
+                  <a:srgbClr val="2E241C"/>
+                </a:solidFill>
+                <a:latin typeface="Malgun Gothic" pitchFamily="34" charset="0"/>
+                <a:ea typeface="Malgun Gothic" pitchFamily="34" charset="-122"/>
+                <a:cs typeface="Malgun Gothic" pitchFamily="34" charset="-120"/>
+              </a:rPr>
+              <a:t>정의는 관리자, 열람은 전 역할 — 아침 브리핑과 함께 5분 확인</a:t>
             </a:r>
             <a:endParaRPr lang="en-US" sz="1200" dirty="0"/>
           </a:p>
@@ -5770,7 +6029,7 @@
                 <a:ea typeface="Malgun Gothic" pitchFamily="34" charset="-122"/>
                 <a:cs typeface="Malgun Gothic" pitchFamily="34" charset="-120"/>
               </a:rPr>
-              <a:t>4. MONITOR · 승인자</a:t>
+              <a:t>4. MONITOR · 전 역할</a:t>
             </a:r>
             <a:endParaRPr lang="en-US" sz="1200" dirty="0"/>
           </a:p>
@@ -5809,7 +6068,7 @@
                 <a:ea typeface="Malgun Gothic" pitchFamily="34" charset="-122"/>
                 <a:cs typeface="Malgun Gothic" pitchFamily="34" charset="-120"/>
               </a:rPr>
-              <a:t>자동실행 — 상한과 회수</a:t>
+              <a:t>KPI 대시보드 — 무한 개선 루프</a:t>
             </a:r>
             <a:endParaRPr lang="en-US" sz="2700" dirty="0"/>
           </a:p>
@@ -5837,7 +6096,7 @@
       </p:sp>
       <p:pic>
         <p:nvPicPr>
-          <p:cNvPr id="6" name="Image 0" descr="/tmp/claude-0/-home-user-thirdbrain-web/bc639c69-a342-56eb-af6c-6a89fd170e25/scratchpad/shots_v2/promotions.png">    </p:cNvPr>
+          <p:cNvPr id="6" name="Image 0" descr="/tmp/claude-0/-home-user-thirdbrain-web/bc639c69-a342-56eb-af6c-6a89fd170e25/scratchpad/shots_v2/project_dash.png">    </p:cNvPr>
           <p:cNvPicPr>
             <a:picLocks noChangeAspect="1"/>
           </p:cNvPicPr>
@@ -5965,7 +6224,7 @@
                 <a:ea typeface="Malgun Gothic" pitchFamily="34" charset="-122"/>
                 <a:cs typeface="Malgun Gothic" pitchFamily="34" charset="-120"/>
               </a:rPr>
-              <a:t>신뢰 기반 자동화
+              <a:t>성과 한눈에
 </a:t>
             </a:r>
             <a:pPr indent="0" marL="0">
@@ -5980,7 +6239,7 @@
                 <a:ea typeface="Malgun Gothic" pitchFamily="34" charset="-122"/>
                 <a:cs typeface="Malgun Gothic" pitchFamily="34" charset="-120"/>
               </a:rPr>
-              <a:t>반복 승인된 유형은 금액 상한 내 자동실행으로 승급 가능 — 상한·승인율 기준은 화면에서 관리</a:t>
+              <a:t>KPI 카드마다 최신 실측·기준선·목표·판정(달성/미달/측정 전)과 시계열 차트(점선=목표선) — 측정 전 지표는 어떤 데이터가 더 필요한지 그대로 보여줍니다</a:t>
             </a:r>
             <a:endParaRPr lang="en-US" sz="1200" dirty="0"/>
           </a:p>
@@ -6046,7 +6305,7 @@
                 <a:ea typeface="Malgun Gothic" pitchFamily="34" charset="-122"/>
                 <a:cs typeface="Malgun Gothic" pitchFamily="34" charset="-120"/>
               </a:rPr>
-              <a:t>언제든 회수
+              <a:t>미달이면 카드
 </a:t>
             </a:r>
             <a:pPr indent="0" marL="0">
@@ -6061,7 +6320,88 @@
                 <a:ea typeface="Malgun Gothic" pitchFamily="34" charset="-122"/>
                 <a:cs typeface="Malgun Gothic" pitchFamily="34" charset="-120"/>
               </a:rPr>
-              <a:t>성과가 흔들리면 즉시 수동 승인으로 강등 — 자동화는 특권이지 기본값이 아닙니다</a:t>
+              <a:t>야간 측정에서 미달로 판정되면 개선 제안 카드가 승인함으로 옵니다(같은 KPI 중복 방지) — 승인하면 피드백 이력에 기록</a:t>
+            </a:r>
+            <a:endParaRPr lang="en-US" sz="1200" dirty="0"/>
+          </a:p>
+        </p:txBody>
+      </p:sp>
+      <p:sp>
+        <p:nvSpPr>
+          <p:cNvPr id="12" name="Shape 9"/>
+          <p:cNvSpPr/>
+          <p:nvPr/>
+        </p:nvSpPr>
+        <p:spPr>
+          <a:xfrm>
+            <a:off x="8723376" y="4462272"/>
+            <a:ext cx="3145536" cy="1207008"/>
+          </a:xfrm>
+          <a:prstGeom prst="roundRect">
+            <a:avLst>
+              <a:gd name="adj" fmla="val 4545"/>
+            </a:avLst>
+          </a:prstGeom>
+          <a:solidFill>
+            <a:srgbClr val="FFFFFF"/>
+          </a:solidFill>
+          <a:ln w="12700">
+            <a:solidFill>
+              <a:srgbClr val="DCCDBB"/>
+            </a:solidFill>
+            <a:prstDash val="solid"/>
+          </a:ln>
+        </p:spPr>
+      </p:sp>
+      <p:sp>
+        <p:nvSpPr>
+          <p:cNvPr id="13" name="Text 10"/>
+          <p:cNvSpPr/>
+          <p:nvPr/>
+        </p:nvSpPr>
+        <p:spPr>
+          <a:xfrm>
+            <a:off x="8814816" y="4507992"/>
+            <a:ext cx="2962656" cy="1115568"/>
+          </a:xfrm>
+          <a:prstGeom prst="rect">
+            <a:avLst/>
+          </a:prstGeom>
+          <a:noFill/>
+          <a:ln/>
+        </p:spPr>
+        <p:txBody>
+          <a:bodyPr wrap="square" rtlCol="0" anchor="t"/>
+          <a:lstStyle/>
+          <a:p>
+            <a:pPr indent="0" marL="0">
+              <a:buNone/>
+            </a:pPr>
+            <a:r>
+              <a:rPr lang="en-US" sz="1200" b="1" dirty="0">
+                <a:solidFill>
+                  <a:srgbClr val="6E3A1C"/>
+                </a:solidFill>
+                <a:latin typeface="Malgun Gothic" pitchFamily="34" charset="0"/>
+                <a:ea typeface="Malgun Gothic" pitchFamily="34" charset="-122"/>
+                <a:cs typeface="Malgun Gothic" pitchFamily="34" charset="-120"/>
+              </a:rPr>
+              <a:t>조정도 이력
+</a:t>
+            </a:r>
+            <a:pPr indent="0" marL="0">
+              <a:buNone/>
+            </a:pPr>
+            <a:r>
+              <a:rPr lang="en-US" sz="1050" dirty="0">
+                <a:solidFill>
+                  <a:srgbClr val="2E241C"/>
+                </a:solidFill>
+                <a:latin typeface="Malgun Gothic" pitchFamily="34" charset="0"/>
+                <a:ea typeface="Malgun Gothic" pitchFamily="34" charset="-122"/>
+                <a:cs typeface="Malgun Gothic" pitchFamily="34" charset="-120"/>
+              </a:rPr>
+              <a:t>목표 조정은 사유와 함께 이력에 남고, 다음 측정이 재판정 — 측정→제안→승인→조정→재측정이 멈추지 않는 루프</a:t>
             </a:r>
             <a:endParaRPr lang="en-US" sz="1200" dirty="0"/>
           </a:p>
@@ -6171,7 +6511,7 @@
                 <a:ea typeface="Malgun Gothic" pitchFamily="34" charset="-122"/>
                 <a:cs typeface="Malgun Gothic" pitchFamily="34" charset="-120"/>
               </a:rPr>
-              <a:t>4. MONITOR · 스튜어드</a:t>
+              <a:t>4. MONITOR · 관리자/열람</a:t>
             </a:r>
             <a:endParaRPr lang="en-US" sz="1200" dirty="0"/>
           </a:p>
@@ -6210,7 +6550,7 @@
                 <a:ea typeface="Malgun Gothic" pitchFamily="34" charset="-122"/>
                 <a:cs typeface="Malgun Gothic" pitchFamily="34" charset="-120"/>
               </a:rPr>
-              <a:t>자산 대장 — 데이터 자산 관리</a:t>
+              <a:t>감사 로그 — 누가 무엇을 언제</a:t>
             </a:r>
             <a:endParaRPr lang="en-US" sz="2700" dirty="0"/>
           </a:p>
@@ -6238,7 +6578,7 @@
       </p:sp>
       <p:pic>
         <p:nvPicPr>
-          <p:cNvPr id="6" name="Image 0" descr="/tmp/claude-0/-home-user-thirdbrain-web/bc639c69-a342-56eb-af6c-6a89fd170e25/scratchpad/shots_v2/assets.png">    </p:cNvPr>
+          <p:cNvPr id="6" name="Image 0" descr="/tmp/claude-0/-home-user-thirdbrain-web/bc639c69-a342-56eb-af6c-6a89fd170e25/scratchpad/shots_v2/audit.png">    </p:cNvPr>
           <p:cNvPicPr>
             <a:picLocks noChangeAspect="1"/>
           </p:cNvPicPr>
@@ -6366,7 +6706,7 @@
                 <a:ea typeface="Malgun Gothic" pitchFamily="34" charset="-122"/>
                 <a:cs typeface="Malgun Gothic" pitchFamily="34" charset="-120"/>
               </a:rPr>
-              <a:t>무엇이 있는지
+              <a:t>전 결정 기록
 </a:t>
             </a:r>
             <a:pPr indent="0" marL="0">
@@ -6381,7 +6721,7 @@
                 <a:ea typeface="Malgun Gothic" pitchFamily="34" charset="-122"/>
                 <a:cs typeface="Malgun Gothic" pitchFamily="34" charset="-120"/>
               </a:rPr>
-              <a:t>원천·데이터셋·모델·규칙·보고서가 등록된 자산 대장 — 소유자·갱신 주기 포함</a:t>
+              <a:t>승인·반려·확정·설정 변경·계정 발급까지 전부 남습니다 — 지울 수 없는 원장</a:t>
             </a:r>
             <a:endParaRPr lang="en-US" sz="1200" dirty="0"/>
           </a:p>
@@ -6447,7 +6787,7 @@
                 <a:ea typeface="Malgun Gothic" pitchFamily="34" charset="-122"/>
                 <a:cs typeface="Malgun Gothic" pitchFamily="34" charset="-120"/>
               </a:rPr>
-              <a:t>감사 대비
+              <a:t>분쟁 대비
 </a:t>
             </a:r>
             <a:pPr indent="0" marL="0">
@@ -6462,7 +6802,7 @@
                 <a:ea typeface="Malgun Gothic" pitchFamily="34" charset="-122"/>
                 <a:cs typeface="Malgun Gothic" pitchFamily="34" charset="-120"/>
               </a:rPr>
-              <a:t>외부 실사·인증 때 '데이터 관리 체계' 증빙으로 그대로 제출 가능한 형식</a:t>
+              <a:t>'왜 이 발주가 나갔나'는 카드 번호로 검색 — 제안 근거와 승인자·시각이 한 줄로</a:t>
             </a:r>
             <a:endParaRPr lang="en-US" sz="1200" dirty="0"/>
           </a:p>
@@ -6572,7 +6912,7 @@
                 <a:ea typeface="Malgun Gothic" pitchFamily="34" charset="-122"/>
                 <a:cs typeface="Malgun Gothic" pitchFamily="34" charset="-120"/>
               </a:rPr>
-              <a:t>5. ADMIN · 스튜어드</a:t>
+              <a:t>4. MONITOR · 승인자</a:t>
             </a:r>
             <a:endParaRPr lang="en-US" sz="1200" dirty="0"/>
           </a:p>
@@ -6611,7 +6951,7 @@
                 <a:ea typeface="Malgun Gothic" pitchFamily="34" charset="-122"/>
                 <a:cs typeface="Malgun Gothic" pitchFamily="34" charset="-120"/>
               </a:rPr>
-              <a:t>온보딩 설정 — 우리 회사 말로</a:t>
+              <a:t>자동실행 — 상한과 회수</a:t>
             </a:r>
             <a:endParaRPr lang="en-US" sz="2700" dirty="0"/>
           </a:p>
@@ -6639,7 +6979,7 @@
       </p:sp>
       <p:pic>
         <p:nvPicPr>
-          <p:cNvPr id="6" name="Image 0" descr="/tmp/claude-0/-home-user-thirdbrain-web/bc639c69-a342-56eb-af6c-6a89fd170e25/scratchpad/shots_v2/setup.png">    </p:cNvPr>
+          <p:cNvPr id="6" name="Image 0" descr="/tmp/claude-0/-home-user-thirdbrain-web/bc639c69-a342-56eb-af6c-6a89fd170e25/scratchpad/shots_v2/promotions.png">    </p:cNvPr>
           <p:cNvPicPr>
             <a:picLocks noChangeAspect="1"/>
           </p:cNvPicPr>
@@ -6767,7 +7107,7 @@
                 <a:ea typeface="Malgun Gothic" pitchFamily="34" charset="-122"/>
                 <a:cs typeface="Malgun Gothic" pitchFamily="34" charset="-120"/>
               </a:rPr>
-              <a:t>최초 1회 + 수시
+              <a:t>신뢰 기반 자동화
 </a:t>
             </a:r>
             <a:pPr indent="0" marL="0">
@@ -6782,7 +7122,7 @@
                 <a:ea typeface="Malgun Gothic" pitchFamily="34" charset="-122"/>
                 <a:cs typeface="Malgun Gothic" pitchFamily="34" charset="-120"/>
               </a:rPr>
-              <a:t>회사명·매장·품목·코드 별칭을 화면에서 편집 — 저장 즉시 전 화면과 코드 사전에 반영</a:t>
+              <a:t>반복 승인된 유형은 금액 상한 내 자동실행으로 승급 가능 — 상한·승인율 기준은 화면에서 관리</a:t>
             </a:r>
             <a:endParaRPr lang="en-US" sz="1200" dirty="0"/>
           </a:p>
@@ -6848,7 +7188,7 @@
                 <a:ea typeface="Malgun Gothic" pitchFamily="34" charset="-122"/>
                 <a:cs typeface="Malgun Gothic" pitchFamily="34" charset="-120"/>
               </a:rPr>
-              <a:t>형식
+              <a:t>언제든 회수
 </a:t>
             </a:r>
             <a:pPr indent="0" marL="0">
@@ -6863,88 +7203,7 @@
                 <a:ea typeface="Malgun Gothic" pitchFamily="34" charset="-122"/>
                 <a:cs typeface="Malgun Gothic" pitchFamily="34" charset="-120"/>
               </a:rPr>
-              <a:t>매장: 코드=이름=채널 · 품목: 코드=이름 · 별칭: 영역,현장표기,표준코드 — 틀린 줄은 몇 행이 왜 틀렸는지 알려줍니다</a:t>
-            </a:r>
-            <a:endParaRPr lang="en-US" sz="1200" dirty="0"/>
-          </a:p>
-        </p:txBody>
-      </p:sp>
-      <p:sp>
-        <p:nvSpPr>
-          <p:cNvPr id="12" name="Shape 9"/>
-          <p:cNvSpPr/>
-          <p:nvPr/>
-        </p:nvSpPr>
-        <p:spPr>
-          <a:xfrm>
-            <a:off x="8723376" y="4462272"/>
-            <a:ext cx="3145536" cy="1207008"/>
-          </a:xfrm>
-          <a:prstGeom prst="roundRect">
-            <a:avLst>
-              <a:gd name="adj" fmla="val 4545"/>
-            </a:avLst>
-          </a:prstGeom>
-          <a:solidFill>
-            <a:srgbClr val="FFFFFF"/>
-          </a:solidFill>
-          <a:ln w="12700">
-            <a:solidFill>
-              <a:srgbClr val="DCCDBB"/>
-            </a:solidFill>
-            <a:prstDash val="solid"/>
-          </a:ln>
-        </p:spPr>
-      </p:sp>
-      <p:sp>
-        <p:nvSpPr>
-          <p:cNvPr id="13" name="Text 10"/>
-          <p:cNvSpPr/>
-          <p:nvPr/>
-        </p:nvSpPr>
-        <p:spPr>
-          <a:xfrm>
-            <a:off x="8814816" y="4507992"/>
-            <a:ext cx="2962656" cy="1115568"/>
-          </a:xfrm>
-          <a:prstGeom prst="rect">
-            <a:avLst/>
-          </a:prstGeom>
-          <a:noFill/>
-          <a:ln/>
-        </p:spPr>
-        <p:txBody>
-          <a:bodyPr wrap="square" rtlCol="0" anchor="t"/>
-          <a:lstStyle/>
-          <a:p>
-            <a:pPr indent="0" marL="0">
-              <a:buNone/>
-            </a:pPr>
-            <a:r>
-              <a:rPr lang="en-US" sz="1200" b="1" dirty="0">
-                <a:solidFill>
-                  <a:srgbClr val="6E3A1C"/>
-                </a:solidFill>
-                <a:latin typeface="Malgun Gothic" pitchFamily="34" charset="0"/>
-                <a:ea typeface="Malgun Gothic" pitchFamily="34" charset="-122"/>
-                <a:cs typeface="Malgun Gothic" pitchFamily="34" charset="-120"/>
-              </a:rPr>
-              <a:t>격리 큐와 연동
-</a:t>
-            </a:r>
-            <a:pPr indent="0" marL="0">
-              <a:buNone/>
-            </a:pPr>
-            <a:r>
-              <a:rPr lang="en-US" sz="1050" dirty="0">
-                <a:solidFill>
-                  <a:srgbClr val="2E241C"/>
-                </a:solidFill>
-                <a:latin typeface="Malgun Gothic" pitchFamily="34" charset="0"/>
-                <a:ea typeface="Malgun Gothic" pitchFamily="34" charset="-122"/>
-                <a:cs typeface="Malgun Gothic" pitchFamily="34" charset="-120"/>
-              </a:rPr>
-              <a:t>현장 표기를 별칭으로 미리 넣으면 격리 큐에 걸리지 않고 자동 매핑됩니다</a:t>
+              <a:t>성과가 흔들리면 즉시 수동 승인으로 강등 — 자동화는 특권이지 기본값이 아닙니다</a:t>
             </a:r>
             <a:endParaRPr lang="en-US" sz="1200" dirty="0"/>
           </a:p>
@@ -7054,7 +7313,7 @@
                 <a:ea typeface="Malgun Gothic" pitchFamily="34" charset="-122"/>
                 <a:cs typeface="Malgun Gothic" pitchFamily="34" charset="-120"/>
               </a:rPr>
-              <a:t>5. ADMIN · 관리자</a:t>
+              <a:t>4. MONITOR · 스튜어드</a:t>
             </a:r>
             <a:endParaRPr lang="en-US" sz="1200" dirty="0"/>
           </a:p>
@@ -7093,7 +7352,7 @@
                 <a:ea typeface="Malgun Gothic" pitchFamily="34" charset="-122"/>
                 <a:cs typeface="Malgun Gothic" pitchFamily="34" charset="-120"/>
               </a:rPr>
-              <a:t>계정 관리 — 발급은 봉투처럼</a:t>
+              <a:t>자산 대장 — 데이터 자산 관리</a:t>
             </a:r>
             <a:endParaRPr lang="en-US" sz="2700" dirty="0"/>
           </a:p>
@@ -7121,7 +7380,7 @@
       </p:sp>
       <p:pic>
         <p:nvPicPr>
-          <p:cNvPr id="6" name="Image 0" descr="/tmp/claude-0/-home-user-thirdbrain-web/bc639c69-a342-56eb-af6c-6a89fd170e25/scratchpad/shots_v2/users.png">    </p:cNvPr>
+          <p:cNvPr id="6" name="Image 0" descr="/tmp/claude-0/-home-user-thirdbrain-web/bc639c69-a342-56eb-af6c-6a89fd170e25/scratchpad/shots_v2/assets.png">    </p:cNvPr>
           <p:cNvPicPr>
             <a:picLocks noChangeAspect="1"/>
           </p:cNvPicPr>
@@ -7249,7 +7508,7 @@
                 <a:ea typeface="Malgun Gothic" pitchFamily="34" charset="-122"/>
                 <a:cs typeface="Malgun Gothic" pitchFamily="34" charset="-120"/>
               </a:rPr>
-              <a:t>계정 추가
+              <a:t>무엇이 있는지
 </a:t>
             </a:r>
             <a:pPr indent="0" marL="0">
@@ -7264,7 +7523,7 @@
                 <a:ea typeface="Malgun Gothic" pitchFamily="34" charset="-122"/>
                 <a:cs typeface="Malgun Gothic" pitchFamily="34" charset="-120"/>
               </a:rPr>
-              <a:t>아이디·역할·표시 이름 입력 → 임시 비밀번호가 화면에 딱 한 번 표시 — 안전하게 전달하고 화면을 닫으세요</a:t>
+              <a:t>원천·데이터셋·모델·규칙·보고서가 등록된 자산 대장 — 소유자·갱신 주기 포함</a:t>
             </a:r>
             <a:endParaRPr lang="en-US" sz="1200" dirty="0"/>
           </a:p>
@@ -7330,7 +7589,7 @@
                 <a:ea typeface="Malgun Gothic" pitchFamily="34" charset="-122"/>
                 <a:cs typeface="Malgun Gothic" pitchFamily="34" charset="-120"/>
               </a:rPr>
-              <a:t>재발급·잠금 해제
+              <a:t>감사 대비
 </a:t>
             </a:r>
             <a:pPr indent="0" marL="0">
@@ -7345,88 +7604,7 @@
                 <a:ea typeface="Malgun Gothic" pitchFamily="34" charset="-122"/>
                 <a:cs typeface="Malgun Gothic" pitchFamily="34" charset="-120"/>
               </a:rPr>
-              <a:t>분실 시 재발급(기존 비밀번호 즉시 무효, 첫 로그인 변경 강제) · 5회 오류 잠금은 여기서 즉시 해제</a:t>
-            </a:r>
-            <a:endParaRPr lang="en-US" sz="1200" dirty="0"/>
-          </a:p>
-        </p:txBody>
-      </p:sp>
-      <p:sp>
-        <p:nvSpPr>
-          <p:cNvPr id="12" name="Shape 9"/>
-          <p:cNvSpPr/>
-          <p:nvPr/>
-        </p:nvSpPr>
-        <p:spPr>
-          <a:xfrm>
-            <a:off x="8723376" y="4462272"/>
-            <a:ext cx="3145536" cy="1207008"/>
-          </a:xfrm>
-          <a:prstGeom prst="roundRect">
-            <a:avLst>
-              <a:gd name="adj" fmla="val 4545"/>
-            </a:avLst>
-          </a:prstGeom>
-          <a:solidFill>
-            <a:srgbClr val="FFFFFF"/>
-          </a:solidFill>
-          <a:ln w="12700">
-            <a:solidFill>
-              <a:srgbClr val="DCCDBB"/>
-            </a:solidFill>
-            <a:prstDash val="solid"/>
-          </a:ln>
-        </p:spPr>
-      </p:sp>
-      <p:sp>
-        <p:nvSpPr>
-          <p:cNvPr id="13" name="Text 10"/>
-          <p:cNvSpPr/>
-          <p:nvPr/>
-        </p:nvSpPr>
-        <p:spPr>
-          <a:xfrm>
-            <a:off x="8814816" y="4507992"/>
-            <a:ext cx="2962656" cy="1115568"/>
-          </a:xfrm>
-          <a:prstGeom prst="rect">
-            <a:avLst/>
-          </a:prstGeom>
-          <a:noFill/>
-          <a:ln/>
-        </p:spPr>
-        <p:txBody>
-          <a:bodyPr wrap="square" rtlCol="0" anchor="t"/>
-          <a:lstStyle/>
-          <a:p>
-            <a:pPr indent="0" marL="0">
-              <a:buNone/>
-            </a:pPr>
-            <a:r>
-              <a:rPr lang="en-US" sz="1200" b="1" dirty="0">
-                <a:solidFill>
-                  <a:srgbClr val="6E3A1C"/>
-                </a:solidFill>
-                <a:latin typeface="Malgun Gothic" pitchFamily="34" charset="0"/>
-                <a:ea typeface="Malgun Gothic" pitchFamily="34" charset="-122"/>
-                <a:cs typeface="Malgun Gothic" pitchFamily="34" charset="-120"/>
-              </a:rPr>
-              <a:t>체험 신청 처리
-</a:t>
-            </a:r>
-            <a:pPr indent="0" marL="0">
-              <a:buNone/>
-            </a:pPr>
-            <a:r>
-              <a:rPr lang="en-US" sz="1050" dirty="0">
-                <a:solidFill>
-                  <a:srgbClr val="2E241C"/>
-                </a:solidFill>
-                <a:latin typeface="Malgun Gothic" pitchFamily="34" charset="0"/>
-                <a:ea typeface="Malgun Gothic" pitchFamily="34" charset="-122"/>
-                <a:cs typeface="Malgun Gothic" pitchFamily="34" charset="-120"/>
-              </a:rPr>
-              <a:t>웹 신청은 '체험 신청 관리' 화면에서 발급 — 메일 신청은 여기서 계정 생성 후 회신 (둘 다 승인제)</a:t>
+              <a:t>외부 실사·인증 때 '데이터 관리 체계' 증빙으로 그대로 제출 가능한 형식</a:t>
             </a:r>
             <a:endParaRPr lang="en-US" sz="1200" dirty="0"/>
           </a:p>
@@ -7536,7 +7714,7 @@
                 <a:ea typeface="Malgun Gothic" pitchFamily="34" charset="-122"/>
                 <a:cs typeface="Malgun Gothic" pitchFamily="34" charset="-120"/>
               </a:rPr>
-              <a:t>5. ADMIN · 관리자</a:t>
+              <a:t>5. ADMIN · 스튜어드</a:t>
             </a:r>
             <a:endParaRPr lang="en-US" sz="1200" dirty="0"/>
           </a:p>
@@ -7575,7 +7753,7 @@
                 <a:ea typeface="Malgun Gothic" pitchFamily="34" charset="-122"/>
                 <a:cs typeface="Malgun Gothic" pitchFamily="34" charset="-120"/>
               </a:rPr>
-              <a:t>배치 실행 — 기다리지 않는 반영</a:t>
+              <a:t>온보딩 설정 — 우리 회사 말로</a:t>
             </a:r>
             <a:endParaRPr lang="en-US" sz="2700" dirty="0"/>
           </a:p>
@@ -7603,7 +7781,7 @@
       </p:sp>
       <p:pic>
         <p:nvPicPr>
-          <p:cNvPr id="6" name="Image 0" descr="/tmp/claude-0/-home-user-thirdbrain-web/bc639c69-a342-56eb-af6c-6a89fd170e25/scratchpad/shots_v2/runs.png">    </p:cNvPr>
+          <p:cNvPr id="6" name="Image 0" descr="/tmp/claude-0/-home-user-thirdbrain-web/bc639c69-a342-56eb-af6c-6a89fd170e25/scratchpad/shots_v2/setup.png">    </p:cNvPr>
           <p:cNvPicPr>
             <a:picLocks noChangeAspect="1"/>
           </p:cNvPicPr>
@@ -7680,11 +7858,11 @@
         <p:spPr>
           <a:xfrm>
             <a:off x="8723376" y="1810512"/>
-            <a:ext cx="3145536" cy="1033272"/>
+            <a:ext cx="3145536" cy="1207008"/>
           </a:xfrm>
           <a:prstGeom prst="roundRect">
             <a:avLst>
-              <a:gd name="adj" fmla="val 5310"/>
+              <a:gd name="adj" fmla="val 4545"/>
             </a:avLst>
           </a:prstGeom>
           <a:solidFill>
@@ -7707,7 +7885,7 @@
         <p:spPr>
           <a:xfrm>
             <a:off x="8814816" y="1856232"/>
-            <a:ext cx="2962656" cy="941832"/>
+            <a:ext cx="2962656" cy="1115568"/>
           </a:xfrm>
           <a:prstGeom prst="rect">
             <a:avLst/>
@@ -7731,7 +7909,7 @@
                 <a:ea typeface="Malgun Gothic" pitchFamily="34" charset="-122"/>
                 <a:cs typeface="Malgun Gothic" pitchFamily="34" charset="-120"/>
               </a:rPr>
-              <a:t>언제 쓰나
+              <a:t>최초 1회 + 수시
 </a:t>
             </a:r>
             <a:pPr indent="0" marL="0">
@@ -7746,7 +7924,7 @@
                 <a:ea typeface="Malgun Gothic" pitchFamily="34" charset="-122"/>
                 <a:cs typeface="Malgun Gothic" pitchFamily="34" charset="-120"/>
               </a:rPr>
-              <a:t>자료를 올리고 바로 브리핑에 반영하고 싶을 때 — 야간 배치를 기다리지 않고 버튼 한 번</a:t>
+              <a:t>회사명·매장·품목·코드 별칭을 화면에서 편집 — 저장 즉시 전 화면과 코드 사전에 반영</a:t>
             </a:r>
             <a:endParaRPr lang="en-US" sz="1200" dirty="0"/>
           </a:p>
@@ -7760,12 +7938,12 @@
         </p:nvSpPr>
         <p:spPr>
           <a:xfrm>
-            <a:off x="8723376" y="2962656"/>
-            <a:ext cx="3145536" cy="1033272"/>
+            <a:off x="8723376" y="3136392"/>
+            <a:ext cx="3145536" cy="1207008"/>
           </a:xfrm>
           <a:prstGeom prst="roundRect">
             <a:avLst>
-              <a:gd name="adj" fmla="val 5310"/>
+              <a:gd name="adj" fmla="val 4545"/>
             </a:avLst>
           </a:prstGeom>
           <a:solidFill>
@@ -7787,8 +7965,8 @@
         </p:nvSpPr>
         <p:spPr>
           <a:xfrm>
-            <a:off x="8814816" y="3008376"/>
-            <a:ext cx="2962656" cy="941832"/>
+            <a:off x="8814816" y="3182112"/>
+            <a:ext cx="2962656" cy="1115568"/>
           </a:xfrm>
           <a:prstGeom prst="rect">
             <a:avLst/>
@@ -7812,7 +7990,7 @@
                 <a:ea typeface="Malgun Gothic" pitchFamily="34" charset="-122"/>
                 <a:cs typeface="Malgun Gothic" pitchFamily="34" charset="-120"/>
               </a:rPr>
-              <a:t>안전 장치
+              <a:t>형식
 </a:t>
             </a:r>
             <a:pPr indent="0" marL="0">
@@ -7827,7 +8005,7 @@
                 <a:ea typeface="Malgun Gothic" pitchFamily="34" charset="-122"/>
                 <a:cs typeface="Malgun Gothic" pitchFamily="34" charset="-120"/>
               </a:rPr>
-              <a:t>동시 실행은 자동 차단되고, 실행 이력에 상태(실행 중/완료/실패)와 실패 단계가 남습니다</a:t>
+              <a:t>매장: 코드=이름=채널 · 품목: 코드=이름 · 별칭: 영역,현장표기,표준코드 — 틀린 줄은 몇 행이 왜 틀렸는지 알려줍니다</a:t>
             </a:r>
             <a:endParaRPr lang="en-US" sz="1200" dirty="0"/>
           </a:p>
@@ -7841,12 +8019,12 @@
         </p:nvSpPr>
         <p:spPr>
           <a:xfrm>
-            <a:off x="8723376" y="4114800"/>
-            <a:ext cx="3145536" cy="1033272"/>
+            <a:off x="8723376" y="4462272"/>
+            <a:ext cx="3145536" cy="1207008"/>
           </a:xfrm>
           <a:prstGeom prst="roundRect">
             <a:avLst>
-              <a:gd name="adj" fmla="val 5310"/>
+              <a:gd name="adj" fmla="val 4545"/>
             </a:avLst>
           </a:prstGeom>
           <a:solidFill>
@@ -7868,8 +8046,8 @@
         </p:nvSpPr>
         <p:spPr>
           <a:xfrm>
-            <a:off x="8814816" y="4160520"/>
-            <a:ext cx="2962656" cy="941832"/>
+            <a:off x="8814816" y="4507992"/>
+            <a:ext cx="2962656" cy="1115568"/>
           </a:xfrm>
           <a:prstGeom prst="rect">
             <a:avLst/>
@@ -7893,7 +8071,7 @@
                 <a:ea typeface="Malgun Gothic" pitchFamily="34" charset="-122"/>
                 <a:cs typeface="Malgun Gothic" pitchFamily="34" charset="-120"/>
               </a:rPr>
-              <a:t>소요
+              <a:t>격리 큐와 연동
 </a:t>
             </a:r>
             <a:pPr indent="0" marL="0">
@@ -7908,88 +8086,7 @@
                 <a:ea typeface="Malgun Gothic" pitchFamily="34" charset="-122"/>
                 <a:cs typeface="Malgun Gothic" pitchFamily="34" charset="-120"/>
               </a:rPr>
-              <a:t>수 분(데이터량에 따라) — 완료는 이력 새로고침으로 확인</a:t>
-            </a:r>
-            <a:endParaRPr lang="en-US" sz="1200" dirty="0"/>
-          </a:p>
-        </p:txBody>
-      </p:sp>
-      <p:sp>
-        <p:nvSpPr>
-          <p:cNvPr id="14" name="Shape 11"/>
-          <p:cNvSpPr/>
-          <p:nvPr/>
-        </p:nvSpPr>
-        <p:spPr>
-          <a:xfrm>
-            <a:off x="8723376" y="5266944"/>
-            <a:ext cx="3145536" cy="1033272"/>
-          </a:xfrm>
-          <a:prstGeom prst="roundRect">
-            <a:avLst>
-              <a:gd name="adj" fmla="val 5310"/>
-            </a:avLst>
-          </a:prstGeom>
-          <a:solidFill>
-            <a:srgbClr val="FFFFFF"/>
-          </a:solidFill>
-          <a:ln w="12700">
-            <a:solidFill>
-              <a:srgbClr val="DCCDBB"/>
-            </a:solidFill>
-            <a:prstDash val="solid"/>
-          </a:ln>
-        </p:spPr>
-      </p:sp>
-      <p:sp>
-        <p:nvSpPr>
-          <p:cNvPr id="15" name="Text 12"/>
-          <p:cNvSpPr/>
-          <p:nvPr/>
-        </p:nvSpPr>
-        <p:spPr>
-          <a:xfrm>
-            <a:off x="8814816" y="5312664"/>
-            <a:ext cx="2962656" cy="941832"/>
-          </a:xfrm>
-          <a:prstGeom prst="rect">
-            <a:avLst/>
-          </a:prstGeom>
-          <a:noFill/>
-          <a:ln/>
-        </p:spPr>
-        <p:txBody>
-          <a:bodyPr wrap="square" rtlCol="0" anchor="t"/>
-          <a:lstStyle/>
-          <a:p>
-            <a:pPr indent="0" marL="0">
-              <a:buNone/>
-            </a:pPr>
-            <a:r>
-              <a:rPr lang="en-US" sz="1200" b="1" dirty="0">
-                <a:solidFill>
-                  <a:srgbClr val="6E3A1C"/>
-                </a:solidFill>
-                <a:latin typeface="Malgun Gothic" pitchFamily="34" charset="0"/>
-                <a:ea typeface="Malgun Gothic" pitchFamily="34" charset="-122"/>
-                <a:cs typeface="Malgun Gothic" pitchFamily="34" charset="-120"/>
-              </a:rPr>
-              <a:t>상태 카드
-</a:t>
-            </a:r>
-            <a:pPr indent="0" marL="0">
-              <a:buNone/>
-            </a:pPr>
-            <a:r>
-              <a:rPr lang="en-US" sz="1050" dirty="0">
-                <a:solidFill>
-                  <a:srgbClr val="2E241C"/>
-                </a:solidFill>
-                <a:latin typeface="Malgun Gothic" pitchFamily="34" charset="0"/>
-                <a:ea typeface="Malgun Gothic" pitchFamily="34" charset="-122"/>
-                <a:cs typeface="Malgun Gothic" pitchFamily="34" charset="-120"/>
-              </a:rPr>
-              <a:t>아래 '에이전트 최근 상태'와 '재학습 이력'을 함께 봅니다 — '대기(학습 전)'는 정상(데이터 축적 후 시작), '실패'만 조치 대상</a:t>
+              <a:t>현장 표기를 별칭으로 미리 넣으면 격리 큐에 걸리지 않고 자동 매핑됩니다</a:t>
             </a:r>
             <a:endParaRPr lang="en-US" sz="1200" dirty="0"/>
           </a:p>
@@ -8552,7 +8649,7 @@
                           <a:ea typeface="Malgun Gothic" pitchFamily="34" charset="-122"/>
                           <a:cs typeface="Malgun Gothic" pitchFamily="34" charset="-120"/>
                         </a:rPr>
-                        <a:t>통합 웹앱 19화면 · Odoo 승인함 애드온 · 배치/백업/장애 대응 — 체험판·정식 운영 공통</a:t>
+                        <a:t>통합 웹앱 21화면 · Odoo 승인함 애드온 · 배치/백업/장애 대응 — 체험판·정식 운영 공통</a:t>
                       </a:r>
                       <a:endParaRPr lang="en-US" sz="1250" dirty="0">
                         <a:latin typeface="Malgun Gothic" charset="0"/>
@@ -8690,7 +8787,7 @@
                           <a:ea typeface="Malgun Gothic" pitchFamily="34" charset="-122"/>
                           <a:cs typeface="Malgun Gothic" pitchFamily="34" charset="-120"/>
                         </a:rPr>
-                        <a:t>v1.0 최초(11화면) → v2.0 2026-09-11 4단계 반영(16화면·구성도·일과·장애 등급) → v2.1 2026-09-12 6단계 반영(과금·체험 신청 3화면 추가)</a:t>
+                        <a:t>v1.0 최초(11화면) → v2.0 2026-09-11 4단계 반영(16화면·구성도·일과·장애 등급) → v2.1 6단계 반영(과금·신청 3화면) → v2.2 2026-09-12 7단계 반영(프로젝트·KPI 2화면)</a:t>
                       </a:r>
                       <a:endParaRPr lang="en-US" sz="1250" dirty="0">
                         <a:latin typeface="Malgun Gothic" charset="0"/>
@@ -10088,7 +10185,7 @@
                 <a:ea typeface="Malgun Gothic" pitchFamily="34" charset="-122"/>
                 <a:cs typeface="Malgun Gothic" pitchFamily="34" charset="-120"/>
               </a:rPr>
-              <a:t>과금 — 구독과 청구</a:t>
+              <a:t>계정 관리 — 발급은 봉투처럼</a:t>
             </a:r>
             <a:endParaRPr lang="en-US" sz="2700" dirty="0"/>
           </a:p>
@@ -10116,7 +10213,7 @@
       </p:sp>
       <p:pic>
         <p:nvPicPr>
-          <p:cNvPr id="6" name="Image 0" descr="/tmp/claude-0/-home-user-thirdbrain-web/bc639c69-a342-56eb-af6c-6a89fd170e25/scratchpad/shots_v2/billing.png">    </p:cNvPr>
+          <p:cNvPr id="6" name="Image 0" descr="/tmp/claude-0/-home-user-thirdbrain-web/bc639c69-a342-56eb-af6c-6a89fd170e25/scratchpad/shots_v2/users.png">    </p:cNvPr>
           <p:cNvPicPr>
             <a:picLocks noChangeAspect="1"/>
           </p:cNvPicPr>
@@ -10244,7 +10341,7 @@
                 <a:ea typeface="Malgun Gothic" pitchFamily="34" charset="-122"/>
                 <a:cs typeface="Malgun Gothic" pitchFamily="34" charset="-120"/>
               </a:rPr>
-              <a:t>플랜·상태
+              <a:t>계정 추가
 </a:t>
             </a:r>
             <a:pPr indent="0" marL="0">
@@ -10259,7 +10356,7 @@
                 <a:ea typeface="Malgun Gothic" pitchFamily="34" charset="-122"/>
                 <a:cs typeface="Malgun Gothic" pitchFamily="34" charset="-120"/>
               </a:rPr>
-              <a:t>trial(무료)/standard/pilot 3플랜 — 상태는 정상→납기 경과→미납 잠금 순으로만 움직입니다(총 4주 유예)</a:t>
+              <a:t>아이디·역할·표시 이름 입력 → 임시 비밀번호가 화면에 딱 한 번 표시 — 안전하게 전달하고 화면을 닫으세요</a:t>
             </a:r>
             <a:endParaRPr lang="en-US" sz="1200" dirty="0"/>
           </a:p>
@@ -10325,7 +10422,7 @@
                 <a:ea typeface="Malgun Gothic" pitchFamily="34" charset="-122"/>
                 <a:cs typeface="Malgun Gothic" pitchFamily="34" charset="-120"/>
               </a:rPr>
-              <a:t>월 청구
+              <a:t>재발급·잠금 해제
 </a:t>
             </a:r>
             <a:pPr indent="0" marL="0">
@@ -10340,7 +10437,7 @@
                 <a:ea typeface="Malgun Gothic" pitchFamily="34" charset="-122"/>
                 <a:cs typeface="Malgun Gothic" pitchFamily="34" charset="-120"/>
               </a:rPr>
-              <a:t>매월 초 '발행' 한 번 — 이미 발행된 달은 그대로(멱등). 수납 확인 후 '수납 처리'로 기록</a:t>
+              <a:t>분실 시 재발급(기존 비밀번호 즉시 무효, 첫 로그인 변경 강제) · 5회 오류 잠금은 여기서 즉시 해제</a:t>
             </a:r>
             <a:endParaRPr lang="en-US" sz="1200" dirty="0"/>
           </a:p>
@@ -10406,7 +10503,7 @@
                 <a:ea typeface="Malgun Gothic" pitchFamily="34" charset="-122"/>
                 <a:cs typeface="Malgun Gothic" pitchFamily="34" charset="-120"/>
               </a:rPr>
-              <a:t>미납 잠금
+              <a:t>체험 신청 처리
 </a:t>
             </a:r>
             <a:pPr indent="0" marL="0">
@@ -10421,7 +10518,7 @@
                 <a:ea typeface="Malgun Gothic" pitchFamily="34" charset="-122"/>
                 <a:cs typeface="Malgun Gothic" pitchFamily="34" charset="-120"/>
               </a:rPr>
-              <a:t>데이터를 지우지 않습니다 — 일반 사용자 로그인만 막고, 관리자는 들어와 수납·해제. 수납 즉시 원상복구</a:t>
+              <a:t>웹 신청은 '체험 신청 관리' 화면에서 발급 — 메일 신청은 여기서 계정 생성 후 회신 (둘 다 승인제)</a:t>
             </a:r>
             <a:endParaRPr lang="en-US" sz="1200" dirty="0"/>
           </a:p>
@@ -10570,7 +10667,7 @@
                 <a:ea typeface="Malgun Gothic" pitchFamily="34" charset="-122"/>
                 <a:cs typeface="Malgun Gothic" pitchFamily="34" charset="-120"/>
               </a:rPr>
-              <a:t>체험 신청 관리 — 승인제 발급</a:t>
+              <a:t>배치 실행 — 기다리지 않는 반영</a:t>
             </a:r>
             <a:endParaRPr lang="en-US" sz="2700" dirty="0"/>
           </a:p>
@@ -10598,7 +10695,7 @@
       </p:sp>
       <p:pic>
         <p:nvPicPr>
-          <p:cNvPr id="6" name="Image 0" descr="/tmp/claude-0/-home-user-thirdbrain-web/bc639c69-a342-56eb-af6c-6a89fd170e25/scratchpad/shots_v2/signups.png">    </p:cNvPr>
+          <p:cNvPr id="6" name="Image 0" descr="/tmp/claude-0/-home-user-thirdbrain-web/bc639c69-a342-56eb-af6c-6a89fd170e25/scratchpad/shots_v2/runs.png">    </p:cNvPr>
           <p:cNvPicPr>
             <a:picLocks noChangeAspect="1"/>
           </p:cNvPicPr>
@@ -10675,11 +10772,11 @@
         <p:spPr>
           <a:xfrm>
             <a:off x="8723376" y="1810512"/>
-            <a:ext cx="3145536" cy="1207008"/>
+            <a:ext cx="3145536" cy="1033272"/>
           </a:xfrm>
           <a:prstGeom prst="roundRect">
             <a:avLst>
-              <a:gd name="adj" fmla="val 4545"/>
+              <a:gd name="adj" fmla="val 5310"/>
             </a:avLst>
           </a:prstGeom>
           <a:solidFill>
@@ -10702,7 +10799,7 @@
         <p:spPr>
           <a:xfrm>
             <a:off x="8814816" y="1856232"/>
-            <a:ext cx="2962656" cy="1115568"/>
+            <a:ext cx="2962656" cy="941832"/>
           </a:xfrm>
           <a:prstGeom prst="rect">
             <a:avLst/>
@@ -10726,7 +10823,7 @@
                 <a:ea typeface="Malgun Gothic" pitchFamily="34" charset="-122"/>
                 <a:cs typeface="Malgun Gothic" pitchFamily="34" charset="-120"/>
               </a:rPr>
-              <a:t>대기 목록
+              <a:t>언제 쓰나
 </a:t>
             </a:r>
             <a:pPr indent="0" marL="0">
@@ -10741,7 +10838,7 @@
                 <a:ea typeface="Malgun Gothic" pitchFamily="34" charset="-122"/>
                 <a:cs typeface="Malgun Gothic" pitchFamily="34" charset="-120"/>
               </a:rPr>
-              <a:t>웹 신청 폼으로 들어온 신청이 대기로 쌓입니다 — 발급 버튼 한 번에 체험 테넌트 생성 + 초기 계정 파일 경로 표시</a:t>
+              <a:t>자료를 올리고 바로 브리핑에 반영하고 싶을 때 — 야간 배치를 기다리지 않고 버튼 한 번</a:t>
             </a:r>
             <a:endParaRPr lang="en-US" sz="1200" dirty="0"/>
           </a:p>
@@ -10755,12 +10852,12 @@
         </p:nvSpPr>
         <p:spPr>
           <a:xfrm>
-            <a:off x="8723376" y="3136392"/>
-            <a:ext cx="3145536" cy="1207008"/>
+            <a:off x="8723376" y="2962656"/>
+            <a:ext cx="3145536" cy="1033272"/>
           </a:xfrm>
           <a:prstGeom prst="roundRect">
             <a:avLst>
-              <a:gd name="adj" fmla="val 4545"/>
+              <a:gd name="adj" fmla="val 5310"/>
             </a:avLst>
           </a:prstGeom>
           <a:solidFill>
@@ -10782,8 +10879,8 @@
         </p:nvSpPr>
         <p:spPr>
           <a:xfrm>
-            <a:off x="8814816" y="3182112"/>
-            <a:ext cx="2962656" cy="1115568"/>
+            <a:off x="8814816" y="3008376"/>
+            <a:ext cx="2962656" cy="941832"/>
           </a:xfrm>
           <a:prstGeom prst="rect">
             <a:avLst/>
@@ -10807,7 +10904,7 @@
                 <a:ea typeface="Malgun Gothic" pitchFamily="34" charset="-122"/>
                 <a:cs typeface="Malgun Gothic" pitchFamily="34" charset="-120"/>
               </a:rPr>
-              <a:t>승인제 기본
+              <a:t>안전 장치
 </a:t>
             </a:r>
             <a:pPr indent="0" marL="0">
@@ -10822,7 +10919,7 @@
                 <a:ea typeface="Malgun Gothic" pitchFamily="34" charset="-122"/>
                 <a:cs typeface="Malgun Gothic" pitchFamily="34" charset="-120"/>
               </a:rPr>
-              <a:t>자동 발급은 AXP_AUTO_ISSUE=1을 명시로 켠 경우에만 — 접수된 결정(초기 승인제)이 기본값입니다</a:t>
+              <a:t>동시 실행은 자동 차단되고, 실행 이력에 상태(실행 중/완료/실패)와 실패 단계가 남습니다</a:t>
             </a:r>
             <a:endParaRPr lang="en-US" sz="1200" dirty="0"/>
           </a:p>
@@ -10836,12 +10933,12 @@
         </p:nvSpPr>
         <p:spPr>
           <a:xfrm>
-            <a:off x="8723376" y="4462272"/>
-            <a:ext cx="3145536" cy="1207008"/>
+            <a:off x="8723376" y="4114800"/>
+            <a:ext cx="3145536" cy="1033272"/>
           </a:xfrm>
           <a:prstGeom prst="roundRect">
             <a:avLst>
-              <a:gd name="adj" fmla="val 4545"/>
+              <a:gd name="adj" fmla="val 5310"/>
             </a:avLst>
           </a:prstGeom>
           <a:solidFill>
@@ -10863,8 +10960,8 @@
         </p:nvSpPr>
         <p:spPr>
           <a:xfrm>
-            <a:off x="8814816" y="4507992"/>
-            <a:ext cx="2962656" cy="1115568"/>
+            <a:off x="8814816" y="4160520"/>
+            <a:ext cx="2962656" cy="941832"/>
           </a:xfrm>
           <a:prstGeom prst="rect">
             <a:avLst/>
@@ -10888,7 +10985,7 @@
                 <a:ea typeface="Malgun Gothic" pitchFamily="34" charset="-122"/>
                 <a:cs typeface="Malgun Gothic" pitchFamily="34" charset="-120"/>
               </a:rPr>
-              <a:t>이메일은 수동
+              <a:t>소요
 </a:t>
             </a:r>
             <a:pPr indent="0" marL="0">
@@ -10903,7 +11000,88 @@
                 <a:ea typeface="Malgun Gothic" pitchFamily="34" charset="-122"/>
                 <a:cs typeface="Malgun Gothic" pitchFamily="34" charset="-120"/>
               </a:rPr>
-              <a:t>초기 계정 안내 메일은 아직 사람이 보냅니다(SMTP 결선 전) — 화면에 명시</a:t>
+              <a:t>수 분(데이터량에 따라) — 완료는 이력 새로고침으로 확인</a:t>
+            </a:r>
+            <a:endParaRPr lang="en-US" sz="1200" dirty="0"/>
+          </a:p>
+        </p:txBody>
+      </p:sp>
+      <p:sp>
+        <p:nvSpPr>
+          <p:cNvPr id="14" name="Shape 11"/>
+          <p:cNvSpPr/>
+          <p:nvPr/>
+        </p:nvSpPr>
+        <p:spPr>
+          <a:xfrm>
+            <a:off x="8723376" y="5266944"/>
+            <a:ext cx="3145536" cy="1033272"/>
+          </a:xfrm>
+          <a:prstGeom prst="roundRect">
+            <a:avLst>
+              <a:gd name="adj" fmla="val 5310"/>
+            </a:avLst>
+          </a:prstGeom>
+          <a:solidFill>
+            <a:srgbClr val="FFFFFF"/>
+          </a:solidFill>
+          <a:ln w="12700">
+            <a:solidFill>
+              <a:srgbClr val="DCCDBB"/>
+            </a:solidFill>
+            <a:prstDash val="solid"/>
+          </a:ln>
+        </p:spPr>
+      </p:sp>
+      <p:sp>
+        <p:nvSpPr>
+          <p:cNvPr id="15" name="Text 12"/>
+          <p:cNvSpPr/>
+          <p:nvPr/>
+        </p:nvSpPr>
+        <p:spPr>
+          <a:xfrm>
+            <a:off x="8814816" y="5312664"/>
+            <a:ext cx="2962656" cy="941832"/>
+          </a:xfrm>
+          <a:prstGeom prst="rect">
+            <a:avLst/>
+          </a:prstGeom>
+          <a:noFill/>
+          <a:ln/>
+        </p:spPr>
+        <p:txBody>
+          <a:bodyPr wrap="square" rtlCol="0" anchor="t"/>
+          <a:lstStyle/>
+          <a:p>
+            <a:pPr indent="0" marL="0">
+              <a:buNone/>
+            </a:pPr>
+            <a:r>
+              <a:rPr lang="en-US" sz="1200" b="1" dirty="0">
+                <a:solidFill>
+                  <a:srgbClr val="6E3A1C"/>
+                </a:solidFill>
+                <a:latin typeface="Malgun Gothic" pitchFamily="34" charset="0"/>
+                <a:ea typeface="Malgun Gothic" pitchFamily="34" charset="-122"/>
+                <a:cs typeface="Malgun Gothic" pitchFamily="34" charset="-120"/>
+              </a:rPr>
+              <a:t>상태 카드
+</a:t>
+            </a:r>
+            <a:pPr indent="0" marL="0">
+              <a:buNone/>
+            </a:pPr>
+            <a:r>
+              <a:rPr lang="en-US" sz="1050" dirty="0">
+                <a:solidFill>
+                  <a:srgbClr val="2E241C"/>
+                </a:solidFill>
+                <a:latin typeface="Malgun Gothic" pitchFamily="34" charset="0"/>
+                <a:ea typeface="Malgun Gothic" pitchFamily="34" charset="-122"/>
+                <a:cs typeface="Malgun Gothic" pitchFamily="34" charset="-120"/>
+              </a:rPr>
+              <a:t>아래 '에이전트 최근 상태'와 '재학습 이력'을 함께 봅니다 — '대기(학습 전)'는 정상(데이터 축적 후 시작), '실패'만 조치 대상</a:t>
             </a:r>
             <a:endParaRPr lang="en-US" sz="1200" dirty="0"/>
           </a:p>
@@ -11052,7 +11230,7 @@
                 <a:ea typeface="Malgun Gothic" pitchFamily="34" charset="-122"/>
                 <a:cs typeface="Malgun Gothic" pitchFamily="34" charset="-120"/>
               </a:rPr>
-              <a:t>Odoo 연결 마법사 — 붙기 전 검사</a:t>
+              <a:t>과금 — 구독과 청구</a:t>
             </a:r>
             <a:endParaRPr lang="en-US" sz="2700" dirty="0"/>
           </a:p>
@@ -11080,7 +11258,7 @@
       </p:sp>
       <p:pic>
         <p:nvPicPr>
-          <p:cNvPr id="6" name="Image 0" descr="/tmp/claude-0/-home-user-thirdbrain-web/bc639c69-a342-56eb-af6c-6a89fd170e25/scratchpad/shots_v2/connect.png">    </p:cNvPr>
+          <p:cNvPr id="6" name="Image 0" descr="/tmp/claude-0/-home-user-thirdbrain-web/bc639c69-a342-56eb-af6c-6a89fd170e25/scratchpad/shots_v2/billing.png">    </p:cNvPr>
           <p:cNvPicPr>
             <a:picLocks noChangeAspect="1"/>
           </p:cNvPicPr>
@@ -11208,7 +11386,7 @@
                 <a:ea typeface="Malgun Gothic" pitchFamily="34" charset="-122"/>
                 <a:cs typeface="Malgun Gothic" pitchFamily="34" charset="-120"/>
               </a:rPr>
-              <a:t>읽기 전용 검사
+              <a:t>플랜·상태
 </a:t>
             </a:r>
             <a:pPr indent="0" marL="0">
@@ -11223,7 +11401,7 @@
                 <a:ea typeface="Malgun Gothic" pitchFamily="34" charset="-122"/>
                 <a:cs typeface="Malgun Gothic" pitchFamily="34" charset="-120"/>
               </a:rPr>
-              <a:t>Odoo DB 접속 정보로 버전·설치 모듈·wal_level·복제 권한·대상 테이블 13종을 검사 — 원장에 쓰기 없음, 비밀번호 미저장</a:t>
+              <a:t>trial(무료)/standard/pilot 3플랜 — 상태는 정상→납기 경과→미납 잠금 순으로만 움직입니다(총 4주 유예)</a:t>
             </a:r>
             <a:endParaRPr lang="en-US" sz="1200" dirty="0"/>
           </a:p>
@@ -11289,7 +11467,7 @@
                 <a:ea typeface="Malgun Gothic" pitchFamily="34" charset="-122"/>
                 <a:cs typeface="Malgun Gothic" pitchFamily="34" charset="-120"/>
               </a:rPr>
-              <a:t>맞춤 SQL 생성
+              <a:t>월 청구
 </a:t>
             </a:r>
             <a:pPr indent="0" marL="0">
@@ -11304,7 +11482,7 @@
                 <a:ea typeface="Malgun Gothic" pitchFamily="34" charset="-122"/>
                 <a:cs typeface="Malgun Gothic" pitchFamily="34" charset="-120"/>
               </a:rPr>
-              <a:t>그 인스턴스에 존재하는 테이블만으로 발행(publication) SQL을 만들어 줌 — DBA가 복사·실행</a:t>
+              <a:t>매월 초 '발행' 한 번 — 이미 발행된 달은 그대로(멱등). 수납 확인 후 '수납 처리'로 기록</a:t>
             </a:r>
             <a:endParaRPr lang="en-US" sz="1200" dirty="0"/>
           </a:p>
@@ -11370,7 +11548,7 @@
                 <a:ea typeface="Malgun Gothic" pitchFamily="34" charset="-122"/>
                 <a:cs typeface="Malgun Gothic" pitchFamily="34" charset="-120"/>
               </a:rPr>
-              <a:t>다음 단계
+              <a:t>미납 잠금
 </a:t>
             </a:r>
             <a:pPr indent="0" marL="0">
@@ -11385,7 +11563,7 @@
                 <a:ea typeface="Malgun Gothic" pitchFamily="34" charset="-122"/>
                 <a:cs typeface="Malgun Gothic" pitchFamily="34" charset="-120"/>
               </a:rPr>
-              <a:t>구독 생성→매핑 뷰→정합 대조는 현장 체크리스트 C 절차대로 (엔지니어 동행 권장)</a:t>
+              <a:t>데이터를 지우지 않습니다 — 일반 사용자 로그인만 막고, 관리자는 들어와 수납·해제. 수납 즉시 원상복구</a:t>
             </a:r>
             <a:endParaRPr lang="en-US" sz="1200" dirty="0"/>
           </a:p>
@@ -11495,7 +11673,7 @@
                 <a:ea typeface="Malgun Gothic" pitchFamily="34" charset="-122"/>
                 <a:cs typeface="Malgun Gothic" pitchFamily="34" charset="-120"/>
               </a:rPr>
-              <a:t>5. ADMIN · 공개</a:t>
+              <a:t>5. ADMIN · 관리자</a:t>
             </a:r>
             <a:endParaRPr lang="en-US" sz="1200" dirty="0"/>
           </a:p>
@@ -11534,7 +11712,7 @@
                 <a:ea typeface="Malgun Gothic" pitchFamily="34" charset="-122"/>
                 <a:cs typeface="Malgun Gothic" pitchFamily="34" charset="-120"/>
               </a:rPr>
-              <a:t>서비스 상태 — 밖에서 보는 건강</a:t>
+              <a:t>체험 신청 관리 — 승인제 발급</a:t>
             </a:r>
             <a:endParaRPr lang="en-US" sz="2700" dirty="0"/>
           </a:p>
@@ -11562,7 +11740,7 @@
       </p:sp>
       <p:pic>
         <p:nvPicPr>
-          <p:cNvPr id="6" name="Image 0" descr="/tmp/claude-0/-home-user-thirdbrain-web/bc639c69-a342-56eb-af6c-6a89fd170e25/scratchpad/shots_v2/status.png">    </p:cNvPr>
+          <p:cNvPr id="6" name="Image 0" descr="/tmp/claude-0/-home-user-thirdbrain-web/bc639c69-a342-56eb-af6c-6a89fd170e25/scratchpad/shots_v2/signups.png">    </p:cNvPr>
           <p:cNvPicPr>
             <a:picLocks noChangeAspect="1"/>
           </p:cNvPicPr>
@@ -11690,7 +11868,7 @@
                 <a:ea typeface="Malgun Gothic" pitchFamily="34" charset="-122"/>
                 <a:cs typeface="Malgun Gothic" pitchFamily="34" charset="-120"/>
               </a:rPr>
-              <a:t>공개 페이지
+              <a:t>대기 목록
 </a:t>
             </a:r>
             <a:pPr indent="0" marL="0">
@@ -11705,7 +11883,7 @@
                 <a:ea typeface="Malgun Gothic" pitchFamily="34" charset="-122"/>
                 <a:cs typeface="Malgun Gothic" pitchFamily="34" charset="-120"/>
               </a:rPr>
-              <a:t>/status 는 로그인 없이 접근 — 웹앱·DB·야간 파이프라인 신호만 노출(데이터·계정 정보 없음)</a:t>
+              <a:t>웹 신청 폼으로 들어온 신청이 대기로 쌓입니다 — 발급 버튼 한 번에 체험 테넌트 생성 + 초기 계정 파일 경로 표시</a:t>
             </a:r>
             <a:endParaRPr lang="en-US" sz="1200" dirty="0"/>
           </a:p>
@@ -11771,7 +11949,7 @@
                 <a:ea typeface="Malgun Gothic" pitchFamily="34" charset="-122"/>
                 <a:cs typeface="Malgun Gothic" pitchFamily="34" charset="-120"/>
               </a:rPr>
-              <a:t>자동 감시
+              <a:t>승인제 기본
 </a:t>
             </a:r>
             <a:pPr indent="0" marL="0">
@@ -11786,7 +11964,7 @@
                 <a:ea typeface="Malgun Gothic" pitchFamily="34" charset="-122"/>
                 <a:cs typeface="Malgun Gothic" pitchFamily="34" charset="-120"/>
               </a:rPr>
-              <a:t>하트비트가 5분마다 검사 — 연속 2회 실패 시 다운 경보, 복구 시 복구 알림. 정합 배치 실패도 여기서 이중 감시</a:t>
+              <a:t>자동 발급은 AXP_AUTO_ISSUE=1을 명시로 켠 경우에만 — 접수된 결정(초기 승인제)이 기본값입니다</a:t>
             </a:r>
             <a:endParaRPr lang="en-US" sz="1200" dirty="0"/>
           </a:p>
@@ -11852,7 +12030,7 @@
                 <a:ea typeface="Malgun Gothic" pitchFamily="34" charset="-122"/>
                 <a:cs typeface="Malgun Gothic" pitchFamily="34" charset="-120"/>
               </a:rPr>
-              <a:t>데이터 정합 신호
+              <a:t>이메일은 수동
 </a:t>
             </a:r>
             <a:pPr indent="0" marL="0">
@@ -11867,7 +12045,7 @@
                 <a:ea typeface="Malgun Gothic" pitchFamily="34" charset="-122"/>
                 <a:cs typeface="Malgun Gothic" pitchFamily="34" charset="-120"/>
               </a:rPr>
-              <a:t>야간 정합 배치의 최근 통과 여부를 신호등으로만 노출 — 수치·데이터는 보이지 않습니다</a:t>
+              <a:t>초기 계정 안내 메일은 아직 사람이 보냅니다(SMTP 결선 전) — 화면에 명시</a:t>
             </a:r>
             <a:endParaRPr lang="en-US" sz="1200" dirty="0"/>
           </a:p>
@@ -11977,7 +12155,7 @@
                 <a:ea typeface="Malgun Gothic" pitchFamily="34" charset="-122"/>
                 <a:cs typeface="Malgun Gothic" pitchFamily="34" charset="-120"/>
               </a:rPr>
-              <a:t>5. ADMIN · 공개</a:t>
+              <a:t>5. ADMIN · 관리자</a:t>
             </a:r>
             <a:endParaRPr lang="en-US" sz="1200" dirty="0"/>
           </a:p>
@@ -12016,7 +12194,7 @@
                 <a:ea typeface="Malgun Gothic" pitchFamily="34" charset="-122"/>
                 <a:cs typeface="Malgun Gothic" pitchFamily="34" charset="-120"/>
               </a:rPr>
-              <a:t>체험 신청 폼 — 손님이 문을 두드리는 곳</a:t>
+              <a:t>Odoo 연결 마법사 — 붙기 전 검사</a:t>
             </a:r>
             <a:endParaRPr lang="en-US" sz="2700" dirty="0"/>
           </a:p>
@@ -12044,7 +12222,7 @@
       </p:sp>
       <p:pic>
         <p:nvPicPr>
-          <p:cNvPr id="6" name="Image 0" descr="/tmp/claude-0/-home-user-thirdbrain-web/bc639c69-a342-56eb-af6c-6a89fd170e25/scratchpad/shots_v2/signup.png">    </p:cNvPr>
+          <p:cNvPr id="6" name="Image 0" descr="/tmp/claude-0/-home-user-thirdbrain-web/bc639c69-a342-56eb-af6c-6a89fd170e25/scratchpad/shots_v2/connect.png">    </p:cNvPr>
           <p:cNvPicPr>
             <a:picLocks noChangeAspect="1"/>
           </p:cNvPicPr>
@@ -12172,7 +12350,7 @@
                 <a:ea typeface="Malgun Gothic" pitchFamily="34" charset="-122"/>
                 <a:cs typeface="Malgun Gothic" pitchFamily="34" charset="-120"/>
               </a:rPr>
-              <a:t>공개 폼
+              <a:t>읽기 전용 검사
 </a:t>
             </a:r>
             <a:pPr indent="0" marL="0">
@@ -12187,7 +12365,7 @@
                 <a:ea typeface="Malgun Gothic" pitchFamily="34" charset="-122"/>
                 <a:cs typeface="Malgun Gothic" pitchFamily="34" charset="-120"/>
               </a:rPr>
-              <a:t>/signup 은 로그인 없이 접근 — 회사명·이메일만 필수, 체험 데이터는 합성이며 업로드는 24시간 파기임을 안내</a:t>
+              <a:t>Odoo DB 접속 정보로 버전·설치 모듈·wal_level·복제 권한·대상 테이블 13종을 검사 — 원장에 쓰기 없음, 비밀번호 미저장</a:t>
             </a:r>
             <a:endParaRPr lang="en-US" sz="1200" dirty="0"/>
           </a:p>
@@ -12253,7 +12431,7 @@
                 <a:ea typeface="Malgun Gothic" pitchFamily="34" charset="-122"/>
                 <a:cs typeface="Malgun Gothic" pitchFamily="34" charset="-120"/>
               </a:rPr>
-              <a:t>봇 방어
+              <a:t>맞춤 SQL 생성
 </a:t>
             </a:r>
             <a:pPr indent="0" marL="0">
@@ -12268,7 +12446,7 @@
                 <a:ea typeface="Malgun Gothic" pitchFamily="34" charset="-122"/>
                 <a:cs typeface="Malgun Gothic" pitchFamily="34" charset="-120"/>
               </a:rPr>
-              <a:t>숨은 허니팟 필드 + 시간당 접수 완충 — 봇은 조용히 흘려보내고 기록하지 않습니다</a:t>
+              <a:t>그 인스턴스에 존재하는 테이블만으로 발행(publication) SQL을 만들어 줌 — DBA가 복사·실행</a:t>
             </a:r>
             <a:endParaRPr lang="en-US" sz="1200" dirty="0"/>
           </a:p>
@@ -12349,7 +12527,7 @@
                 <a:ea typeface="Malgun Gothic" pitchFamily="34" charset="-122"/>
                 <a:cs typeface="Malgun Gothic" pitchFamily="34" charset="-120"/>
               </a:rPr>
-              <a:t>접수되면 관리자에게 알림 — '체험 신청 관리'에서 발급/반려</a:t>
+              <a:t>구독 생성→매핑 뷰→정합 대조는 현장 체크리스트 C 절차대로 (엔지니어 동행 권장)</a:t>
             </a:r>
             <a:endParaRPr lang="en-US" sz="1200" dirty="0"/>
           </a:p>
@@ -12459,7 +12637,7 @@
                 <a:ea typeface="Malgun Gothic" pitchFamily="34" charset="-122"/>
                 <a:cs typeface="Malgun Gothic" pitchFamily="34" charset="-120"/>
               </a:rPr>
-              <a:t>6. ROUTINE</a:t>
+              <a:t>5. ADMIN · 공개</a:t>
             </a:r>
             <a:endParaRPr lang="en-US" sz="1200" dirty="0"/>
           </a:p>
@@ -12498,7 +12676,7 @@
                 <a:ea typeface="Malgun Gothic" pitchFamily="34" charset="-122"/>
                 <a:cs typeface="Malgun Gothic" pitchFamily="34" charset="-120"/>
               </a:rPr>
-              <a:t>표준 운영 일과 — 일·주·월</a:t>
+              <a:t>서비스 상태 — 밖에서 보는 건강</a:t>
             </a:r>
             <a:endParaRPr lang="en-US" sz="2700" dirty="0"/>
           </a:p>
@@ -12524,9 +12702,973 @@
           <a:ln/>
         </p:spPr>
       </p:sp>
+      <p:pic>
+        <p:nvPicPr>
+          <p:cNvPr id="6" name="Image 0" descr="/tmp/claude-0/-home-user-thirdbrain-web/bc639c69-a342-56eb-af6c-6a89fd170e25/scratchpad/shots_v2/status.png">    </p:cNvPr>
+          <p:cNvPicPr>
+            <a:picLocks noChangeAspect="1"/>
+          </p:cNvPicPr>
+          <p:nvPr/>
+        </p:nvPicPr>
+        <p:blipFill>
+          <a:blip r:embed="rId1"/>
+          <a:stretch>
+            <a:fillRect/>
+          </a:stretch>
+        </p:blipFill>
+        <p:spPr>
+          <a:xfrm>
+            <a:off x="566928" y="1371600"/>
+            <a:ext cx="7955280" cy="4972050"/>
+          </a:xfrm>
+          <a:prstGeom prst="rect">
+            <a:avLst/>
+          </a:prstGeom>
+          <a:effectLst>
+            <a:outerShdw sx="100000" sy="100000" kx="0" ky="0" algn="bl" rotWithShape="0" blurRad="76200" dist="25400" dir="5400000">
+              <a:srgbClr val="3a2a1a">
+                <a:alpha val="35000"/>
+              </a:srgbClr>
+            </a:outerShdw>
+          </a:effectLst>
+        </p:spPr>
+      </p:pic>
+      <p:sp>
+        <p:nvSpPr>
+          <p:cNvPr id="7" name="Text 4"/>
+          <p:cNvSpPr/>
+          <p:nvPr/>
+        </p:nvSpPr>
+        <p:spPr>
+          <a:xfrm>
+            <a:off x="8723376" y="1371600"/>
+            <a:ext cx="3145536" cy="347472"/>
+          </a:xfrm>
+          <a:prstGeom prst="rect">
+            <a:avLst/>
+          </a:prstGeom>
+          <a:noFill/>
+          <a:ln/>
+        </p:spPr>
+        <p:txBody>
+          <a:bodyPr wrap="square" rtlCol="0" anchor="ctr"/>
+          <a:lstStyle/>
+          <a:p>
+            <a:pPr indent="0" marL="0">
+              <a:buNone/>
+            </a:pPr>
+            <a:r>
+              <a:rPr lang="en-US" sz="1400" b="1" dirty="0">
+                <a:solidFill>
+                  <a:srgbClr val="C07F1E"/>
+                </a:solidFill>
+                <a:latin typeface="Malgun Gothic" pitchFamily="34" charset="0"/>
+                <a:ea typeface="Malgun Gothic" pitchFamily="34" charset="-122"/>
+                <a:cs typeface="Malgun Gothic" pitchFamily="34" charset="-120"/>
+              </a:rPr>
+              <a:t>운영 포인트</a:t>
+            </a:r>
+            <a:endParaRPr lang="en-US" sz="1400" dirty="0"/>
+          </a:p>
+        </p:txBody>
+      </p:sp>
+      <p:sp>
+        <p:nvSpPr>
+          <p:cNvPr id="8" name="Shape 5"/>
+          <p:cNvSpPr/>
+          <p:nvPr/>
+        </p:nvSpPr>
+        <p:spPr>
+          <a:xfrm>
+            <a:off x="8723376" y="1810512"/>
+            <a:ext cx="3145536" cy="1207008"/>
+          </a:xfrm>
+          <a:prstGeom prst="roundRect">
+            <a:avLst>
+              <a:gd name="adj" fmla="val 4545"/>
+            </a:avLst>
+          </a:prstGeom>
+          <a:solidFill>
+            <a:srgbClr val="FFFFFF"/>
+          </a:solidFill>
+          <a:ln w="12700">
+            <a:solidFill>
+              <a:srgbClr val="DCCDBB"/>
+            </a:solidFill>
+            <a:prstDash val="solid"/>
+          </a:ln>
+        </p:spPr>
+      </p:sp>
+      <p:sp>
+        <p:nvSpPr>
+          <p:cNvPr id="9" name="Text 6"/>
+          <p:cNvSpPr/>
+          <p:nvPr/>
+        </p:nvSpPr>
+        <p:spPr>
+          <a:xfrm>
+            <a:off x="8814816" y="1856232"/>
+            <a:ext cx="2962656" cy="1115568"/>
+          </a:xfrm>
+          <a:prstGeom prst="rect">
+            <a:avLst/>
+          </a:prstGeom>
+          <a:noFill/>
+          <a:ln/>
+        </p:spPr>
+        <p:txBody>
+          <a:bodyPr wrap="square" rtlCol="0" anchor="t"/>
+          <a:lstStyle/>
+          <a:p>
+            <a:pPr indent="0" marL="0">
+              <a:buNone/>
+            </a:pPr>
+            <a:r>
+              <a:rPr lang="en-US" sz="1200" b="1" dirty="0">
+                <a:solidFill>
+                  <a:srgbClr val="6E3A1C"/>
+                </a:solidFill>
+                <a:latin typeface="Malgun Gothic" pitchFamily="34" charset="0"/>
+                <a:ea typeface="Malgun Gothic" pitchFamily="34" charset="-122"/>
+                <a:cs typeface="Malgun Gothic" pitchFamily="34" charset="-120"/>
+              </a:rPr>
+              <a:t>공개 페이지
+</a:t>
+            </a:r>
+            <a:pPr indent="0" marL="0">
+              <a:buNone/>
+            </a:pPr>
+            <a:r>
+              <a:rPr lang="en-US" sz="1050" dirty="0">
+                <a:solidFill>
+                  <a:srgbClr val="2E241C"/>
+                </a:solidFill>
+                <a:latin typeface="Malgun Gothic" pitchFamily="34" charset="0"/>
+                <a:ea typeface="Malgun Gothic" pitchFamily="34" charset="-122"/>
+                <a:cs typeface="Malgun Gothic" pitchFamily="34" charset="-120"/>
+              </a:rPr>
+              <a:t>/status 는 로그인 없이 접근 — 웹앱·DB·야간 파이프라인 신호만 노출(데이터·계정 정보 없음)</a:t>
+            </a:r>
+            <a:endParaRPr lang="en-US" sz="1200" dirty="0"/>
+          </a:p>
+        </p:txBody>
+      </p:sp>
+      <p:sp>
+        <p:nvSpPr>
+          <p:cNvPr id="10" name="Shape 7"/>
+          <p:cNvSpPr/>
+          <p:nvPr/>
+        </p:nvSpPr>
+        <p:spPr>
+          <a:xfrm>
+            <a:off x="8723376" y="3136392"/>
+            <a:ext cx="3145536" cy="1207008"/>
+          </a:xfrm>
+          <a:prstGeom prst="roundRect">
+            <a:avLst>
+              <a:gd name="adj" fmla="val 4545"/>
+            </a:avLst>
+          </a:prstGeom>
+          <a:solidFill>
+            <a:srgbClr val="FFFFFF"/>
+          </a:solidFill>
+          <a:ln w="12700">
+            <a:solidFill>
+              <a:srgbClr val="DCCDBB"/>
+            </a:solidFill>
+            <a:prstDash val="solid"/>
+          </a:ln>
+        </p:spPr>
+      </p:sp>
+      <p:sp>
+        <p:nvSpPr>
+          <p:cNvPr id="11" name="Text 8"/>
+          <p:cNvSpPr/>
+          <p:nvPr/>
+        </p:nvSpPr>
+        <p:spPr>
+          <a:xfrm>
+            <a:off x="8814816" y="3182112"/>
+            <a:ext cx="2962656" cy="1115568"/>
+          </a:xfrm>
+          <a:prstGeom prst="rect">
+            <a:avLst/>
+          </a:prstGeom>
+          <a:noFill/>
+          <a:ln/>
+        </p:spPr>
+        <p:txBody>
+          <a:bodyPr wrap="square" rtlCol="0" anchor="t"/>
+          <a:lstStyle/>
+          <a:p>
+            <a:pPr indent="0" marL="0">
+              <a:buNone/>
+            </a:pPr>
+            <a:r>
+              <a:rPr lang="en-US" sz="1200" b="1" dirty="0">
+                <a:solidFill>
+                  <a:srgbClr val="6E3A1C"/>
+                </a:solidFill>
+                <a:latin typeface="Malgun Gothic" pitchFamily="34" charset="0"/>
+                <a:ea typeface="Malgun Gothic" pitchFamily="34" charset="-122"/>
+                <a:cs typeface="Malgun Gothic" pitchFamily="34" charset="-120"/>
+              </a:rPr>
+              <a:t>자동 감시
+</a:t>
+            </a:r>
+            <a:pPr indent="0" marL="0">
+              <a:buNone/>
+            </a:pPr>
+            <a:r>
+              <a:rPr lang="en-US" sz="1050" dirty="0">
+                <a:solidFill>
+                  <a:srgbClr val="2E241C"/>
+                </a:solidFill>
+                <a:latin typeface="Malgun Gothic" pitchFamily="34" charset="0"/>
+                <a:ea typeface="Malgun Gothic" pitchFamily="34" charset="-122"/>
+                <a:cs typeface="Malgun Gothic" pitchFamily="34" charset="-120"/>
+              </a:rPr>
+              <a:t>하트비트가 5분마다 검사 — 연속 2회 실패 시 다운 경보, 복구 시 복구 알림. 정합 배치 실패도 여기서 이중 감시</a:t>
+            </a:r>
+            <a:endParaRPr lang="en-US" sz="1200" dirty="0"/>
+          </a:p>
+        </p:txBody>
+      </p:sp>
+      <p:sp>
+        <p:nvSpPr>
+          <p:cNvPr id="12" name="Shape 9"/>
+          <p:cNvSpPr/>
+          <p:nvPr/>
+        </p:nvSpPr>
+        <p:spPr>
+          <a:xfrm>
+            <a:off x="8723376" y="4462272"/>
+            <a:ext cx="3145536" cy="1207008"/>
+          </a:xfrm>
+          <a:prstGeom prst="roundRect">
+            <a:avLst>
+              <a:gd name="adj" fmla="val 4545"/>
+            </a:avLst>
+          </a:prstGeom>
+          <a:solidFill>
+            <a:srgbClr val="FFFFFF"/>
+          </a:solidFill>
+          <a:ln w="12700">
+            <a:solidFill>
+              <a:srgbClr val="DCCDBB"/>
+            </a:solidFill>
+            <a:prstDash val="solid"/>
+          </a:ln>
+        </p:spPr>
+      </p:sp>
+      <p:sp>
+        <p:nvSpPr>
+          <p:cNvPr id="13" name="Text 10"/>
+          <p:cNvSpPr/>
+          <p:nvPr/>
+        </p:nvSpPr>
+        <p:spPr>
+          <a:xfrm>
+            <a:off x="8814816" y="4507992"/>
+            <a:ext cx="2962656" cy="1115568"/>
+          </a:xfrm>
+          <a:prstGeom prst="rect">
+            <a:avLst/>
+          </a:prstGeom>
+          <a:noFill/>
+          <a:ln/>
+        </p:spPr>
+        <p:txBody>
+          <a:bodyPr wrap="square" rtlCol="0" anchor="t"/>
+          <a:lstStyle/>
+          <a:p>
+            <a:pPr indent="0" marL="0">
+              <a:buNone/>
+            </a:pPr>
+            <a:r>
+              <a:rPr lang="en-US" sz="1200" b="1" dirty="0">
+                <a:solidFill>
+                  <a:srgbClr val="6E3A1C"/>
+                </a:solidFill>
+                <a:latin typeface="Malgun Gothic" pitchFamily="34" charset="0"/>
+                <a:ea typeface="Malgun Gothic" pitchFamily="34" charset="-122"/>
+                <a:cs typeface="Malgun Gothic" pitchFamily="34" charset="-120"/>
+              </a:rPr>
+              <a:t>데이터 정합 신호
+</a:t>
+            </a:r>
+            <a:pPr indent="0" marL="0">
+              <a:buNone/>
+            </a:pPr>
+            <a:r>
+              <a:rPr lang="en-US" sz="1050" dirty="0">
+                <a:solidFill>
+                  <a:srgbClr val="2E241C"/>
+                </a:solidFill>
+                <a:latin typeface="Malgun Gothic" pitchFamily="34" charset="0"/>
+                <a:ea typeface="Malgun Gothic" pitchFamily="34" charset="-122"/>
+                <a:cs typeface="Malgun Gothic" pitchFamily="34" charset="-120"/>
+              </a:rPr>
+              <a:t>야간 정합 배치의 최근 통과 여부를 신호등으로만 노출 — 수치·데이터는 보이지 않습니다</a:t>
+            </a:r>
+            <a:endParaRPr lang="en-US" sz="1200" dirty="0"/>
+          </a:p>
+        </p:txBody>
+      </p:sp>
+    </p:spTree>
+  </p:cSld>
+  <p:clrMapOvr>
+    <a:masterClrMapping/>
+  </p:clrMapOvr>
+</p:sld>
+</file>
+
+<file path=ppt/slides/slide26.xml><?xml version="1.0" encoding="utf-8"?>
+<p:sld xmlns:a="http://schemas.openxmlformats.org/drawingml/2006/main" xmlns:r="http://schemas.openxmlformats.org/officeDocument/2006/relationships" xmlns:p="http://schemas.openxmlformats.org/presentationml/2006/main">
+  <p:cSld name="Slide 26">
+    <p:bg>
+      <p:bgPr>
+        <a:solidFill>
+          <a:srgbClr val="F8F2EA"/>
+        </a:solidFill>
+      </p:bgPr>
+    </p:bg>
+    <p:spTree>
+      <p:nvGrpSpPr>
+        <p:cNvPr id="1" name=""/>
+        <p:cNvGrpSpPr/>
+        <p:nvPr/>
+      </p:nvGrpSpPr>
+      <p:grpSpPr>
+        <a:xfrm>
+          <a:off x="0" y="0"/>
+          <a:ext cx="0" cy="0"/>
+          <a:chOff x="0" y="0"/>
+          <a:chExt cx="0" cy="0"/>
+        </a:xfrm>
+      </p:grpSpPr>
+      <p:sp>
+        <p:nvSpPr>
+          <p:cNvPr id="2" name="Text 0"/>
+          <p:cNvSpPr/>
+          <p:nvPr/>
+        </p:nvSpPr>
+        <p:spPr>
+          <a:xfrm>
+            <a:off x="11686032" y="6473952"/>
+            <a:ext cx="365760" cy="274320"/>
+          </a:xfrm>
+          <a:prstGeom prst="rect">
+            <a:avLst/>
+          </a:prstGeom>
+          <a:noFill/>
+          <a:ln/>
+        </p:spPr>
+        <p:txBody>
+          <a:bodyPr wrap="square" rtlCol="0" anchor="ctr"/>
+          <a:lstStyle/>
+          <a:p>
+            <a:pPr algn="r" indent="0" marL="0">
+              <a:buNone/>
+            </a:pPr>
+            <a:r>
+              <a:rPr lang="en-US" sz="1000" dirty="0">
+                <a:solidFill>
+                  <a:srgbClr val="76675A"/>
+                </a:solidFill>
+                <a:latin typeface="Malgun Gothic" pitchFamily="34" charset="0"/>
+                <a:ea typeface="Malgun Gothic" pitchFamily="34" charset="-122"/>
+                <a:cs typeface="Malgun Gothic" pitchFamily="34" charset="-120"/>
+              </a:rPr>
+              <a:t>26</a:t>
+            </a:r>
+            <a:endParaRPr lang="en-US" sz="1000" dirty="0"/>
+          </a:p>
+        </p:txBody>
+      </p:sp>
+      <p:sp>
+        <p:nvSpPr>
+          <p:cNvPr id="3" name="Text 1"/>
+          <p:cNvSpPr/>
+          <p:nvPr/>
+        </p:nvSpPr>
+        <p:spPr>
+          <a:xfrm>
+            <a:off x="566928" y="310896"/>
+            <a:ext cx="10515600" cy="292608"/>
+          </a:xfrm>
+          <a:prstGeom prst="rect">
+            <a:avLst/>
+          </a:prstGeom>
+          <a:noFill/>
+          <a:ln/>
+        </p:spPr>
+        <p:txBody>
+          <a:bodyPr wrap="square" rtlCol="0" anchor="ctr"/>
+          <a:lstStyle/>
+          <a:p>
+            <a:pPr indent="0" marL="0">
+              <a:buNone/>
+            </a:pPr>
+            <a:r>
+              <a:rPr lang="en-US" sz="1200" b="1" spc="300" kern="0" dirty="0">
+                <a:solidFill>
+                  <a:srgbClr val="C07F1E"/>
+                </a:solidFill>
+                <a:latin typeface="Malgun Gothic" pitchFamily="34" charset="0"/>
+                <a:ea typeface="Malgun Gothic" pitchFamily="34" charset="-122"/>
+                <a:cs typeface="Malgun Gothic" pitchFamily="34" charset="-120"/>
+              </a:rPr>
+              <a:t>5. ADMIN · 공개</a:t>
+            </a:r>
+            <a:endParaRPr lang="en-US" sz="1200" dirty="0"/>
+          </a:p>
+        </p:txBody>
+      </p:sp>
+      <p:sp>
+        <p:nvSpPr>
+          <p:cNvPr id="4" name="Text 2"/>
+          <p:cNvSpPr/>
+          <p:nvPr/>
+        </p:nvSpPr>
+        <p:spPr>
+          <a:xfrm>
+            <a:off x="566928" y="566928"/>
+            <a:ext cx="11055096" cy="566928"/>
+          </a:xfrm>
+          <a:prstGeom prst="rect">
+            <a:avLst/>
+          </a:prstGeom>
+          <a:noFill/>
+          <a:ln/>
+        </p:spPr>
+        <p:txBody>
+          <a:bodyPr wrap="square" rtlCol="0" anchor="ctr"/>
+          <a:lstStyle/>
+          <a:p>
+            <a:pPr indent="0" marL="0">
+              <a:buNone/>
+            </a:pPr>
+            <a:r>
+              <a:rPr lang="en-US" sz="2700" b="1" dirty="0">
+                <a:solidFill>
+                  <a:srgbClr val="6E3A1C"/>
+                </a:solidFill>
+                <a:latin typeface="Malgun Gothic" pitchFamily="34" charset="0"/>
+                <a:ea typeface="Malgun Gothic" pitchFamily="34" charset="-122"/>
+                <a:cs typeface="Malgun Gothic" pitchFamily="34" charset="-120"/>
+              </a:rPr>
+              <a:t>체험 신청 폼 — 손님이 문을 두드리는 곳</a:t>
+            </a:r>
+            <a:endParaRPr lang="en-US" sz="2700" dirty="0"/>
+          </a:p>
+        </p:txBody>
+      </p:sp>
+      <p:sp>
+        <p:nvSpPr>
+          <p:cNvPr id="5" name="Shape 3"/>
+          <p:cNvSpPr/>
+          <p:nvPr/>
+        </p:nvSpPr>
+        <p:spPr>
+          <a:xfrm>
+            <a:off x="566928" y="1207008"/>
+            <a:ext cx="1051560" cy="41148"/>
+          </a:xfrm>
+          <a:prstGeom prst="rect">
+            <a:avLst/>
+          </a:prstGeom>
+          <a:solidFill>
+            <a:srgbClr val="E8A33D"/>
+          </a:solidFill>
+          <a:ln/>
+        </p:spPr>
+      </p:sp>
+      <p:pic>
+        <p:nvPicPr>
+          <p:cNvPr id="6" name="Image 0" descr="/tmp/claude-0/-home-user-thirdbrain-web/bc639c69-a342-56eb-af6c-6a89fd170e25/scratchpad/shots_v2/signup.png">    </p:cNvPr>
+          <p:cNvPicPr>
+            <a:picLocks noChangeAspect="1"/>
+          </p:cNvPicPr>
+          <p:nvPr/>
+        </p:nvPicPr>
+        <p:blipFill>
+          <a:blip r:embed="rId1"/>
+          <a:stretch>
+            <a:fillRect/>
+          </a:stretch>
+        </p:blipFill>
+        <p:spPr>
+          <a:xfrm>
+            <a:off x="566928" y="1371600"/>
+            <a:ext cx="7955280" cy="4972050"/>
+          </a:xfrm>
+          <a:prstGeom prst="rect">
+            <a:avLst/>
+          </a:prstGeom>
+          <a:effectLst>
+            <a:outerShdw sx="100000" sy="100000" kx="0" ky="0" algn="bl" rotWithShape="0" blurRad="76200" dist="25400" dir="5400000">
+              <a:srgbClr val="3a2a1a">
+                <a:alpha val="35000"/>
+              </a:srgbClr>
+            </a:outerShdw>
+          </a:effectLst>
+        </p:spPr>
+      </p:pic>
+      <p:sp>
+        <p:nvSpPr>
+          <p:cNvPr id="7" name="Text 4"/>
+          <p:cNvSpPr/>
+          <p:nvPr/>
+        </p:nvSpPr>
+        <p:spPr>
+          <a:xfrm>
+            <a:off x="8723376" y="1371600"/>
+            <a:ext cx="3145536" cy="347472"/>
+          </a:xfrm>
+          <a:prstGeom prst="rect">
+            <a:avLst/>
+          </a:prstGeom>
+          <a:noFill/>
+          <a:ln/>
+        </p:spPr>
+        <p:txBody>
+          <a:bodyPr wrap="square" rtlCol="0" anchor="ctr"/>
+          <a:lstStyle/>
+          <a:p>
+            <a:pPr indent="0" marL="0">
+              <a:buNone/>
+            </a:pPr>
+            <a:r>
+              <a:rPr lang="en-US" sz="1400" b="1" dirty="0">
+                <a:solidFill>
+                  <a:srgbClr val="C07F1E"/>
+                </a:solidFill>
+                <a:latin typeface="Malgun Gothic" pitchFamily="34" charset="0"/>
+                <a:ea typeface="Malgun Gothic" pitchFamily="34" charset="-122"/>
+                <a:cs typeface="Malgun Gothic" pitchFamily="34" charset="-120"/>
+              </a:rPr>
+              <a:t>운영 포인트</a:t>
+            </a:r>
+            <a:endParaRPr lang="en-US" sz="1400" dirty="0"/>
+          </a:p>
+        </p:txBody>
+      </p:sp>
+      <p:sp>
+        <p:nvSpPr>
+          <p:cNvPr id="8" name="Shape 5"/>
+          <p:cNvSpPr/>
+          <p:nvPr/>
+        </p:nvSpPr>
+        <p:spPr>
+          <a:xfrm>
+            <a:off x="8723376" y="1810512"/>
+            <a:ext cx="3145536" cy="1207008"/>
+          </a:xfrm>
+          <a:prstGeom prst="roundRect">
+            <a:avLst>
+              <a:gd name="adj" fmla="val 4545"/>
+            </a:avLst>
+          </a:prstGeom>
+          <a:solidFill>
+            <a:srgbClr val="FFFFFF"/>
+          </a:solidFill>
+          <a:ln w="12700">
+            <a:solidFill>
+              <a:srgbClr val="DCCDBB"/>
+            </a:solidFill>
+            <a:prstDash val="solid"/>
+          </a:ln>
+        </p:spPr>
+      </p:sp>
+      <p:sp>
+        <p:nvSpPr>
+          <p:cNvPr id="9" name="Text 6"/>
+          <p:cNvSpPr/>
+          <p:nvPr/>
+        </p:nvSpPr>
+        <p:spPr>
+          <a:xfrm>
+            <a:off x="8814816" y="1856232"/>
+            <a:ext cx="2962656" cy="1115568"/>
+          </a:xfrm>
+          <a:prstGeom prst="rect">
+            <a:avLst/>
+          </a:prstGeom>
+          <a:noFill/>
+          <a:ln/>
+        </p:spPr>
+        <p:txBody>
+          <a:bodyPr wrap="square" rtlCol="0" anchor="t"/>
+          <a:lstStyle/>
+          <a:p>
+            <a:pPr indent="0" marL="0">
+              <a:buNone/>
+            </a:pPr>
+            <a:r>
+              <a:rPr lang="en-US" sz="1200" b="1" dirty="0">
+                <a:solidFill>
+                  <a:srgbClr val="6E3A1C"/>
+                </a:solidFill>
+                <a:latin typeface="Malgun Gothic" pitchFamily="34" charset="0"/>
+                <a:ea typeface="Malgun Gothic" pitchFamily="34" charset="-122"/>
+                <a:cs typeface="Malgun Gothic" pitchFamily="34" charset="-120"/>
+              </a:rPr>
+              <a:t>공개 폼
+</a:t>
+            </a:r>
+            <a:pPr indent="0" marL="0">
+              <a:buNone/>
+            </a:pPr>
+            <a:r>
+              <a:rPr lang="en-US" sz="1050" dirty="0">
+                <a:solidFill>
+                  <a:srgbClr val="2E241C"/>
+                </a:solidFill>
+                <a:latin typeface="Malgun Gothic" pitchFamily="34" charset="0"/>
+                <a:ea typeface="Malgun Gothic" pitchFamily="34" charset="-122"/>
+                <a:cs typeface="Malgun Gothic" pitchFamily="34" charset="-120"/>
+              </a:rPr>
+              <a:t>/signup 은 로그인 없이 접근 — 회사명·이메일만 필수, 체험 데이터는 합성이며 업로드는 24시간 파기임을 안내</a:t>
+            </a:r>
+            <a:endParaRPr lang="en-US" sz="1200" dirty="0"/>
+          </a:p>
+        </p:txBody>
+      </p:sp>
+      <p:sp>
+        <p:nvSpPr>
+          <p:cNvPr id="10" name="Shape 7"/>
+          <p:cNvSpPr/>
+          <p:nvPr/>
+        </p:nvSpPr>
+        <p:spPr>
+          <a:xfrm>
+            <a:off x="8723376" y="3136392"/>
+            <a:ext cx="3145536" cy="1207008"/>
+          </a:xfrm>
+          <a:prstGeom prst="roundRect">
+            <a:avLst>
+              <a:gd name="adj" fmla="val 4545"/>
+            </a:avLst>
+          </a:prstGeom>
+          <a:solidFill>
+            <a:srgbClr val="FFFFFF"/>
+          </a:solidFill>
+          <a:ln w="12700">
+            <a:solidFill>
+              <a:srgbClr val="DCCDBB"/>
+            </a:solidFill>
+            <a:prstDash val="solid"/>
+          </a:ln>
+        </p:spPr>
+      </p:sp>
+      <p:sp>
+        <p:nvSpPr>
+          <p:cNvPr id="11" name="Text 8"/>
+          <p:cNvSpPr/>
+          <p:nvPr/>
+        </p:nvSpPr>
+        <p:spPr>
+          <a:xfrm>
+            <a:off x="8814816" y="3182112"/>
+            <a:ext cx="2962656" cy="1115568"/>
+          </a:xfrm>
+          <a:prstGeom prst="rect">
+            <a:avLst/>
+          </a:prstGeom>
+          <a:noFill/>
+          <a:ln/>
+        </p:spPr>
+        <p:txBody>
+          <a:bodyPr wrap="square" rtlCol="0" anchor="t"/>
+          <a:lstStyle/>
+          <a:p>
+            <a:pPr indent="0" marL="0">
+              <a:buNone/>
+            </a:pPr>
+            <a:r>
+              <a:rPr lang="en-US" sz="1200" b="1" dirty="0">
+                <a:solidFill>
+                  <a:srgbClr val="6E3A1C"/>
+                </a:solidFill>
+                <a:latin typeface="Malgun Gothic" pitchFamily="34" charset="0"/>
+                <a:ea typeface="Malgun Gothic" pitchFamily="34" charset="-122"/>
+                <a:cs typeface="Malgun Gothic" pitchFamily="34" charset="-120"/>
+              </a:rPr>
+              <a:t>봇 방어
+</a:t>
+            </a:r>
+            <a:pPr indent="0" marL="0">
+              <a:buNone/>
+            </a:pPr>
+            <a:r>
+              <a:rPr lang="en-US" sz="1050" dirty="0">
+                <a:solidFill>
+                  <a:srgbClr val="2E241C"/>
+                </a:solidFill>
+                <a:latin typeface="Malgun Gothic" pitchFamily="34" charset="0"/>
+                <a:ea typeface="Malgun Gothic" pitchFamily="34" charset="-122"/>
+                <a:cs typeface="Malgun Gothic" pitchFamily="34" charset="-120"/>
+              </a:rPr>
+              <a:t>숨은 허니팟 필드 + 시간당 접수 완충 — 봇은 조용히 흘려보내고 기록하지 않습니다</a:t>
+            </a:r>
+            <a:endParaRPr lang="en-US" sz="1200" dirty="0"/>
+          </a:p>
+        </p:txBody>
+      </p:sp>
+      <p:sp>
+        <p:nvSpPr>
+          <p:cNvPr id="12" name="Shape 9"/>
+          <p:cNvSpPr/>
+          <p:nvPr/>
+        </p:nvSpPr>
+        <p:spPr>
+          <a:xfrm>
+            <a:off x="8723376" y="4462272"/>
+            <a:ext cx="3145536" cy="1207008"/>
+          </a:xfrm>
+          <a:prstGeom prst="roundRect">
+            <a:avLst>
+              <a:gd name="adj" fmla="val 4545"/>
+            </a:avLst>
+          </a:prstGeom>
+          <a:solidFill>
+            <a:srgbClr val="FFFFFF"/>
+          </a:solidFill>
+          <a:ln w="12700">
+            <a:solidFill>
+              <a:srgbClr val="DCCDBB"/>
+            </a:solidFill>
+            <a:prstDash val="solid"/>
+          </a:ln>
+        </p:spPr>
+      </p:sp>
+      <p:sp>
+        <p:nvSpPr>
+          <p:cNvPr id="13" name="Text 10"/>
+          <p:cNvSpPr/>
+          <p:nvPr/>
+        </p:nvSpPr>
+        <p:spPr>
+          <a:xfrm>
+            <a:off x="8814816" y="4507992"/>
+            <a:ext cx="2962656" cy="1115568"/>
+          </a:xfrm>
+          <a:prstGeom prst="rect">
+            <a:avLst/>
+          </a:prstGeom>
+          <a:noFill/>
+          <a:ln/>
+        </p:spPr>
+        <p:txBody>
+          <a:bodyPr wrap="square" rtlCol="0" anchor="t"/>
+          <a:lstStyle/>
+          <a:p>
+            <a:pPr indent="0" marL="0">
+              <a:buNone/>
+            </a:pPr>
+            <a:r>
+              <a:rPr lang="en-US" sz="1200" b="1" dirty="0">
+                <a:solidFill>
+                  <a:srgbClr val="6E3A1C"/>
+                </a:solidFill>
+                <a:latin typeface="Malgun Gothic" pitchFamily="34" charset="0"/>
+                <a:ea typeface="Malgun Gothic" pitchFamily="34" charset="-122"/>
+                <a:cs typeface="Malgun Gothic" pitchFamily="34" charset="-120"/>
+              </a:rPr>
+              <a:t>다음 단계
+</a:t>
+            </a:r>
+            <a:pPr indent="0" marL="0">
+              <a:buNone/>
+            </a:pPr>
+            <a:r>
+              <a:rPr lang="en-US" sz="1050" dirty="0">
+                <a:solidFill>
+                  <a:srgbClr val="2E241C"/>
+                </a:solidFill>
+                <a:latin typeface="Malgun Gothic" pitchFamily="34" charset="0"/>
+                <a:ea typeface="Malgun Gothic" pitchFamily="34" charset="-122"/>
+                <a:cs typeface="Malgun Gothic" pitchFamily="34" charset="-120"/>
+              </a:rPr>
+              <a:t>접수되면 관리자에게 알림 — '체험 신청 관리'에서 발급/반려</a:t>
+            </a:r>
+            <a:endParaRPr lang="en-US" sz="1200" dirty="0"/>
+          </a:p>
+        </p:txBody>
+      </p:sp>
+    </p:spTree>
+  </p:cSld>
+  <p:clrMapOvr>
+    <a:masterClrMapping/>
+  </p:clrMapOvr>
+</p:sld>
+</file>
+
+<file path=ppt/slides/slide27.xml><?xml version="1.0" encoding="utf-8"?>
+<p:sld xmlns:a="http://schemas.openxmlformats.org/drawingml/2006/main" xmlns:r="http://schemas.openxmlformats.org/officeDocument/2006/relationships" xmlns:p="http://schemas.openxmlformats.org/presentationml/2006/main">
+  <p:cSld name="Slide 27">
+    <p:bg>
+      <p:bgPr>
+        <a:solidFill>
+          <a:srgbClr val="F8F2EA"/>
+        </a:solidFill>
+      </p:bgPr>
+    </p:bg>
+    <p:spTree>
+      <p:nvGrpSpPr>
+        <p:cNvPr id="1" name=""/>
+        <p:cNvGrpSpPr/>
+        <p:nvPr/>
+      </p:nvGrpSpPr>
+      <p:grpSpPr>
+        <a:xfrm>
+          <a:off x="0" y="0"/>
+          <a:ext cx="0" cy="0"/>
+          <a:chOff x="0" y="0"/>
+          <a:chExt cx="0" cy="0"/>
+        </a:xfrm>
+      </p:grpSpPr>
+      <p:sp>
+        <p:nvSpPr>
+          <p:cNvPr id="2" name="Text 0"/>
+          <p:cNvSpPr/>
+          <p:nvPr/>
+        </p:nvSpPr>
+        <p:spPr>
+          <a:xfrm>
+            <a:off x="11686032" y="6473952"/>
+            <a:ext cx="365760" cy="274320"/>
+          </a:xfrm>
+          <a:prstGeom prst="rect">
+            <a:avLst/>
+          </a:prstGeom>
+          <a:noFill/>
+          <a:ln/>
+        </p:spPr>
+        <p:txBody>
+          <a:bodyPr wrap="square" rtlCol="0" anchor="ctr"/>
+          <a:lstStyle/>
+          <a:p>
+            <a:pPr algn="r" indent="0" marL="0">
+              <a:buNone/>
+            </a:pPr>
+            <a:r>
+              <a:rPr lang="en-US" sz="1000" dirty="0">
+                <a:solidFill>
+                  <a:srgbClr val="76675A"/>
+                </a:solidFill>
+                <a:latin typeface="Malgun Gothic" pitchFamily="34" charset="0"/>
+                <a:ea typeface="Malgun Gothic" pitchFamily="34" charset="-122"/>
+                <a:cs typeface="Malgun Gothic" pitchFamily="34" charset="-120"/>
+              </a:rPr>
+              <a:t>27</a:t>
+            </a:r>
+            <a:endParaRPr lang="en-US" sz="1000" dirty="0"/>
+          </a:p>
+        </p:txBody>
+      </p:sp>
+      <p:sp>
+        <p:nvSpPr>
+          <p:cNvPr id="3" name="Text 1"/>
+          <p:cNvSpPr/>
+          <p:nvPr/>
+        </p:nvSpPr>
+        <p:spPr>
+          <a:xfrm>
+            <a:off x="566928" y="310896"/>
+            <a:ext cx="10515600" cy="292608"/>
+          </a:xfrm>
+          <a:prstGeom prst="rect">
+            <a:avLst/>
+          </a:prstGeom>
+          <a:noFill/>
+          <a:ln/>
+        </p:spPr>
+        <p:txBody>
+          <a:bodyPr wrap="square" rtlCol="0" anchor="ctr"/>
+          <a:lstStyle/>
+          <a:p>
+            <a:pPr indent="0" marL="0">
+              <a:buNone/>
+            </a:pPr>
+            <a:r>
+              <a:rPr lang="en-US" sz="1200" b="1" spc="300" kern="0" dirty="0">
+                <a:solidFill>
+                  <a:srgbClr val="C07F1E"/>
+                </a:solidFill>
+                <a:latin typeface="Malgun Gothic" pitchFamily="34" charset="0"/>
+                <a:ea typeface="Malgun Gothic" pitchFamily="34" charset="-122"/>
+                <a:cs typeface="Malgun Gothic" pitchFamily="34" charset="-120"/>
+              </a:rPr>
+              <a:t>6. ROUTINE</a:t>
+            </a:r>
+            <a:endParaRPr lang="en-US" sz="1200" dirty="0"/>
+          </a:p>
+        </p:txBody>
+      </p:sp>
+      <p:sp>
+        <p:nvSpPr>
+          <p:cNvPr id="4" name="Text 2"/>
+          <p:cNvSpPr/>
+          <p:nvPr/>
+        </p:nvSpPr>
+        <p:spPr>
+          <a:xfrm>
+            <a:off x="566928" y="566928"/>
+            <a:ext cx="11055096" cy="566928"/>
+          </a:xfrm>
+          <a:prstGeom prst="rect">
+            <a:avLst/>
+          </a:prstGeom>
+          <a:noFill/>
+          <a:ln/>
+        </p:spPr>
+        <p:txBody>
+          <a:bodyPr wrap="square" rtlCol="0" anchor="ctr"/>
+          <a:lstStyle/>
+          <a:p>
+            <a:pPr indent="0" marL="0">
+              <a:buNone/>
+            </a:pPr>
+            <a:r>
+              <a:rPr lang="en-US" sz="2700" b="1" dirty="0">
+                <a:solidFill>
+                  <a:srgbClr val="6E3A1C"/>
+                </a:solidFill>
+                <a:latin typeface="Malgun Gothic" pitchFamily="34" charset="0"/>
+                <a:ea typeface="Malgun Gothic" pitchFamily="34" charset="-122"/>
+                <a:cs typeface="Malgun Gothic" pitchFamily="34" charset="-120"/>
+              </a:rPr>
+              <a:t>표준 운영 일과 — 일·주·월</a:t>
+            </a:r>
+            <a:endParaRPr lang="en-US" sz="2700" dirty="0"/>
+          </a:p>
+        </p:txBody>
+      </p:sp>
+      <p:sp>
+        <p:nvSpPr>
+          <p:cNvPr id="5" name="Shape 3"/>
+          <p:cNvSpPr/>
+          <p:nvPr/>
+        </p:nvSpPr>
+        <p:spPr>
+          <a:xfrm>
+            <a:off x="566928" y="1207008"/>
+            <a:ext cx="1051560" cy="41148"/>
+          </a:xfrm>
+          <a:prstGeom prst="rect">
+            <a:avLst/>
+          </a:prstGeom>
+          <a:solidFill>
+            <a:srgbClr val="E8A33D"/>
+          </a:solidFill>
+          <a:ln/>
+        </p:spPr>
+      </p:sp>
       <p:graphicFrame>
         <p:nvGraphicFramePr>
-          <p:cNvPr id="26" name="Table 0"/>
+          <p:cNvPr id="28" name="Table 0"/>
           <p:cNvGraphicFramePr>
             <a:graphicFrameLocks noGrp="1"/>
           </p:cNvGraphicFramePr>
@@ -14247,9 +15389,9 @@
 </p:sld>
 </file>
 
-<file path=ppt/slides/slide26.xml><?xml version="1.0" encoding="utf-8"?>
+<file path=ppt/slides/slide28.xml><?xml version="1.0" encoding="utf-8"?>
 <p:sld xmlns:a="http://schemas.openxmlformats.org/drawingml/2006/main" xmlns:r="http://schemas.openxmlformats.org/officeDocument/2006/relationships" xmlns:p="http://schemas.openxmlformats.org/presentationml/2006/main">
-  <p:cSld name="Slide 26">
+  <p:cSld name="Slide 28">
     <p:bg>
       <p:bgPr>
         <a:solidFill>
@@ -14304,7 +15446,7 @@
                 <a:ea typeface="Malgun Gothic" pitchFamily="34" charset="-122"/>
                 <a:cs typeface="Malgun Gothic" pitchFamily="34" charset="-120"/>
               </a:rPr>
-              <a:t>26</a:t>
+              <a:t>28</a:t>
             </a:r>
             <a:endParaRPr lang="en-US" sz="1000" dirty="0"/>
           </a:p>
@@ -14410,7 +15552,7 @@
       </p:sp>
       <p:graphicFrame>
         <p:nvGraphicFramePr>
-          <p:cNvPr id="27" name="Table 0"/>
+          <p:cNvPr id="29" name="Table 0"/>
           <p:cNvGraphicFramePr>
             <a:graphicFrameLocks noGrp="1"/>
           </p:cNvGraphicFramePr>
@@ -15871,9 +17013,9 @@
 </p:sld>
 </file>
 
-<file path=ppt/slides/slide27.xml><?xml version="1.0" encoding="utf-8"?>
+<file path=ppt/slides/slide29.xml><?xml version="1.0" encoding="utf-8"?>
 <p:sld xmlns:a="http://schemas.openxmlformats.org/drawingml/2006/main" xmlns:r="http://schemas.openxmlformats.org/officeDocument/2006/relationships" xmlns:p="http://schemas.openxmlformats.org/presentationml/2006/main">
-  <p:cSld name="Slide 27">
+  <p:cSld name="Slide 29">
     <p:bg>
       <p:bgPr>
         <a:solidFill>
@@ -15928,7 +17070,7 @@
                 <a:ea typeface="Malgun Gothic" pitchFamily="34" charset="-122"/>
                 <a:cs typeface="Malgun Gothic" pitchFamily="34" charset="-120"/>
               </a:rPr>
-              <a:t>27</a:t>
+              <a:t>29</a:t>
             </a:r>
             <a:endParaRPr lang="en-US" sz="1000" dirty="0"/>
           </a:p>
@@ -16034,7 +17176,7 @@
       </p:sp>
       <p:graphicFrame>
         <p:nvGraphicFramePr>
-          <p:cNvPr id="28" name="Table 0"/>
+          <p:cNvPr id="30" name="Table 0"/>
           <p:cNvGraphicFramePr>
             <a:graphicFrameLocks noGrp="1"/>
           </p:cNvGraphicFramePr>
@@ -17685,7 +18827,7 @@
                 <a:ea typeface="Malgun Gothic" pitchFamily="34" charset="-122"/>
                 <a:cs typeface="Malgun Gothic" pitchFamily="34" charset="-120"/>
               </a:rPr>
-              <a:t>규칙 · War Room · 감사 로그 · 자동실행 · 자산 대장 (12~16쪽)</a:t>
+              <a:t>규칙 · War Room · 프로젝트·KPI 대시보드 · 감사 로그 · 자동실행 · 자산 대장 (12~18쪽)</a:t>
             </a:r>
             <a:endParaRPr lang="en-US" sz="1600" dirty="0"/>
           </a:p>
@@ -17779,7 +18921,7 @@
                 <a:ea typeface="Malgun Gothic" pitchFamily="34" charset="-122"/>
                 <a:cs typeface="Malgun Gothic" pitchFamily="34" charset="-120"/>
               </a:rPr>
-              <a:t>온보딩 설정 · 계정 관리 · 배치 실행 · 과금 · 체험 신청 관리 · Odoo 연결 · 서비스 상태 · 체험 신청 폼 (17~24쪽)</a:t>
+              <a:t>온보딩 설정 · 계정 관리 · 배치 실행 · 과금 · 체험 신청 관리 · Odoo 연결 · 서비스 상태 · 체험 신청 폼 (19~26쪽)</a:t>
             </a:r>
             <a:endParaRPr lang="en-US" sz="1600" dirty="0"/>
           </a:p>
@@ -17873,7 +19015,7 @@
                 <a:ea typeface="Malgun Gothic" pitchFamily="34" charset="-122"/>
                 <a:cs typeface="Malgun Gothic" pitchFamily="34" charset="-120"/>
               </a:rPr>
-              <a:t>일·주·월 체크리스트 (25쪽)</a:t>
+              <a:t>일·주·월 체크리스트 (27쪽)</a:t>
             </a:r>
             <a:endParaRPr lang="en-US" sz="1600" dirty="0"/>
           </a:p>
@@ -17967,7 +19109,7 @@
                 <a:ea typeface="Malgun Gothic" pitchFamily="34" charset="-122"/>
                 <a:cs typeface="Malgun Gothic" pitchFamily="34" charset="-120"/>
               </a:rPr>
-              <a:t>등급별 대응 · 백업/복구 · 저장소 상태 (26~27쪽)</a:t>
+              <a:t>등급별 대응 · 백업/복구 · 저장소 상태 (28~29쪽)</a:t>
             </a:r>
             <a:endParaRPr lang="en-US" sz="1600" dirty="0"/>
           </a:p>
